--- a/tests/corpus/pptx/generated/text-metrics.pptx
+++ b/tests/corpus/pptx/generated/text-metrics.pptx
@@ -153,7 +153,7 @@
           <p:cNvPr id="2" name="Titel 1">
             <a:extLst>
               <a:ext uri="{FF2B5EF4-FFF2-40B4-BE49-F238E27FC236}">
-                <a16:creationId xmlns:a16="http://schemas.microsoft.com/office/drawing/2014/main" id="{7D611594-7CB2-5820-CD54-04D09C3CB36E}"/>
+                <a16:creationId xmlns:a16="http://schemas.microsoft.com/office/drawing/2014/main" id="{E067CB8B-F1A5-C48E-916B-4125B565E22F}"/>
               </a:ext>
             </a:extLst>
           </p:cNvPr>
@@ -190,7 +190,7 @@
           <p:cNvPr id="3" name="Untertitel 2">
             <a:extLst>
               <a:ext uri="{FF2B5EF4-FFF2-40B4-BE49-F238E27FC236}">
-                <a16:creationId xmlns:a16="http://schemas.microsoft.com/office/drawing/2014/main" id="{36FC9C98-42CC-E353-667B-E3BEF66CF71C}"/>
+                <a16:creationId xmlns:a16="http://schemas.microsoft.com/office/drawing/2014/main" id="{B5EAE6B0-EAC2-3F1F-8220-AD732B873C6B}"/>
               </a:ext>
             </a:extLst>
           </p:cNvPr>
@@ -260,7 +260,7 @@
           <p:cNvPr id="4" name="Datumsplatzhalter 3">
             <a:extLst>
               <a:ext uri="{FF2B5EF4-FFF2-40B4-BE49-F238E27FC236}">
-                <a16:creationId xmlns:a16="http://schemas.microsoft.com/office/drawing/2014/main" id="{CC9D3695-76AE-DF3C-7FB7-073F5A228D4C}"/>
+                <a16:creationId xmlns:a16="http://schemas.microsoft.com/office/drawing/2014/main" id="{C7DA375C-E4D4-9D32-D7F8-8A00ADF3C534}"/>
               </a:ext>
             </a:extLst>
           </p:cNvPr>
@@ -276,7 +276,7 @@
           <a:bodyPr/>
           <a:lstStyle/>
           <a:p>
-            <a:fld id="{023F5435-2549-4D64-A39E-BB20B0E2187A}" type="datetimeFigureOut">
+            <a:fld id="{D4E4E22E-3ABD-487B-A461-F35064D7E1CB}" type="datetimeFigureOut">
               <a:rPr lang="de-DE" smtClean="0"/>
               <a:t>08.10.2026</a:t>
             </a:fld>
@@ -289,7 +289,7 @@
           <p:cNvPr id="5" name="Fußzeilenplatzhalter 4">
             <a:extLst>
               <a:ext uri="{FF2B5EF4-FFF2-40B4-BE49-F238E27FC236}">
-                <a16:creationId xmlns:a16="http://schemas.microsoft.com/office/drawing/2014/main" id="{8AC554BC-F0B4-4AE5-4CAA-CF7551C732EF}"/>
+                <a16:creationId xmlns:a16="http://schemas.microsoft.com/office/drawing/2014/main" id="{928C4502-9F4D-BF31-C561-88F8A35EA8AD}"/>
               </a:ext>
             </a:extLst>
           </p:cNvPr>
@@ -314,7 +314,7 @@
           <p:cNvPr id="6" name="Foliennummernplatzhalter 5">
             <a:extLst>
               <a:ext uri="{FF2B5EF4-FFF2-40B4-BE49-F238E27FC236}">
-                <a16:creationId xmlns:a16="http://schemas.microsoft.com/office/drawing/2014/main" id="{20030204-099F-8808-F7FF-65DE212EAC75}"/>
+                <a16:creationId xmlns:a16="http://schemas.microsoft.com/office/drawing/2014/main" id="{CE2C9061-36C5-2F3C-9B4E-4DB56F36EAD4}"/>
               </a:ext>
             </a:extLst>
           </p:cNvPr>
@@ -330,7 +330,7 @@
           <a:bodyPr/>
           <a:lstStyle/>
           <a:p>
-            <a:fld id="{27F76E8D-7EB0-4433-A98C-8021586EAF07}" type="slidenum">
+            <a:fld id="{5D22E049-7081-4061-85D4-497D056D5297}" type="slidenum">
               <a:rPr lang="de-DE" smtClean="0"/>
               <a:t>‹Nr.›</a:t>
             </a:fld>
@@ -341,7 +341,7 @@
     </p:spTree>
     <p:extLst>
       <p:ext uri="{BB962C8B-B14F-4D97-AF65-F5344CB8AC3E}">
-        <p14:creationId xmlns:p14="http://schemas.microsoft.com/office/powerpoint/2010/main" val="4009680786"/>
+        <p14:creationId xmlns:p14="http://schemas.microsoft.com/office/powerpoint/2010/main" val="1226326884"/>
       </p:ext>
     </p:extLst>
   </p:cSld>
@@ -373,7 +373,7 @@
           <p:cNvPr id="2" name="Titel 1">
             <a:extLst>
               <a:ext uri="{FF2B5EF4-FFF2-40B4-BE49-F238E27FC236}">
-                <a16:creationId xmlns:a16="http://schemas.microsoft.com/office/drawing/2014/main" id="{4FA91FE1-59FC-9300-3752-84AEAADA334E}"/>
+                <a16:creationId xmlns:a16="http://schemas.microsoft.com/office/drawing/2014/main" id="{29F2099F-0C36-7EC7-CB65-457FA6DE8A11}"/>
               </a:ext>
             </a:extLst>
           </p:cNvPr>
@@ -401,7 +401,7 @@
           <p:cNvPr id="3" name="Vertikaler Textplatzhalter 2">
             <a:extLst>
               <a:ext uri="{FF2B5EF4-FFF2-40B4-BE49-F238E27FC236}">
-                <a16:creationId xmlns:a16="http://schemas.microsoft.com/office/drawing/2014/main" id="{FA09E2D0-0F89-1BA8-03E2-D531A81A0680}"/>
+                <a16:creationId xmlns:a16="http://schemas.microsoft.com/office/drawing/2014/main" id="{59A6749A-EF8F-54BE-EC35-FB7DF7A00C85}"/>
               </a:ext>
             </a:extLst>
           </p:cNvPr>
@@ -458,7 +458,7 @@
           <p:cNvPr id="4" name="Datumsplatzhalter 3">
             <a:extLst>
               <a:ext uri="{FF2B5EF4-FFF2-40B4-BE49-F238E27FC236}">
-                <a16:creationId xmlns:a16="http://schemas.microsoft.com/office/drawing/2014/main" id="{F4A8C829-0F88-37AC-7CA8-F90B4D91F8B7}"/>
+                <a16:creationId xmlns:a16="http://schemas.microsoft.com/office/drawing/2014/main" id="{177D9B3C-01F2-BBD2-EF30-BDFD5B3FC8BA}"/>
               </a:ext>
             </a:extLst>
           </p:cNvPr>
@@ -474,7 +474,7 @@
           <a:bodyPr/>
           <a:lstStyle/>
           <a:p>
-            <a:fld id="{023F5435-2549-4D64-A39E-BB20B0E2187A}" type="datetimeFigureOut">
+            <a:fld id="{D4E4E22E-3ABD-487B-A461-F35064D7E1CB}" type="datetimeFigureOut">
               <a:rPr lang="de-DE" smtClean="0"/>
               <a:t>08.10.2026</a:t>
             </a:fld>
@@ -487,7 +487,7 @@
           <p:cNvPr id="5" name="Fußzeilenplatzhalter 4">
             <a:extLst>
               <a:ext uri="{FF2B5EF4-FFF2-40B4-BE49-F238E27FC236}">
-                <a16:creationId xmlns:a16="http://schemas.microsoft.com/office/drawing/2014/main" id="{12C0BCEB-0DC5-2585-0D78-610A2954F4C6}"/>
+                <a16:creationId xmlns:a16="http://schemas.microsoft.com/office/drawing/2014/main" id="{D5F07461-5ED8-E6BA-F6C6-0AB616A8B6FF}"/>
               </a:ext>
             </a:extLst>
           </p:cNvPr>
@@ -512,7 +512,7 @@
           <p:cNvPr id="6" name="Foliennummernplatzhalter 5">
             <a:extLst>
               <a:ext uri="{FF2B5EF4-FFF2-40B4-BE49-F238E27FC236}">
-                <a16:creationId xmlns:a16="http://schemas.microsoft.com/office/drawing/2014/main" id="{36D9B773-7736-AE82-E80E-E674A673EE1F}"/>
+                <a16:creationId xmlns:a16="http://schemas.microsoft.com/office/drawing/2014/main" id="{F0557114-ECD7-268E-DD0B-2AB7C815968B}"/>
               </a:ext>
             </a:extLst>
           </p:cNvPr>
@@ -528,7 +528,7 @@
           <a:bodyPr/>
           <a:lstStyle/>
           <a:p>
-            <a:fld id="{27F76E8D-7EB0-4433-A98C-8021586EAF07}" type="slidenum">
+            <a:fld id="{5D22E049-7081-4061-85D4-497D056D5297}" type="slidenum">
               <a:rPr lang="de-DE" smtClean="0"/>
               <a:t>‹Nr.›</a:t>
             </a:fld>
@@ -539,7 +539,7 @@
     </p:spTree>
     <p:extLst>
       <p:ext uri="{BB962C8B-B14F-4D97-AF65-F5344CB8AC3E}">
-        <p14:creationId xmlns:p14="http://schemas.microsoft.com/office/powerpoint/2010/main" val="337341452"/>
+        <p14:creationId xmlns:p14="http://schemas.microsoft.com/office/powerpoint/2010/main" val="474190913"/>
       </p:ext>
     </p:extLst>
   </p:cSld>
@@ -571,7 +571,7 @@
           <p:cNvPr id="2" name="Vertikaler Titel 1">
             <a:extLst>
               <a:ext uri="{FF2B5EF4-FFF2-40B4-BE49-F238E27FC236}">
-                <a16:creationId xmlns:a16="http://schemas.microsoft.com/office/drawing/2014/main" id="{3AACD90C-FA06-AD0C-AA17-55A11E903658}"/>
+                <a16:creationId xmlns:a16="http://schemas.microsoft.com/office/drawing/2014/main" id="{E9BBA29B-2E78-355B-421C-D79A0365DAC7}"/>
               </a:ext>
             </a:extLst>
           </p:cNvPr>
@@ -604,7 +604,7 @@
           <p:cNvPr id="3" name="Vertikaler Textplatzhalter 2">
             <a:extLst>
               <a:ext uri="{FF2B5EF4-FFF2-40B4-BE49-F238E27FC236}">
-                <a16:creationId xmlns:a16="http://schemas.microsoft.com/office/drawing/2014/main" id="{17473DE6-6BD3-8CFB-A5DB-36F986F0322E}"/>
+                <a16:creationId xmlns:a16="http://schemas.microsoft.com/office/drawing/2014/main" id="{03299046-ED3F-9D3B-C502-C60EA84A393F}"/>
               </a:ext>
             </a:extLst>
           </p:cNvPr>
@@ -666,7 +666,7 @@
           <p:cNvPr id="4" name="Datumsplatzhalter 3">
             <a:extLst>
               <a:ext uri="{FF2B5EF4-FFF2-40B4-BE49-F238E27FC236}">
-                <a16:creationId xmlns:a16="http://schemas.microsoft.com/office/drawing/2014/main" id="{6F07F986-3D3E-1032-3E0B-81C409CD1552}"/>
+                <a16:creationId xmlns:a16="http://schemas.microsoft.com/office/drawing/2014/main" id="{EF4D55B0-2F2F-15D8-46EA-9AD31C4E053E}"/>
               </a:ext>
             </a:extLst>
           </p:cNvPr>
@@ -682,7 +682,7 @@
           <a:bodyPr/>
           <a:lstStyle/>
           <a:p>
-            <a:fld id="{023F5435-2549-4D64-A39E-BB20B0E2187A}" type="datetimeFigureOut">
+            <a:fld id="{D4E4E22E-3ABD-487B-A461-F35064D7E1CB}" type="datetimeFigureOut">
               <a:rPr lang="de-DE" smtClean="0"/>
               <a:t>08.10.2026</a:t>
             </a:fld>
@@ -695,7 +695,7 @@
           <p:cNvPr id="5" name="Fußzeilenplatzhalter 4">
             <a:extLst>
               <a:ext uri="{FF2B5EF4-FFF2-40B4-BE49-F238E27FC236}">
-                <a16:creationId xmlns:a16="http://schemas.microsoft.com/office/drawing/2014/main" id="{3D558442-6689-0D42-0EDB-76C5637D2D7F}"/>
+                <a16:creationId xmlns:a16="http://schemas.microsoft.com/office/drawing/2014/main" id="{A186189B-204D-218A-7905-91AF840A4CF3}"/>
               </a:ext>
             </a:extLst>
           </p:cNvPr>
@@ -720,7 +720,7 @@
           <p:cNvPr id="6" name="Foliennummernplatzhalter 5">
             <a:extLst>
               <a:ext uri="{FF2B5EF4-FFF2-40B4-BE49-F238E27FC236}">
-                <a16:creationId xmlns:a16="http://schemas.microsoft.com/office/drawing/2014/main" id="{FBB01155-B14D-1C09-AF2B-294AC11B4BD4}"/>
+                <a16:creationId xmlns:a16="http://schemas.microsoft.com/office/drawing/2014/main" id="{8E40098D-015D-F232-97CD-F6FC32A5D8FA}"/>
               </a:ext>
             </a:extLst>
           </p:cNvPr>
@@ -736,7 +736,7 @@
           <a:bodyPr/>
           <a:lstStyle/>
           <a:p>
-            <a:fld id="{27F76E8D-7EB0-4433-A98C-8021586EAF07}" type="slidenum">
+            <a:fld id="{5D22E049-7081-4061-85D4-497D056D5297}" type="slidenum">
               <a:rPr lang="de-DE" smtClean="0"/>
               <a:t>‹Nr.›</a:t>
             </a:fld>
@@ -747,7 +747,7 @@
     </p:spTree>
     <p:extLst>
       <p:ext uri="{BB962C8B-B14F-4D97-AF65-F5344CB8AC3E}">
-        <p14:creationId xmlns:p14="http://schemas.microsoft.com/office/powerpoint/2010/main" val="3431862834"/>
+        <p14:creationId xmlns:p14="http://schemas.microsoft.com/office/powerpoint/2010/main" val="3361106856"/>
       </p:ext>
     </p:extLst>
   </p:cSld>
@@ -779,7 +779,7 @@
           <p:cNvPr id="2" name="Titel 1">
             <a:extLst>
               <a:ext uri="{FF2B5EF4-FFF2-40B4-BE49-F238E27FC236}">
-                <a16:creationId xmlns:a16="http://schemas.microsoft.com/office/drawing/2014/main" id="{4A676252-DA11-6756-4A18-C892517872E0}"/>
+                <a16:creationId xmlns:a16="http://schemas.microsoft.com/office/drawing/2014/main" id="{371FCB8D-D9E3-8841-84CF-C8BE8D86BC5A}"/>
               </a:ext>
             </a:extLst>
           </p:cNvPr>
@@ -807,7 +807,7 @@
           <p:cNvPr id="3" name="Inhaltsplatzhalter 2">
             <a:extLst>
               <a:ext uri="{FF2B5EF4-FFF2-40B4-BE49-F238E27FC236}">
-                <a16:creationId xmlns:a16="http://schemas.microsoft.com/office/drawing/2014/main" id="{F43DA748-E922-285D-73DF-B950B984922E}"/>
+                <a16:creationId xmlns:a16="http://schemas.microsoft.com/office/drawing/2014/main" id="{ECC77E8D-3236-3B12-615C-85212CED1D8A}"/>
               </a:ext>
             </a:extLst>
           </p:cNvPr>
@@ -864,7 +864,7 @@
           <p:cNvPr id="4" name="Datumsplatzhalter 3">
             <a:extLst>
               <a:ext uri="{FF2B5EF4-FFF2-40B4-BE49-F238E27FC236}">
-                <a16:creationId xmlns:a16="http://schemas.microsoft.com/office/drawing/2014/main" id="{524B29EE-B323-FD18-DA7B-59F01EC7A3C7}"/>
+                <a16:creationId xmlns:a16="http://schemas.microsoft.com/office/drawing/2014/main" id="{7DF20303-685F-70DA-F418-F8A7AD74C1CD}"/>
               </a:ext>
             </a:extLst>
           </p:cNvPr>
@@ -880,7 +880,7 @@
           <a:bodyPr/>
           <a:lstStyle/>
           <a:p>
-            <a:fld id="{023F5435-2549-4D64-A39E-BB20B0E2187A}" type="datetimeFigureOut">
+            <a:fld id="{D4E4E22E-3ABD-487B-A461-F35064D7E1CB}" type="datetimeFigureOut">
               <a:rPr lang="de-DE" smtClean="0"/>
               <a:t>08.10.2026</a:t>
             </a:fld>
@@ -893,7 +893,7 @@
           <p:cNvPr id="5" name="Fußzeilenplatzhalter 4">
             <a:extLst>
               <a:ext uri="{FF2B5EF4-FFF2-40B4-BE49-F238E27FC236}">
-                <a16:creationId xmlns:a16="http://schemas.microsoft.com/office/drawing/2014/main" id="{DEF0D161-FC87-3F0D-FF20-B9617ADC60DB}"/>
+                <a16:creationId xmlns:a16="http://schemas.microsoft.com/office/drawing/2014/main" id="{00B5B9E8-2BBA-1AFA-C21F-2373451EEDC2}"/>
               </a:ext>
             </a:extLst>
           </p:cNvPr>
@@ -918,7 +918,7 @@
           <p:cNvPr id="6" name="Foliennummernplatzhalter 5">
             <a:extLst>
               <a:ext uri="{FF2B5EF4-FFF2-40B4-BE49-F238E27FC236}">
-                <a16:creationId xmlns:a16="http://schemas.microsoft.com/office/drawing/2014/main" id="{8150D557-64C6-8F08-5F4D-95262D9BF276}"/>
+                <a16:creationId xmlns:a16="http://schemas.microsoft.com/office/drawing/2014/main" id="{F7DF5646-8B72-0FC9-2A86-65B4F524FB08}"/>
               </a:ext>
             </a:extLst>
           </p:cNvPr>
@@ -934,7 +934,7 @@
           <a:bodyPr/>
           <a:lstStyle/>
           <a:p>
-            <a:fld id="{27F76E8D-7EB0-4433-A98C-8021586EAF07}" type="slidenum">
+            <a:fld id="{5D22E049-7081-4061-85D4-497D056D5297}" type="slidenum">
               <a:rPr lang="de-DE" smtClean="0"/>
               <a:t>‹Nr.›</a:t>
             </a:fld>
@@ -945,7 +945,7 @@
     </p:spTree>
     <p:extLst>
       <p:ext uri="{BB962C8B-B14F-4D97-AF65-F5344CB8AC3E}">
-        <p14:creationId xmlns:p14="http://schemas.microsoft.com/office/powerpoint/2010/main" val="3100676095"/>
+        <p14:creationId xmlns:p14="http://schemas.microsoft.com/office/powerpoint/2010/main" val="1856438465"/>
       </p:ext>
     </p:extLst>
   </p:cSld>
@@ -977,7 +977,7 @@
           <p:cNvPr id="2" name="Titel 1">
             <a:extLst>
               <a:ext uri="{FF2B5EF4-FFF2-40B4-BE49-F238E27FC236}">
-                <a16:creationId xmlns:a16="http://schemas.microsoft.com/office/drawing/2014/main" id="{C6B820D5-D5D7-8BEE-3BF7-13F9E2ED8AB4}"/>
+                <a16:creationId xmlns:a16="http://schemas.microsoft.com/office/drawing/2014/main" id="{7A1AC5D1-1B27-F382-6BEC-D348C62320B8}"/>
               </a:ext>
             </a:extLst>
           </p:cNvPr>
@@ -1014,7 +1014,7 @@
           <p:cNvPr id="3" name="Textplatzhalter 2">
             <a:extLst>
               <a:ext uri="{FF2B5EF4-FFF2-40B4-BE49-F238E27FC236}">
-                <a16:creationId xmlns:a16="http://schemas.microsoft.com/office/drawing/2014/main" id="{0FB58CEC-778C-5D41-E05E-4D636485FFF7}"/>
+                <a16:creationId xmlns:a16="http://schemas.microsoft.com/office/drawing/2014/main" id="{2D00D32A-181C-F945-262E-2062E70D1AEA}"/>
               </a:ext>
             </a:extLst>
           </p:cNvPr>
@@ -1139,7 +1139,7 @@
           <p:cNvPr id="4" name="Datumsplatzhalter 3">
             <a:extLst>
               <a:ext uri="{FF2B5EF4-FFF2-40B4-BE49-F238E27FC236}">
-                <a16:creationId xmlns:a16="http://schemas.microsoft.com/office/drawing/2014/main" id="{7289F325-EC6A-DE51-6D92-1C2EB9CBC4BC}"/>
+                <a16:creationId xmlns:a16="http://schemas.microsoft.com/office/drawing/2014/main" id="{9121DDEC-6B48-7F34-45FA-A441480348B0}"/>
               </a:ext>
             </a:extLst>
           </p:cNvPr>
@@ -1155,7 +1155,7 @@
           <a:bodyPr/>
           <a:lstStyle/>
           <a:p>
-            <a:fld id="{023F5435-2549-4D64-A39E-BB20B0E2187A}" type="datetimeFigureOut">
+            <a:fld id="{D4E4E22E-3ABD-487B-A461-F35064D7E1CB}" type="datetimeFigureOut">
               <a:rPr lang="de-DE" smtClean="0"/>
               <a:t>08.10.2026</a:t>
             </a:fld>
@@ -1168,7 +1168,7 @@
           <p:cNvPr id="5" name="Fußzeilenplatzhalter 4">
             <a:extLst>
               <a:ext uri="{FF2B5EF4-FFF2-40B4-BE49-F238E27FC236}">
-                <a16:creationId xmlns:a16="http://schemas.microsoft.com/office/drawing/2014/main" id="{4CAB369A-0F2A-DB08-8B70-858CE04EB89F}"/>
+                <a16:creationId xmlns:a16="http://schemas.microsoft.com/office/drawing/2014/main" id="{391EC7A3-6F43-5C79-126A-3DD9F319BE1C}"/>
               </a:ext>
             </a:extLst>
           </p:cNvPr>
@@ -1193,7 +1193,7 @@
           <p:cNvPr id="6" name="Foliennummernplatzhalter 5">
             <a:extLst>
               <a:ext uri="{FF2B5EF4-FFF2-40B4-BE49-F238E27FC236}">
-                <a16:creationId xmlns:a16="http://schemas.microsoft.com/office/drawing/2014/main" id="{7C61EF26-54E9-514E-4ED4-BDE25DD3633C}"/>
+                <a16:creationId xmlns:a16="http://schemas.microsoft.com/office/drawing/2014/main" id="{9204D2D0-5C35-381E-16C5-8F8B9BCBEC71}"/>
               </a:ext>
             </a:extLst>
           </p:cNvPr>
@@ -1209,7 +1209,7 @@
           <a:bodyPr/>
           <a:lstStyle/>
           <a:p>
-            <a:fld id="{27F76E8D-7EB0-4433-A98C-8021586EAF07}" type="slidenum">
+            <a:fld id="{5D22E049-7081-4061-85D4-497D056D5297}" type="slidenum">
               <a:rPr lang="de-DE" smtClean="0"/>
               <a:t>‹Nr.›</a:t>
             </a:fld>
@@ -1220,7 +1220,7 @@
     </p:spTree>
     <p:extLst>
       <p:ext uri="{BB962C8B-B14F-4D97-AF65-F5344CB8AC3E}">
-        <p14:creationId xmlns:p14="http://schemas.microsoft.com/office/powerpoint/2010/main" val="2953612843"/>
+        <p14:creationId xmlns:p14="http://schemas.microsoft.com/office/powerpoint/2010/main" val="588955543"/>
       </p:ext>
     </p:extLst>
   </p:cSld>
@@ -1252,7 +1252,7 @@
           <p:cNvPr id="2" name="Titel 1">
             <a:extLst>
               <a:ext uri="{FF2B5EF4-FFF2-40B4-BE49-F238E27FC236}">
-                <a16:creationId xmlns:a16="http://schemas.microsoft.com/office/drawing/2014/main" id="{9E17581E-A99E-1F4F-6C68-A1F4A47B8F62}"/>
+                <a16:creationId xmlns:a16="http://schemas.microsoft.com/office/drawing/2014/main" id="{0189ABC3-CDB3-318C-BD76-E7936354B9CC}"/>
               </a:ext>
             </a:extLst>
           </p:cNvPr>
@@ -1280,7 +1280,7 @@
           <p:cNvPr id="3" name="Inhaltsplatzhalter 2">
             <a:extLst>
               <a:ext uri="{FF2B5EF4-FFF2-40B4-BE49-F238E27FC236}">
-                <a16:creationId xmlns:a16="http://schemas.microsoft.com/office/drawing/2014/main" id="{578921D6-F298-1722-828D-457EFB7572A2}"/>
+                <a16:creationId xmlns:a16="http://schemas.microsoft.com/office/drawing/2014/main" id="{16383155-9338-4E16-A99B-A3A33CEF8D23}"/>
               </a:ext>
             </a:extLst>
           </p:cNvPr>
@@ -1342,7 +1342,7 @@
           <p:cNvPr id="4" name="Inhaltsplatzhalter 3">
             <a:extLst>
               <a:ext uri="{FF2B5EF4-FFF2-40B4-BE49-F238E27FC236}">
-                <a16:creationId xmlns:a16="http://schemas.microsoft.com/office/drawing/2014/main" id="{46FA635D-FA6A-7FB7-B694-4F32D4EC607B}"/>
+                <a16:creationId xmlns:a16="http://schemas.microsoft.com/office/drawing/2014/main" id="{14CF9DC0-9C8B-2615-1079-93DBDB847A28}"/>
               </a:ext>
             </a:extLst>
           </p:cNvPr>
@@ -1404,7 +1404,7 @@
           <p:cNvPr id="5" name="Datumsplatzhalter 4">
             <a:extLst>
               <a:ext uri="{FF2B5EF4-FFF2-40B4-BE49-F238E27FC236}">
-                <a16:creationId xmlns:a16="http://schemas.microsoft.com/office/drawing/2014/main" id="{F76BF591-B321-ADEA-0F3E-D62BA3DBB2AF}"/>
+                <a16:creationId xmlns:a16="http://schemas.microsoft.com/office/drawing/2014/main" id="{6377DD6A-4C1B-0A46-3571-BB4210EBDA6B}"/>
               </a:ext>
             </a:extLst>
           </p:cNvPr>
@@ -1420,7 +1420,7 @@
           <a:bodyPr/>
           <a:lstStyle/>
           <a:p>
-            <a:fld id="{023F5435-2549-4D64-A39E-BB20B0E2187A}" type="datetimeFigureOut">
+            <a:fld id="{D4E4E22E-3ABD-487B-A461-F35064D7E1CB}" type="datetimeFigureOut">
               <a:rPr lang="de-DE" smtClean="0"/>
               <a:t>08.10.2026</a:t>
             </a:fld>
@@ -1433,7 +1433,7 @@
           <p:cNvPr id="6" name="Fußzeilenplatzhalter 5">
             <a:extLst>
               <a:ext uri="{FF2B5EF4-FFF2-40B4-BE49-F238E27FC236}">
-                <a16:creationId xmlns:a16="http://schemas.microsoft.com/office/drawing/2014/main" id="{0909C812-AEF3-9A21-DFCE-88065D0F7004}"/>
+                <a16:creationId xmlns:a16="http://schemas.microsoft.com/office/drawing/2014/main" id="{EDFBF85C-FC7F-4B92-7F05-F50E9F9A0F4E}"/>
               </a:ext>
             </a:extLst>
           </p:cNvPr>
@@ -1458,7 +1458,7 @@
           <p:cNvPr id="7" name="Foliennummernplatzhalter 6">
             <a:extLst>
               <a:ext uri="{FF2B5EF4-FFF2-40B4-BE49-F238E27FC236}">
-                <a16:creationId xmlns:a16="http://schemas.microsoft.com/office/drawing/2014/main" id="{FDB4659E-E520-1FC9-BC10-23B6D132D912}"/>
+                <a16:creationId xmlns:a16="http://schemas.microsoft.com/office/drawing/2014/main" id="{A2187BEB-0ED1-F94E-1E27-DADCD094B6C2}"/>
               </a:ext>
             </a:extLst>
           </p:cNvPr>
@@ -1474,7 +1474,7 @@
           <a:bodyPr/>
           <a:lstStyle/>
           <a:p>
-            <a:fld id="{27F76E8D-7EB0-4433-A98C-8021586EAF07}" type="slidenum">
+            <a:fld id="{5D22E049-7081-4061-85D4-497D056D5297}" type="slidenum">
               <a:rPr lang="de-DE" smtClean="0"/>
               <a:t>‹Nr.›</a:t>
             </a:fld>
@@ -1485,7 +1485,7 @@
     </p:spTree>
     <p:extLst>
       <p:ext uri="{BB962C8B-B14F-4D97-AF65-F5344CB8AC3E}">
-        <p14:creationId xmlns:p14="http://schemas.microsoft.com/office/powerpoint/2010/main" val="3694803946"/>
+        <p14:creationId xmlns:p14="http://schemas.microsoft.com/office/powerpoint/2010/main" val="440060950"/>
       </p:ext>
     </p:extLst>
   </p:cSld>
@@ -1517,7 +1517,7 @@
           <p:cNvPr id="2" name="Titel 1">
             <a:extLst>
               <a:ext uri="{FF2B5EF4-FFF2-40B4-BE49-F238E27FC236}">
-                <a16:creationId xmlns:a16="http://schemas.microsoft.com/office/drawing/2014/main" id="{6DC9B07D-73DE-5A4A-65B5-C5BEF29FC672}"/>
+                <a16:creationId xmlns:a16="http://schemas.microsoft.com/office/drawing/2014/main" id="{AB50B8F5-8BC9-5FC0-74B4-FBB75FAFDD94}"/>
               </a:ext>
             </a:extLst>
           </p:cNvPr>
@@ -1550,7 +1550,7 @@
           <p:cNvPr id="3" name="Textplatzhalter 2">
             <a:extLst>
               <a:ext uri="{FF2B5EF4-FFF2-40B4-BE49-F238E27FC236}">
-                <a16:creationId xmlns:a16="http://schemas.microsoft.com/office/drawing/2014/main" id="{B61AECB4-B409-A74F-9004-95144E532E81}"/>
+                <a16:creationId xmlns:a16="http://schemas.microsoft.com/office/drawing/2014/main" id="{FACDE2E7-B3E8-3638-BD64-4CB12C09A0FE}"/>
               </a:ext>
             </a:extLst>
           </p:cNvPr>
@@ -1621,7 +1621,7 @@
           <p:cNvPr id="4" name="Inhaltsplatzhalter 3">
             <a:extLst>
               <a:ext uri="{FF2B5EF4-FFF2-40B4-BE49-F238E27FC236}">
-                <a16:creationId xmlns:a16="http://schemas.microsoft.com/office/drawing/2014/main" id="{F5075292-1A3A-A85D-C3B8-FA2CC6B2987A}"/>
+                <a16:creationId xmlns:a16="http://schemas.microsoft.com/office/drawing/2014/main" id="{24544D51-5EC5-D467-F932-884EF735540F}"/>
               </a:ext>
             </a:extLst>
           </p:cNvPr>
@@ -1683,7 +1683,7 @@
           <p:cNvPr id="5" name="Textplatzhalter 4">
             <a:extLst>
               <a:ext uri="{FF2B5EF4-FFF2-40B4-BE49-F238E27FC236}">
-                <a16:creationId xmlns:a16="http://schemas.microsoft.com/office/drawing/2014/main" id="{FF303CB1-5FF9-DCA4-DFA9-71FD9436269D}"/>
+                <a16:creationId xmlns:a16="http://schemas.microsoft.com/office/drawing/2014/main" id="{E3CA52E7-7274-E099-3949-4AA7ACC84CFB}"/>
               </a:ext>
             </a:extLst>
           </p:cNvPr>
@@ -1754,7 +1754,7 @@
           <p:cNvPr id="6" name="Inhaltsplatzhalter 5">
             <a:extLst>
               <a:ext uri="{FF2B5EF4-FFF2-40B4-BE49-F238E27FC236}">
-                <a16:creationId xmlns:a16="http://schemas.microsoft.com/office/drawing/2014/main" id="{37638636-AF7E-EB47-1F95-4451C1D735E5}"/>
+                <a16:creationId xmlns:a16="http://schemas.microsoft.com/office/drawing/2014/main" id="{A88F5EE6-17CB-4346-0C09-A0ECDBF36FB3}"/>
               </a:ext>
             </a:extLst>
           </p:cNvPr>
@@ -1816,7 +1816,7 @@
           <p:cNvPr id="7" name="Datumsplatzhalter 6">
             <a:extLst>
               <a:ext uri="{FF2B5EF4-FFF2-40B4-BE49-F238E27FC236}">
-                <a16:creationId xmlns:a16="http://schemas.microsoft.com/office/drawing/2014/main" id="{4FFB5D49-C301-21C2-6E61-B63E7A0AD879}"/>
+                <a16:creationId xmlns:a16="http://schemas.microsoft.com/office/drawing/2014/main" id="{2682588D-BAEB-4ABC-3393-7B45C00A99F0}"/>
               </a:ext>
             </a:extLst>
           </p:cNvPr>
@@ -1832,7 +1832,7 @@
           <a:bodyPr/>
           <a:lstStyle/>
           <a:p>
-            <a:fld id="{023F5435-2549-4D64-A39E-BB20B0E2187A}" type="datetimeFigureOut">
+            <a:fld id="{D4E4E22E-3ABD-487B-A461-F35064D7E1CB}" type="datetimeFigureOut">
               <a:rPr lang="de-DE" smtClean="0"/>
               <a:t>08.10.2026</a:t>
             </a:fld>
@@ -1845,7 +1845,7 @@
           <p:cNvPr id="8" name="Fußzeilenplatzhalter 7">
             <a:extLst>
               <a:ext uri="{FF2B5EF4-FFF2-40B4-BE49-F238E27FC236}">
-                <a16:creationId xmlns:a16="http://schemas.microsoft.com/office/drawing/2014/main" id="{8463F688-9A85-4AF3-449A-2A685CCA033C}"/>
+                <a16:creationId xmlns:a16="http://schemas.microsoft.com/office/drawing/2014/main" id="{9A6F598A-1AFC-9509-82A0-A69B059D0A8C}"/>
               </a:ext>
             </a:extLst>
           </p:cNvPr>
@@ -1870,7 +1870,7 @@
           <p:cNvPr id="9" name="Foliennummernplatzhalter 8">
             <a:extLst>
               <a:ext uri="{FF2B5EF4-FFF2-40B4-BE49-F238E27FC236}">
-                <a16:creationId xmlns:a16="http://schemas.microsoft.com/office/drawing/2014/main" id="{3D95FF70-9B08-31A5-5D35-2323D1E75BC5}"/>
+                <a16:creationId xmlns:a16="http://schemas.microsoft.com/office/drawing/2014/main" id="{5FB40040-0D34-9EBE-18D7-F4DD463522EF}"/>
               </a:ext>
             </a:extLst>
           </p:cNvPr>
@@ -1886,7 +1886,7 @@
           <a:bodyPr/>
           <a:lstStyle/>
           <a:p>
-            <a:fld id="{27F76E8D-7EB0-4433-A98C-8021586EAF07}" type="slidenum">
+            <a:fld id="{5D22E049-7081-4061-85D4-497D056D5297}" type="slidenum">
               <a:rPr lang="de-DE" smtClean="0"/>
               <a:t>‹Nr.›</a:t>
             </a:fld>
@@ -1897,7 +1897,7 @@
     </p:spTree>
     <p:extLst>
       <p:ext uri="{BB962C8B-B14F-4D97-AF65-F5344CB8AC3E}">
-        <p14:creationId xmlns:p14="http://schemas.microsoft.com/office/powerpoint/2010/main" val="486536286"/>
+        <p14:creationId xmlns:p14="http://schemas.microsoft.com/office/powerpoint/2010/main" val="1871541680"/>
       </p:ext>
     </p:extLst>
   </p:cSld>
@@ -1929,7 +1929,7 @@
           <p:cNvPr id="2" name="Titel 1">
             <a:extLst>
               <a:ext uri="{FF2B5EF4-FFF2-40B4-BE49-F238E27FC236}">
-                <a16:creationId xmlns:a16="http://schemas.microsoft.com/office/drawing/2014/main" id="{A6F0A2F2-C60D-1BD8-6326-C59BD3E5C7BD}"/>
+                <a16:creationId xmlns:a16="http://schemas.microsoft.com/office/drawing/2014/main" id="{2ED00AB8-6AE4-7AE4-7BBB-7AEA443C6830}"/>
               </a:ext>
             </a:extLst>
           </p:cNvPr>
@@ -1957,7 +1957,7 @@
           <p:cNvPr id="3" name="Datumsplatzhalter 2">
             <a:extLst>
               <a:ext uri="{FF2B5EF4-FFF2-40B4-BE49-F238E27FC236}">
-                <a16:creationId xmlns:a16="http://schemas.microsoft.com/office/drawing/2014/main" id="{7223099C-CABA-A139-1E7A-980F5416D00B}"/>
+                <a16:creationId xmlns:a16="http://schemas.microsoft.com/office/drawing/2014/main" id="{04160252-ECB7-5D36-BF88-0A87F5ED8ACC}"/>
               </a:ext>
             </a:extLst>
           </p:cNvPr>
@@ -1973,7 +1973,7 @@
           <a:bodyPr/>
           <a:lstStyle/>
           <a:p>
-            <a:fld id="{023F5435-2549-4D64-A39E-BB20B0E2187A}" type="datetimeFigureOut">
+            <a:fld id="{D4E4E22E-3ABD-487B-A461-F35064D7E1CB}" type="datetimeFigureOut">
               <a:rPr lang="de-DE" smtClean="0"/>
               <a:t>08.10.2026</a:t>
             </a:fld>
@@ -1986,7 +1986,7 @@
           <p:cNvPr id="4" name="Fußzeilenplatzhalter 3">
             <a:extLst>
               <a:ext uri="{FF2B5EF4-FFF2-40B4-BE49-F238E27FC236}">
-                <a16:creationId xmlns:a16="http://schemas.microsoft.com/office/drawing/2014/main" id="{0878FAB9-889A-FC4E-C974-1DE96EC89D7B}"/>
+                <a16:creationId xmlns:a16="http://schemas.microsoft.com/office/drawing/2014/main" id="{DB1A3EA3-D6F5-2F90-B1B1-F6626D922B85}"/>
               </a:ext>
             </a:extLst>
           </p:cNvPr>
@@ -2011,7 +2011,7 @@
           <p:cNvPr id="5" name="Foliennummernplatzhalter 4">
             <a:extLst>
               <a:ext uri="{FF2B5EF4-FFF2-40B4-BE49-F238E27FC236}">
-                <a16:creationId xmlns:a16="http://schemas.microsoft.com/office/drawing/2014/main" id="{7CB3A467-CFAF-B848-8E75-098AD8EA04BA}"/>
+                <a16:creationId xmlns:a16="http://schemas.microsoft.com/office/drawing/2014/main" id="{A92518C7-A1CA-A851-C36A-3529003671F0}"/>
               </a:ext>
             </a:extLst>
           </p:cNvPr>
@@ -2027,7 +2027,7 @@
           <a:bodyPr/>
           <a:lstStyle/>
           <a:p>
-            <a:fld id="{27F76E8D-7EB0-4433-A98C-8021586EAF07}" type="slidenum">
+            <a:fld id="{5D22E049-7081-4061-85D4-497D056D5297}" type="slidenum">
               <a:rPr lang="de-DE" smtClean="0"/>
               <a:t>‹Nr.›</a:t>
             </a:fld>
@@ -2038,7 +2038,7 @@
     </p:spTree>
     <p:extLst>
       <p:ext uri="{BB962C8B-B14F-4D97-AF65-F5344CB8AC3E}">
-        <p14:creationId xmlns:p14="http://schemas.microsoft.com/office/powerpoint/2010/main" val="217750011"/>
+        <p14:creationId xmlns:p14="http://schemas.microsoft.com/office/powerpoint/2010/main" val="482555732"/>
       </p:ext>
     </p:extLst>
   </p:cSld>
@@ -2070,7 +2070,7 @@
           <p:cNvPr id="2" name="Datumsplatzhalter 1">
             <a:extLst>
               <a:ext uri="{FF2B5EF4-FFF2-40B4-BE49-F238E27FC236}">
-                <a16:creationId xmlns:a16="http://schemas.microsoft.com/office/drawing/2014/main" id="{4ABDBD4F-7DFA-08AD-758D-57EC9AC21A3D}"/>
+                <a16:creationId xmlns:a16="http://schemas.microsoft.com/office/drawing/2014/main" id="{6B2DFBC8-FE76-9F07-3F49-B3A3A33E1E9A}"/>
               </a:ext>
             </a:extLst>
           </p:cNvPr>
@@ -2086,7 +2086,7 @@
           <a:bodyPr/>
           <a:lstStyle/>
           <a:p>
-            <a:fld id="{023F5435-2549-4D64-A39E-BB20B0E2187A}" type="datetimeFigureOut">
+            <a:fld id="{D4E4E22E-3ABD-487B-A461-F35064D7E1CB}" type="datetimeFigureOut">
               <a:rPr lang="de-DE" smtClean="0"/>
               <a:t>08.10.2026</a:t>
             </a:fld>
@@ -2099,7 +2099,7 @@
           <p:cNvPr id="3" name="Fußzeilenplatzhalter 2">
             <a:extLst>
               <a:ext uri="{FF2B5EF4-FFF2-40B4-BE49-F238E27FC236}">
-                <a16:creationId xmlns:a16="http://schemas.microsoft.com/office/drawing/2014/main" id="{91428B3A-42FE-F70B-29CD-D57A502A4122}"/>
+                <a16:creationId xmlns:a16="http://schemas.microsoft.com/office/drawing/2014/main" id="{838FE773-F92F-0091-1526-539CD7701B1F}"/>
               </a:ext>
             </a:extLst>
           </p:cNvPr>
@@ -2124,7 +2124,7 @@
           <p:cNvPr id="4" name="Foliennummernplatzhalter 3">
             <a:extLst>
               <a:ext uri="{FF2B5EF4-FFF2-40B4-BE49-F238E27FC236}">
-                <a16:creationId xmlns:a16="http://schemas.microsoft.com/office/drawing/2014/main" id="{3FE04460-7673-0946-9738-B9F82229C4A5}"/>
+                <a16:creationId xmlns:a16="http://schemas.microsoft.com/office/drawing/2014/main" id="{EBD1BEBC-D26D-26C2-D97F-A63C3E924E67}"/>
               </a:ext>
             </a:extLst>
           </p:cNvPr>
@@ -2140,7 +2140,7 @@
           <a:bodyPr/>
           <a:lstStyle/>
           <a:p>
-            <a:fld id="{27F76E8D-7EB0-4433-A98C-8021586EAF07}" type="slidenum">
+            <a:fld id="{5D22E049-7081-4061-85D4-497D056D5297}" type="slidenum">
               <a:rPr lang="de-DE" smtClean="0"/>
               <a:t>‹Nr.›</a:t>
             </a:fld>
@@ -2151,7 +2151,7 @@
     </p:spTree>
     <p:extLst>
       <p:ext uri="{BB962C8B-B14F-4D97-AF65-F5344CB8AC3E}">
-        <p14:creationId xmlns:p14="http://schemas.microsoft.com/office/powerpoint/2010/main" val="2021837361"/>
+        <p14:creationId xmlns:p14="http://schemas.microsoft.com/office/powerpoint/2010/main" val="1992211749"/>
       </p:ext>
     </p:extLst>
   </p:cSld>
@@ -2183,7 +2183,7 @@
           <p:cNvPr id="2" name="Titel 1">
             <a:extLst>
               <a:ext uri="{FF2B5EF4-FFF2-40B4-BE49-F238E27FC236}">
-                <a16:creationId xmlns:a16="http://schemas.microsoft.com/office/drawing/2014/main" id="{0CB2BD61-1445-D72E-6F3C-633C4FC3079F}"/>
+                <a16:creationId xmlns:a16="http://schemas.microsoft.com/office/drawing/2014/main" id="{E82FD68A-617F-3AF5-A13E-1EDD6D767E84}"/>
               </a:ext>
             </a:extLst>
           </p:cNvPr>
@@ -2220,7 +2220,7 @@
           <p:cNvPr id="3" name="Inhaltsplatzhalter 2">
             <a:extLst>
               <a:ext uri="{FF2B5EF4-FFF2-40B4-BE49-F238E27FC236}">
-                <a16:creationId xmlns:a16="http://schemas.microsoft.com/office/drawing/2014/main" id="{2561532D-8E61-74BA-6A2A-69A335F85CA2}"/>
+                <a16:creationId xmlns:a16="http://schemas.microsoft.com/office/drawing/2014/main" id="{648816C8-A137-09B3-AC2D-23A2CA9BD9CE}"/>
               </a:ext>
             </a:extLst>
           </p:cNvPr>
@@ -2310,7 +2310,7 @@
           <p:cNvPr id="4" name="Textplatzhalter 3">
             <a:extLst>
               <a:ext uri="{FF2B5EF4-FFF2-40B4-BE49-F238E27FC236}">
-                <a16:creationId xmlns:a16="http://schemas.microsoft.com/office/drawing/2014/main" id="{4AC6DF9D-0FBC-22A2-6E0A-9404D6E21370}"/>
+                <a16:creationId xmlns:a16="http://schemas.microsoft.com/office/drawing/2014/main" id="{45DAD893-6D4B-721A-5879-220C771E312B}"/>
               </a:ext>
             </a:extLst>
           </p:cNvPr>
@@ -2381,7 +2381,7 @@
           <p:cNvPr id="5" name="Datumsplatzhalter 4">
             <a:extLst>
               <a:ext uri="{FF2B5EF4-FFF2-40B4-BE49-F238E27FC236}">
-                <a16:creationId xmlns:a16="http://schemas.microsoft.com/office/drawing/2014/main" id="{4A07EA18-A712-E4E0-2AC4-5DE952611C5E}"/>
+                <a16:creationId xmlns:a16="http://schemas.microsoft.com/office/drawing/2014/main" id="{3A8B6AB2-168A-B9E9-2898-CF30E9D93CB6}"/>
               </a:ext>
             </a:extLst>
           </p:cNvPr>
@@ -2397,7 +2397,7 @@
           <a:bodyPr/>
           <a:lstStyle/>
           <a:p>
-            <a:fld id="{023F5435-2549-4D64-A39E-BB20B0E2187A}" type="datetimeFigureOut">
+            <a:fld id="{D4E4E22E-3ABD-487B-A461-F35064D7E1CB}" type="datetimeFigureOut">
               <a:rPr lang="de-DE" smtClean="0"/>
               <a:t>08.10.2026</a:t>
             </a:fld>
@@ -2410,7 +2410,7 @@
           <p:cNvPr id="6" name="Fußzeilenplatzhalter 5">
             <a:extLst>
               <a:ext uri="{FF2B5EF4-FFF2-40B4-BE49-F238E27FC236}">
-                <a16:creationId xmlns:a16="http://schemas.microsoft.com/office/drawing/2014/main" id="{A72E2606-DD7C-A5E7-710D-77FB33B7810A}"/>
+                <a16:creationId xmlns:a16="http://schemas.microsoft.com/office/drawing/2014/main" id="{ABB63B66-B184-4ECA-BD1D-EAA25C3CDA6C}"/>
               </a:ext>
             </a:extLst>
           </p:cNvPr>
@@ -2435,7 +2435,7 @@
           <p:cNvPr id="7" name="Foliennummernplatzhalter 6">
             <a:extLst>
               <a:ext uri="{FF2B5EF4-FFF2-40B4-BE49-F238E27FC236}">
-                <a16:creationId xmlns:a16="http://schemas.microsoft.com/office/drawing/2014/main" id="{1290D249-7917-8450-921D-5E7CD3774A1B}"/>
+                <a16:creationId xmlns:a16="http://schemas.microsoft.com/office/drawing/2014/main" id="{E0C3AFDB-334A-9141-564D-836CC0326EA8}"/>
               </a:ext>
             </a:extLst>
           </p:cNvPr>
@@ -2451,7 +2451,7 @@
           <a:bodyPr/>
           <a:lstStyle/>
           <a:p>
-            <a:fld id="{27F76E8D-7EB0-4433-A98C-8021586EAF07}" type="slidenum">
+            <a:fld id="{5D22E049-7081-4061-85D4-497D056D5297}" type="slidenum">
               <a:rPr lang="de-DE" smtClean="0"/>
               <a:t>‹Nr.›</a:t>
             </a:fld>
@@ -2462,7 +2462,7 @@
     </p:spTree>
     <p:extLst>
       <p:ext uri="{BB962C8B-B14F-4D97-AF65-F5344CB8AC3E}">
-        <p14:creationId xmlns:p14="http://schemas.microsoft.com/office/powerpoint/2010/main" val="2523151175"/>
+        <p14:creationId xmlns:p14="http://schemas.microsoft.com/office/powerpoint/2010/main" val="2199381159"/>
       </p:ext>
     </p:extLst>
   </p:cSld>
@@ -2494,7 +2494,7 @@
           <p:cNvPr id="2" name="Titel 1">
             <a:extLst>
               <a:ext uri="{FF2B5EF4-FFF2-40B4-BE49-F238E27FC236}">
-                <a16:creationId xmlns:a16="http://schemas.microsoft.com/office/drawing/2014/main" id="{DC3FE3F7-BD51-02FF-4698-7D0B1E9EDA05}"/>
+                <a16:creationId xmlns:a16="http://schemas.microsoft.com/office/drawing/2014/main" id="{F83D0EDE-6647-DE2A-D9F5-7BF6B16FF929}"/>
               </a:ext>
             </a:extLst>
           </p:cNvPr>
@@ -2531,7 +2531,7 @@
           <p:cNvPr id="3" name="Bildplatzhalter 2">
             <a:extLst>
               <a:ext uri="{FF2B5EF4-FFF2-40B4-BE49-F238E27FC236}">
-                <a16:creationId xmlns:a16="http://schemas.microsoft.com/office/drawing/2014/main" id="{711BDDFF-9A11-CBF1-A8E1-AB5984A91853}"/>
+                <a16:creationId xmlns:a16="http://schemas.microsoft.com/office/drawing/2014/main" id="{7B20AD4D-5E1D-0C16-B3BA-D139D3EEE64B}"/>
               </a:ext>
             </a:extLst>
           </p:cNvPr>
@@ -2598,7 +2598,7 @@
           <p:cNvPr id="4" name="Textplatzhalter 3">
             <a:extLst>
               <a:ext uri="{FF2B5EF4-FFF2-40B4-BE49-F238E27FC236}">
-                <a16:creationId xmlns:a16="http://schemas.microsoft.com/office/drawing/2014/main" id="{C586A1DC-9AA7-F6B1-6739-1239A26E181C}"/>
+                <a16:creationId xmlns:a16="http://schemas.microsoft.com/office/drawing/2014/main" id="{B13A27BB-0E08-0413-AD54-0E19F2F78AAC}"/>
               </a:ext>
             </a:extLst>
           </p:cNvPr>
@@ -2669,7 +2669,7 @@
           <p:cNvPr id="5" name="Datumsplatzhalter 4">
             <a:extLst>
               <a:ext uri="{FF2B5EF4-FFF2-40B4-BE49-F238E27FC236}">
-                <a16:creationId xmlns:a16="http://schemas.microsoft.com/office/drawing/2014/main" id="{BD5325F1-1EC1-CE72-0218-BAFDAFDAD7D3}"/>
+                <a16:creationId xmlns:a16="http://schemas.microsoft.com/office/drawing/2014/main" id="{D9CED36F-3B20-5332-B9C2-3CD192C51917}"/>
               </a:ext>
             </a:extLst>
           </p:cNvPr>
@@ -2685,7 +2685,7 @@
           <a:bodyPr/>
           <a:lstStyle/>
           <a:p>
-            <a:fld id="{023F5435-2549-4D64-A39E-BB20B0E2187A}" type="datetimeFigureOut">
+            <a:fld id="{D4E4E22E-3ABD-487B-A461-F35064D7E1CB}" type="datetimeFigureOut">
               <a:rPr lang="de-DE" smtClean="0"/>
               <a:t>08.10.2026</a:t>
             </a:fld>
@@ -2698,7 +2698,7 @@
           <p:cNvPr id="6" name="Fußzeilenplatzhalter 5">
             <a:extLst>
               <a:ext uri="{FF2B5EF4-FFF2-40B4-BE49-F238E27FC236}">
-                <a16:creationId xmlns:a16="http://schemas.microsoft.com/office/drawing/2014/main" id="{2A0980C1-441D-40FF-E591-31A09CDE023A}"/>
+                <a16:creationId xmlns:a16="http://schemas.microsoft.com/office/drawing/2014/main" id="{744F75EF-6EC5-579C-CC82-0879868401ED}"/>
               </a:ext>
             </a:extLst>
           </p:cNvPr>
@@ -2723,7 +2723,7 @@
           <p:cNvPr id="7" name="Foliennummernplatzhalter 6">
             <a:extLst>
               <a:ext uri="{FF2B5EF4-FFF2-40B4-BE49-F238E27FC236}">
-                <a16:creationId xmlns:a16="http://schemas.microsoft.com/office/drawing/2014/main" id="{E22D7379-E8ED-1D0E-FF8B-E8351C56D5F5}"/>
+                <a16:creationId xmlns:a16="http://schemas.microsoft.com/office/drawing/2014/main" id="{27423568-FB20-C682-A8D5-9F62E6EDD5B9}"/>
               </a:ext>
             </a:extLst>
           </p:cNvPr>
@@ -2739,7 +2739,7 @@
           <a:bodyPr/>
           <a:lstStyle/>
           <a:p>
-            <a:fld id="{27F76E8D-7EB0-4433-A98C-8021586EAF07}" type="slidenum">
+            <a:fld id="{5D22E049-7081-4061-85D4-497D056D5297}" type="slidenum">
               <a:rPr lang="de-DE" smtClean="0"/>
               <a:t>‹Nr.›</a:t>
             </a:fld>
@@ -2750,7 +2750,7 @@
     </p:spTree>
     <p:extLst>
       <p:ext uri="{BB962C8B-B14F-4D97-AF65-F5344CB8AC3E}">
-        <p14:creationId xmlns:p14="http://schemas.microsoft.com/office/powerpoint/2010/main" val="1563148102"/>
+        <p14:creationId xmlns:p14="http://schemas.microsoft.com/office/powerpoint/2010/main" val="3521078006"/>
       </p:ext>
     </p:extLst>
   </p:cSld>
@@ -2787,7 +2787,7 @@
           <p:cNvPr id="2" name="Titelplatzhalter 1">
             <a:extLst>
               <a:ext uri="{FF2B5EF4-FFF2-40B4-BE49-F238E27FC236}">
-                <a16:creationId xmlns:a16="http://schemas.microsoft.com/office/drawing/2014/main" id="{B382ADBC-0D34-F551-0F6A-4501B1A5EC42}"/>
+                <a16:creationId xmlns:a16="http://schemas.microsoft.com/office/drawing/2014/main" id="{A0943286-451E-576D-CD0F-00BD38C48576}"/>
               </a:ext>
             </a:extLst>
           </p:cNvPr>
@@ -2825,7 +2825,7 @@
           <p:cNvPr id="3" name="Textplatzhalter 2">
             <a:extLst>
               <a:ext uri="{FF2B5EF4-FFF2-40B4-BE49-F238E27FC236}">
-                <a16:creationId xmlns:a16="http://schemas.microsoft.com/office/drawing/2014/main" id="{9846B62D-8932-83EE-5F31-E8CBE77AB31C}"/>
+                <a16:creationId xmlns:a16="http://schemas.microsoft.com/office/drawing/2014/main" id="{F3A2D561-3C23-2E69-1811-D9A3EF2B22AF}"/>
               </a:ext>
             </a:extLst>
           </p:cNvPr>
@@ -2892,7 +2892,7 @@
           <p:cNvPr id="4" name="Datumsplatzhalter 3">
             <a:extLst>
               <a:ext uri="{FF2B5EF4-FFF2-40B4-BE49-F238E27FC236}">
-                <a16:creationId xmlns:a16="http://schemas.microsoft.com/office/drawing/2014/main" id="{D9E1B88A-EFEE-4F23-DE3E-1C19937C51F5}"/>
+                <a16:creationId xmlns:a16="http://schemas.microsoft.com/office/drawing/2014/main" id="{5353DA6C-18BE-B037-F7C3-2A6AA4F741DE}"/>
               </a:ext>
             </a:extLst>
           </p:cNvPr>
@@ -2926,7 +2926,7 @@
             </a:lvl1pPr>
           </a:lstStyle>
           <a:p>
-            <a:fld id="{023F5435-2549-4D64-A39E-BB20B0E2187A}" type="datetimeFigureOut">
+            <a:fld id="{D4E4E22E-3ABD-487B-A461-F35064D7E1CB}" type="datetimeFigureOut">
               <a:rPr lang="de-DE" smtClean="0"/>
               <a:t>08.10.2026</a:t>
             </a:fld>
@@ -2939,7 +2939,7 @@
           <p:cNvPr id="5" name="Fußzeilenplatzhalter 4">
             <a:extLst>
               <a:ext uri="{FF2B5EF4-FFF2-40B4-BE49-F238E27FC236}">
-                <a16:creationId xmlns:a16="http://schemas.microsoft.com/office/drawing/2014/main" id="{BDD42301-A670-085A-379D-EB01E8D76D11}"/>
+                <a16:creationId xmlns:a16="http://schemas.microsoft.com/office/drawing/2014/main" id="{6E0216EA-4125-7CE0-AD9A-CA1FD12BFB28}"/>
               </a:ext>
             </a:extLst>
           </p:cNvPr>
@@ -2982,7 +2982,7 @@
           <p:cNvPr id="6" name="Foliennummernplatzhalter 5">
             <a:extLst>
               <a:ext uri="{FF2B5EF4-FFF2-40B4-BE49-F238E27FC236}">
-                <a16:creationId xmlns:a16="http://schemas.microsoft.com/office/drawing/2014/main" id="{4B841761-4C94-CF68-D6F2-4625C06D65E6}"/>
+                <a16:creationId xmlns:a16="http://schemas.microsoft.com/office/drawing/2014/main" id="{7092EF72-389F-EA0E-DB41-7CAE9CE8EEC8}"/>
               </a:ext>
             </a:extLst>
           </p:cNvPr>
@@ -3016,7 +3016,7 @@
             </a:lvl1pPr>
           </a:lstStyle>
           <a:p>
-            <a:fld id="{27F76E8D-7EB0-4433-A98C-8021586EAF07}" type="slidenum">
+            <a:fld id="{5D22E049-7081-4061-85D4-497D056D5297}" type="slidenum">
               <a:rPr lang="de-DE" smtClean="0"/>
               <a:t>‹Nr.›</a:t>
             </a:fld>
@@ -3027,7 +3027,7 @@
     </p:spTree>
     <p:extLst>
       <p:ext uri="{BB962C8B-B14F-4D97-AF65-F5344CB8AC3E}">
-        <p14:creationId xmlns:p14="http://schemas.microsoft.com/office/powerpoint/2010/main" val="996705392"/>
+        <p14:creationId xmlns:p14="http://schemas.microsoft.com/office/powerpoint/2010/main" val="772228875"/>
       </p:ext>
     </p:extLst>
   </p:cSld>
@@ -3350,7 +3350,7 @@
           <p:cNvPr id="2" name="Textfeld 1">
             <a:extLst>
               <a:ext uri="{FF2B5EF4-FFF2-40B4-BE49-F238E27FC236}">
-                <a16:creationId xmlns:a16="http://schemas.microsoft.com/office/drawing/2014/main" id="{AB927EE2-53A7-8B20-1A2F-531C72F2A213}"/>
+                <a16:creationId xmlns:a16="http://schemas.microsoft.com/office/drawing/2014/main" id="{46E60F3F-591A-F9A5-2FA2-59866D2FC9F4}"/>
               </a:ext>
             </a:extLst>
           </p:cNvPr>
@@ -3445,7 +3445,7 @@
           <p:cNvPr id="3" name="Textfeld 2">
             <a:extLst>
               <a:ext uri="{FF2B5EF4-FFF2-40B4-BE49-F238E27FC236}">
-                <a16:creationId xmlns:a16="http://schemas.microsoft.com/office/drawing/2014/main" id="{173CF61A-2417-4C61-54AA-78C33CBE8F43}"/>
+                <a16:creationId xmlns:a16="http://schemas.microsoft.com/office/drawing/2014/main" id="{57B7EDEB-6FF1-803C-06BC-3788F1D832C9}"/>
               </a:ext>
             </a:extLst>
           </p:cNvPr>
@@ -3570,7 +3570,7 @@
           <p:cNvPr id="4" name="Textfeld 3">
             <a:extLst>
               <a:ext uri="{FF2B5EF4-FFF2-40B4-BE49-F238E27FC236}">
-                <a16:creationId xmlns:a16="http://schemas.microsoft.com/office/drawing/2014/main" id="{33DB710D-989E-7F69-78DF-65CC2D231338}"/>
+                <a16:creationId xmlns:a16="http://schemas.microsoft.com/office/drawing/2014/main" id="{5C893C3D-9DB3-8B8E-3024-6161A5492A4E}"/>
               </a:ext>
             </a:extLst>
           </p:cNvPr>
@@ -3695,7 +3695,7 @@
           <p:cNvPr id="5" name="Textfeld 4">
             <a:extLst>
               <a:ext uri="{FF2B5EF4-FFF2-40B4-BE49-F238E27FC236}">
-                <a16:creationId xmlns:a16="http://schemas.microsoft.com/office/drawing/2014/main" id="{5A3889B1-19B5-4EE4-E22E-B9DE9CDDAC41}"/>
+                <a16:creationId xmlns:a16="http://schemas.microsoft.com/office/drawing/2014/main" id="{ECA8CCB2-F84B-4766-55EA-7734986707BF}"/>
               </a:ext>
             </a:extLst>
           </p:cNvPr>
@@ -3818,7 +3818,7 @@
     </p:spTree>
     <p:extLst>
       <p:ext uri="{BB962C8B-B14F-4D97-AF65-F5344CB8AC3E}">
-        <p14:creationId xmlns:p14="http://schemas.microsoft.com/office/powerpoint/2010/main" val="315564696"/>
+        <p14:creationId xmlns:p14="http://schemas.microsoft.com/office/powerpoint/2010/main" val="1133529096"/>
       </p:ext>
     </p:extLst>
   </p:cSld>
@@ -3850,7 +3850,7 @@
           <p:cNvPr id="2" name="Textfeld 1">
             <a:extLst>
               <a:ext uri="{FF2B5EF4-FFF2-40B4-BE49-F238E27FC236}">
-                <a16:creationId xmlns:a16="http://schemas.microsoft.com/office/drawing/2014/main" id="{E7C860A6-EF34-AC0D-9F80-65DBAD439038}"/>
+                <a16:creationId xmlns:a16="http://schemas.microsoft.com/office/drawing/2014/main" id="{D21566AA-FA79-BC95-B290-0EC7C68394E7}"/>
               </a:ext>
             </a:extLst>
           </p:cNvPr>
@@ -3945,7 +3945,7 @@
           <p:cNvPr id="3" name="Textfeld 2">
             <a:extLst>
               <a:ext uri="{FF2B5EF4-FFF2-40B4-BE49-F238E27FC236}">
-                <a16:creationId xmlns:a16="http://schemas.microsoft.com/office/drawing/2014/main" id="{D5F3F7E5-B501-8881-2129-FE0617645B48}"/>
+                <a16:creationId xmlns:a16="http://schemas.microsoft.com/office/drawing/2014/main" id="{78F6D312-4BE7-A4DB-B101-693C526EDA89}"/>
               </a:ext>
             </a:extLst>
           </p:cNvPr>
@@ -4040,7 +4040,7 @@
           <p:cNvPr id="4" name="Textfeld 3">
             <a:extLst>
               <a:ext uri="{FF2B5EF4-FFF2-40B4-BE49-F238E27FC236}">
-                <a16:creationId xmlns:a16="http://schemas.microsoft.com/office/drawing/2014/main" id="{A6ACB1CC-5F3D-3E5E-3EEA-915DA1041F17}"/>
+                <a16:creationId xmlns:a16="http://schemas.microsoft.com/office/drawing/2014/main" id="{B36AEE38-615F-D5D9-377A-D5F95459EE19}"/>
               </a:ext>
             </a:extLst>
           </p:cNvPr>
@@ -4113,7 +4113,7 @@
           <p:cNvPr id="5" name="Textfeld 4">
             <a:extLst>
               <a:ext uri="{FF2B5EF4-FFF2-40B4-BE49-F238E27FC236}">
-                <a16:creationId xmlns:a16="http://schemas.microsoft.com/office/drawing/2014/main" id="{BA137198-E725-83A3-F435-C95CA871F7F3}"/>
+                <a16:creationId xmlns:a16="http://schemas.microsoft.com/office/drawing/2014/main" id="{2420963D-D81F-5ED8-FD75-A70CC45B5B90}"/>
               </a:ext>
             </a:extLst>
           </p:cNvPr>
@@ -4254,7 +4254,7 @@
     </p:spTree>
     <p:extLst>
       <p:ext uri="{BB962C8B-B14F-4D97-AF65-F5344CB8AC3E}">
-        <p14:creationId xmlns:p14="http://schemas.microsoft.com/office/powerpoint/2010/main" val="3544016104"/>
+        <p14:creationId xmlns:p14="http://schemas.microsoft.com/office/powerpoint/2010/main" val="3483859429"/>
       </p:ext>
     </p:extLst>
   </p:cSld>
@@ -4286,7 +4286,7 @@
           <p:cNvPr id="2" name="Textfeld 1">
             <a:extLst>
               <a:ext uri="{FF2B5EF4-FFF2-40B4-BE49-F238E27FC236}">
-                <a16:creationId xmlns:a16="http://schemas.microsoft.com/office/drawing/2014/main" id="{434B48E2-EEEE-1000-0BFF-D6E73983632F}"/>
+                <a16:creationId xmlns:a16="http://schemas.microsoft.com/office/drawing/2014/main" id="{D32FC381-274B-FE1B-A97D-298E6E56E649}"/>
               </a:ext>
             </a:extLst>
           </p:cNvPr>
@@ -4381,7 +4381,7 @@
           <p:cNvPr id="3" name="Textfeld 2">
             <a:extLst>
               <a:ext uri="{FF2B5EF4-FFF2-40B4-BE49-F238E27FC236}">
-                <a16:creationId xmlns:a16="http://schemas.microsoft.com/office/drawing/2014/main" id="{95B72E3C-739F-218F-5A81-7CE128AD94F4}"/>
+                <a16:creationId xmlns:a16="http://schemas.microsoft.com/office/drawing/2014/main" id="{AF7D474B-A488-F34C-F1EC-FE10F138D69C}"/>
               </a:ext>
             </a:extLst>
           </p:cNvPr>
@@ -4506,7 +4506,7 @@
           <p:cNvPr id="4" name="Textfeld 3">
             <a:extLst>
               <a:ext uri="{FF2B5EF4-FFF2-40B4-BE49-F238E27FC236}">
-                <a16:creationId xmlns:a16="http://schemas.microsoft.com/office/drawing/2014/main" id="{7A0964D0-5283-BDDF-90F4-26515FC99858}"/>
+                <a16:creationId xmlns:a16="http://schemas.microsoft.com/office/drawing/2014/main" id="{76FCACB2-3BA3-EDFB-5318-85BDFC845399}"/>
               </a:ext>
             </a:extLst>
           </p:cNvPr>
@@ -4631,7 +4631,7 @@
           <p:cNvPr id="5" name="Textfeld 4">
             <a:extLst>
               <a:ext uri="{FF2B5EF4-FFF2-40B4-BE49-F238E27FC236}">
-                <a16:creationId xmlns:a16="http://schemas.microsoft.com/office/drawing/2014/main" id="{159F6321-77EB-B39F-AED5-A83F6E43D135}"/>
+                <a16:creationId xmlns:a16="http://schemas.microsoft.com/office/drawing/2014/main" id="{7C213876-13B5-1847-1383-AE34B7A4770B}"/>
               </a:ext>
             </a:extLst>
           </p:cNvPr>
@@ -4754,7 +4754,7 @@
     </p:spTree>
     <p:extLst>
       <p:ext uri="{BB962C8B-B14F-4D97-AF65-F5344CB8AC3E}">
-        <p14:creationId xmlns:p14="http://schemas.microsoft.com/office/powerpoint/2010/main" val="2238859331"/>
+        <p14:creationId xmlns:p14="http://schemas.microsoft.com/office/powerpoint/2010/main" val="1811999085"/>
       </p:ext>
     </p:extLst>
   </p:cSld>
@@ -4786,7 +4786,7 @@
           <p:cNvPr id="2" name="Textfeld 1">
             <a:extLst>
               <a:ext uri="{FF2B5EF4-FFF2-40B4-BE49-F238E27FC236}">
-                <a16:creationId xmlns:a16="http://schemas.microsoft.com/office/drawing/2014/main" id="{F65DF82F-E29C-6F66-B3A3-A06C10E553E6}"/>
+                <a16:creationId xmlns:a16="http://schemas.microsoft.com/office/drawing/2014/main" id="{E441BC0D-665F-D2F1-14F8-BD17419DBAD4}"/>
               </a:ext>
             </a:extLst>
           </p:cNvPr>
@@ -4881,7 +4881,7 @@
           <p:cNvPr id="3" name="Textfeld 2">
             <a:extLst>
               <a:ext uri="{FF2B5EF4-FFF2-40B4-BE49-F238E27FC236}">
-                <a16:creationId xmlns:a16="http://schemas.microsoft.com/office/drawing/2014/main" id="{8DB2E576-07E9-21AC-E1A0-068690DBB438}"/>
+                <a16:creationId xmlns:a16="http://schemas.microsoft.com/office/drawing/2014/main" id="{19C3B6EF-309A-1EE8-17A8-841BF96B6757}"/>
               </a:ext>
             </a:extLst>
           </p:cNvPr>
@@ -4976,7 +4976,7 @@
           <p:cNvPr id="4" name="Textfeld 3">
             <a:extLst>
               <a:ext uri="{FF2B5EF4-FFF2-40B4-BE49-F238E27FC236}">
-                <a16:creationId xmlns:a16="http://schemas.microsoft.com/office/drawing/2014/main" id="{CF33A9E3-3A83-4FA3-8E2E-7613E4859AF5}"/>
+                <a16:creationId xmlns:a16="http://schemas.microsoft.com/office/drawing/2014/main" id="{1FABB29E-CC2D-9337-A698-AA47A750A444}"/>
               </a:ext>
             </a:extLst>
           </p:cNvPr>
@@ -5049,7 +5049,7 @@
           <p:cNvPr id="5" name="Textfeld 4">
             <a:extLst>
               <a:ext uri="{FF2B5EF4-FFF2-40B4-BE49-F238E27FC236}">
-                <a16:creationId xmlns:a16="http://schemas.microsoft.com/office/drawing/2014/main" id="{D19232F5-4ED3-126D-CC1F-60523685458F}"/>
+                <a16:creationId xmlns:a16="http://schemas.microsoft.com/office/drawing/2014/main" id="{255290E2-03BE-762A-36FC-4C38D299DA7A}"/>
               </a:ext>
             </a:extLst>
           </p:cNvPr>
@@ -5190,7 +5190,7 @@
     </p:spTree>
     <p:extLst>
       <p:ext uri="{BB962C8B-B14F-4D97-AF65-F5344CB8AC3E}">
-        <p14:creationId xmlns:p14="http://schemas.microsoft.com/office/powerpoint/2010/main" val="1175220971"/>
+        <p14:creationId xmlns:p14="http://schemas.microsoft.com/office/powerpoint/2010/main" val="1791334961"/>
       </p:ext>
     </p:extLst>
   </p:cSld>
@@ -5222,7 +5222,7 @@
           <p:cNvPr id="2" name="Textfeld 1">
             <a:extLst>
               <a:ext uri="{FF2B5EF4-FFF2-40B4-BE49-F238E27FC236}">
-                <a16:creationId xmlns:a16="http://schemas.microsoft.com/office/drawing/2014/main" id="{35DD7AAA-EDE4-5C5F-A62B-289585E7D099}"/>
+                <a16:creationId xmlns:a16="http://schemas.microsoft.com/office/drawing/2014/main" id="{3DC57872-54AB-D7BC-4BA8-4B98849F09EF}"/>
               </a:ext>
             </a:extLst>
           </p:cNvPr>
@@ -5317,7 +5317,7 @@
           <p:cNvPr id="3" name="Textfeld 2">
             <a:extLst>
               <a:ext uri="{FF2B5EF4-FFF2-40B4-BE49-F238E27FC236}">
-                <a16:creationId xmlns:a16="http://schemas.microsoft.com/office/drawing/2014/main" id="{05D33CB4-ED7F-3415-A7DF-337C70515450}"/>
+                <a16:creationId xmlns:a16="http://schemas.microsoft.com/office/drawing/2014/main" id="{2A7B803D-01FD-C743-B991-EEFC5DA8D061}"/>
               </a:ext>
             </a:extLst>
           </p:cNvPr>
@@ -5442,7 +5442,7 @@
           <p:cNvPr id="4" name="Textfeld 3">
             <a:extLst>
               <a:ext uri="{FF2B5EF4-FFF2-40B4-BE49-F238E27FC236}">
-                <a16:creationId xmlns:a16="http://schemas.microsoft.com/office/drawing/2014/main" id="{02A7AF30-94C1-6AAD-0A27-BA06C0B02525}"/>
+                <a16:creationId xmlns:a16="http://schemas.microsoft.com/office/drawing/2014/main" id="{3E0D1A9A-A79F-B2D9-8ECC-CD21209B9F51}"/>
               </a:ext>
             </a:extLst>
           </p:cNvPr>
@@ -5567,7 +5567,7 @@
           <p:cNvPr id="5" name="Textfeld 4">
             <a:extLst>
               <a:ext uri="{FF2B5EF4-FFF2-40B4-BE49-F238E27FC236}">
-                <a16:creationId xmlns:a16="http://schemas.microsoft.com/office/drawing/2014/main" id="{FB745D09-2A53-8905-BA21-548A84F5C196}"/>
+                <a16:creationId xmlns:a16="http://schemas.microsoft.com/office/drawing/2014/main" id="{9E1AE3BA-9D20-5B34-6E15-B3FD5186E6E6}"/>
               </a:ext>
             </a:extLst>
           </p:cNvPr>
@@ -5690,7 +5690,7 @@
     </p:spTree>
     <p:extLst>
       <p:ext uri="{BB962C8B-B14F-4D97-AF65-F5344CB8AC3E}">
-        <p14:creationId xmlns:p14="http://schemas.microsoft.com/office/powerpoint/2010/main" val="1442420009"/>
+        <p14:creationId xmlns:p14="http://schemas.microsoft.com/office/powerpoint/2010/main" val="1826823448"/>
       </p:ext>
     </p:extLst>
   </p:cSld>
@@ -5722,7 +5722,7 @@
           <p:cNvPr id="2" name="Textfeld 1">
             <a:extLst>
               <a:ext uri="{FF2B5EF4-FFF2-40B4-BE49-F238E27FC236}">
-                <a16:creationId xmlns:a16="http://schemas.microsoft.com/office/drawing/2014/main" id="{D8975B98-C63B-E9F2-1C58-373D466E1EA6}"/>
+                <a16:creationId xmlns:a16="http://schemas.microsoft.com/office/drawing/2014/main" id="{D407D251-3FD1-581A-AE75-12E9828BDFF5}"/>
               </a:ext>
             </a:extLst>
           </p:cNvPr>
@@ -5817,7 +5817,7 @@
           <p:cNvPr id="3" name="Textfeld 2">
             <a:extLst>
               <a:ext uri="{FF2B5EF4-FFF2-40B4-BE49-F238E27FC236}">
-                <a16:creationId xmlns:a16="http://schemas.microsoft.com/office/drawing/2014/main" id="{9DDEE59D-C11F-6B9D-9F72-BE62AE32DC70}"/>
+                <a16:creationId xmlns:a16="http://schemas.microsoft.com/office/drawing/2014/main" id="{A015BBFE-CC96-6E88-A134-25085D08F991}"/>
               </a:ext>
             </a:extLst>
           </p:cNvPr>
@@ -5912,7 +5912,7 @@
           <p:cNvPr id="4" name="Textfeld 3">
             <a:extLst>
               <a:ext uri="{FF2B5EF4-FFF2-40B4-BE49-F238E27FC236}">
-                <a16:creationId xmlns:a16="http://schemas.microsoft.com/office/drawing/2014/main" id="{A94EF904-E1BD-5C8D-0D76-5CE1D2D3EBEE}"/>
+                <a16:creationId xmlns:a16="http://schemas.microsoft.com/office/drawing/2014/main" id="{0C9968E2-DF59-9DF2-DCA8-0D11ED31529C}"/>
               </a:ext>
             </a:extLst>
           </p:cNvPr>
@@ -5985,7 +5985,7 @@
           <p:cNvPr id="5" name="Textfeld 4">
             <a:extLst>
               <a:ext uri="{FF2B5EF4-FFF2-40B4-BE49-F238E27FC236}">
-                <a16:creationId xmlns:a16="http://schemas.microsoft.com/office/drawing/2014/main" id="{6BC79D97-A3DA-4BF4-36B3-781F71B8E139}"/>
+                <a16:creationId xmlns:a16="http://schemas.microsoft.com/office/drawing/2014/main" id="{99BDA47E-D619-DDBB-F34B-9B72DD64C1A3}"/>
               </a:ext>
             </a:extLst>
           </p:cNvPr>
@@ -6126,7 +6126,7 @@
     </p:spTree>
     <p:extLst>
       <p:ext uri="{BB962C8B-B14F-4D97-AF65-F5344CB8AC3E}">
-        <p14:creationId xmlns:p14="http://schemas.microsoft.com/office/powerpoint/2010/main" val="2642290307"/>
+        <p14:creationId xmlns:p14="http://schemas.microsoft.com/office/powerpoint/2010/main" val="848604748"/>
       </p:ext>
     </p:extLst>
   </p:cSld>
@@ -6158,7 +6158,7 @@
           <p:cNvPr id="2" name="Textfeld 1">
             <a:extLst>
               <a:ext uri="{FF2B5EF4-FFF2-40B4-BE49-F238E27FC236}">
-                <a16:creationId xmlns:a16="http://schemas.microsoft.com/office/drawing/2014/main" id="{7FE1FABC-BE4D-43B0-1860-CE4B59619B20}"/>
+                <a16:creationId xmlns:a16="http://schemas.microsoft.com/office/drawing/2014/main" id="{1C08DB99-F125-0349-4A15-B2F1265E95C8}"/>
               </a:ext>
             </a:extLst>
           </p:cNvPr>
@@ -6253,7 +6253,7 @@
           <p:cNvPr id="3" name="Textfeld 2">
             <a:extLst>
               <a:ext uri="{FF2B5EF4-FFF2-40B4-BE49-F238E27FC236}">
-                <a16:creationId xmlns:a16="http://schemas.microsoft.com/office/drawing/2014/main" id="{74FD090F-0FC7-F8A2-3BED-779C2BE23050}"/>
+                <a16:creationId xmlns:a16="http://schemas.microsoft.com/office/drawing/2014/main" id="{BF0C2388-625B-FA19-217A-7C2D78DCA516}"/>
               </a:ext>
             </a:extLst>
           </p:cNvPr>
@@ -6378,7 +6378,7 @@
           <p:cNvPr id="4" name="Textfeld 3">
             <a:extLst>
               <a:ext uri="{FF2B5EF4-FFF2-40B4-BE49-F238E27FC236}">
-                <a16:creationId xmlns:a16="http://schemas.microsoft.com/office/drawing/2014/main" id="{6730A0F2-37CD-A375-2E45-26DDC8B750DD}"/>
+                <a16:creationId xmlns:a16="http://schemas.microsoft.com/office/drawing/2014/main" id="{63198D7F-E219-7E46-178B-AD9328A0919F}"/>
               </a:ext>
             </a:extLst>
           </p:cNvPr>
@@ -6503,7 +6503,7 @@
           <p:cNvPr id="5" name="Textfeld 4">
             <a:extLst>
               <a:ext uri="{FF2B5EF4-FFF2-40B4-BE49-F238E27FC236}">
-                <a16:creationId xmlns:a16="http://schemas.microsoft.com/office/drawing/2014/main" id="{F66CF8A5-8451-1CDC-D742-ABCB1340B1D4}"/>
+                <a16:creationId xmlns:a16="http://schemas.microsoft.com/office/drawing/2014/main" id="{28921D59-167F-B617-F99C-58AEAE74CCDD}"/>
               </a:ext>
             </a:extLst>
           </p:cNvPr>
@@ -6626,7 +6626,7 @@
     </p:spTree>
     <p:extLst>
       <p:ext uri="{BB962C8B-B14F-4D97-AF65-F5344CB8AC3E}">
-        <p14:creationId xmlns:p14="http://schemas.microsoft.com/office/powerpoint/2010/main" val="128350870"/>
+        <p14:creationId xmlns:p14="http://schemas.microsoft.com/office/powerpoint/2010/main" val="384796320"/>
       </p:ext>
     </p:extLst>
   </p:cSld>
@@ -6658,7 +6658,7 @@
           <p:cNvPr id="2" name="Textfeld 1">
             <a:extLst>
               <a:ext uri="{FF2B5EF4-FFF2-40B4-BE49-F238E27FC236}">
-                <a16:creationId xmlns:a16="http://schemas.microsoft.com/office/drawing/2014/main" id="{9198C327-413A-23E8-8C85-E8FAABFB9832}"/>
+                <a16:creationId xmlns:a16="http://schemas.microsoft.com/office/drawing/2014/main" id="{5009A7B5-9D48-AC8E-2850-E56B2019CC75}"/>
               </a:ext>
             </a:extLst>
           </p:cNvPr>
@@ -6753,7 +6753,7 @@
           <p:cNvPr id="3" name="Textfeld 2">
             <a:extLst>
               <a:ext uri="{FF2B5EF4-FFF2-40B4-BE49-F238E27FC236}">
-                <a16:creationId xmlns:a16="http://schemas.microsoft.com/office/drawing/2014/main" id="{FF7E6DBE-1CC2-B739-114C-A10CBF4501B1}"/>
+                <a16:creationId xmlns:a16="http://schemas.microsoft.com/office/drawing/2014/main" id="{C6EA5AF9-E277-7C03-F71E-744B5A9053D8}"/>
               </a:ext>
             </a:extLst>
           </p:cNvPr>
@@ -6848,7 +6848,7 @@
           <p:cNvPr id="4" name="Textfeld 3">
             <a:extLst>
               <a:ext uri="{FF2B5EF4-FFF2-40B4-BE49-F238E27FC236}">
-                <a16:creationId xmlns:a16="http://schemas.microsoft.com/office/drawing/2014/main" id="{5C14AC84-89AA-4F83-D357-608F1A7983B8}"/>
+                <a16:creationId xmlns:a16="http://schemas.microsoft.com/office/drawing/2014/main" id="{69512771-6F92-640A-D00F-2D2F7B12CF4C}"/>
               </a:ext>
             </a:extLst>
           </p:cNvPr>
@@ -6921,7 +6921,7 @@
           <p:cNvPr id="5" name="Textfeld 4">
             <a:extLst>
               <a:ext uri="{FF2B5EF4-FFF2-40B4-BE49-F238E27FC236}">
-                <a16:creationId xmlns:a16="http://schemas.microsoft.com/office/drawing/2014/main" id="{3C2D0D4F-6F33-7120-6FED-BBE324F55D25}"/>
+                <a16:creationId xmlns:a16="http://schemas.microsoft.com/office/drawing/2014/main" id="{68A52BBF-E861-7CE9-8A7D-E6247B665C5F}"/>
               </a:ext>
             </a:extLst>
           </p:cNvPr>
@@ -7062,7 +7062,7 @@
     </p:spTree>
     <p:extLst>
       <p:ext uri="{BB962C8B-B14F-4D97-AF65-F5344CB8AC3E}">
-        <p14:creationId xmlns:p14="http://schemas.microsoft.com/office/powerpoint/2010/main" val="1666228268"/>
+        <p14:creationId xmlns:p14="http://schemas.microsoft.com/office/powerpoint/2010/main" val="3677246109"/>
       </p:ext>
     </p:extLst>
   </p:cSld>
@@ -7094,7 +7094,7 @@
           <p:cNvPr id="2" name="Textfeld 1">
             <a:extLst>
               <a:ext uri="{FF2B5EF4-FFF2-40B4-BE49-F238E27FC236}">
-                <a16:creationId xmlns:a16="http://schemas.microsoft.com/office/drawing/2014/main" id="{C14271F3-0D7B-C5C9-DF89-9008A079D58B}"/>
+                <a16:creationId xmlns:a16="http://schemas.microsoft.com/office/drawing/2014/main" id="{91A5753B-62EB-9696-63AA-511AEA83CBAB}"/>
               </a:ext>
             </a:extLst>
           </p:cNvPr>
@@ -7189,7 +7189,7 @@
           <p:cNvPr id="3" name="Textfeld 2">
             <a:extLst>
               <a:ext uri="{FF2B5EF4-FFF2-40B4-BE49-F238E27FC236}">
-                <a16:creationId xmlns:a16="http://schemas.microsoft.com/office/drawing/2014/main" id="{780CAC84-F955-2B3D-9782-5598130F71FA}"/>
+                <a16:creationId xmlns:a16="http://schemas.microsoft.com/office/drawing/2014/main" id="{BB4396D3-E1A2-ADA0-0E07-C9954CA1185B}"/>
               </a:ext>
             </a:extLst>
           </p:cNvPr>
@@ -7314,7 +7314,7 @@
           <p:cNvPr id="4" name="Textfeld 3">
             <a:extLst>
               <a:ext uri="{FF2B5EF4-FFF2-40B4-BE49-F238E27FC236}">
-                <a16:creationId xmlns:a16="http://schemas.microsoft.com/office/drawing/2014/main" id="{44B7E2A5-DBFA-2F27-E987-DDE2FD492FAC}"/>
+                <a16:creationId xmlns:a16="http://schemas.microsoft.com/office/drawing/2014/main" id="{8BA54C70-BC06-6820-5A15-776D9D066B4F}"/>
               </a:ext>
             </a:extLst>
           </p:cNvPr>
@@ -7439,7 +7439,7 @@
           <p:cNvPr id="5" name="Textfeld 4">
             <a:extLst>
               <a:ext uri="{FF2B5EF4-FFF2-40B4-BE49-F238E27FC236}">
-                <a16:creationId xmlns:a16="http://schemas.microsoft.com/office/drawing/2014/main" id="{39281C85-D0E5-D799-9557-DF56C6A84D83}"/>
+                <a16:creationId xmlns:a16="http://schemas.microsoft.com/office/drawing/2014/main" id="{53785C10-C7B7-A88E-A343-E518B6F3DBE7}"/>
               </a:ext>
             </a:extLst>
           </p:cNvPr>
@@ -7562,7 +7562,7 @@
     </p:spTree>
     <p:extLst>
       <p:ext uri="{BB962C8B-B14F-4D97-AF65-F5344CB8AC3E}">
-        <p14:creationId xmlns:p14="http://schemas.microsoft.com/office/powerpoint/2010/main" val="2293107507"/>
+        <p14:creationId xmlns:p14="http://schemas.microsoft.com/office/powerpoint/2010/main" val="149023393"/>
       </p:ext>
     </p:extLst>
   </p:cSld>
@@ -7594,7 +7594,7 @@
           <p:cNvPr id="2" name="Textfeld 1">
             <a:extLst>
               <a:ext uri="{FF2B5EF4-FFF2-40B4-BE49-F238E27FC236}">
-                <a16:creationId xmlns:a16="http://schemas.microsoft.com/office/drawing/2014/main" id="{E38776B2-A3EC-6838-E92F-D1B1A689D865}"/>
+                <a16:creationId xmlns:a16="http://schemas.microsoft.com/office/drawing/2014/main" id="{71A3DF6E-5AF8-B8C7-410E-84BE6A69401C}"/>
               </a:ext>
             </a:extLst>
           </p:cNvPr>
@@ -7689,7 +7689,7 @@
           <p:cNvPr id="3" name="Textfeld 2">
             <a:extLst>
               <a:ext uri="{FF2B5EF4-FFF2-40B4-BE49-F238E27FC236}">
-                <a16:creationId xmlns:a16="http://schemas.microsoft.com/office/drawing/2014/main" id="{3C2AAA35-66C4-5BF9-E80B-861FCE5CEFAC}"/>
+                <a16:creationId xmlns:a16="http://schemas.microsoft.com/office/drawing/2014/main" id="{2B69BC17-BAE1-B088-7354-F380648DA314}"/>
               </a:ext>
             </a:extLst>
           </p:cNvPr>
@@ -7784,7 +7784,7 @@
           <p:cNvPr id="4" name="Textfeld 3">
             <a:extLst>
               <a:ext uri="{FF2B5EF4-FFF2-40B4-BE49-F238E27FC236}">
-                <a16:creationId xmlns:a16="http://schemas.microsoft.com/office/drawing/2014/main" id="{9A770951-5ECC-BAEE-5D76-AC303780AE93}"/>
+                <a16:creationId xmlns:a16="http://schemas.microsoft.com/office/drawing/2014/main" id="{F4E57585-373E-5770-A3A9-79A0DE990677}"/>
               </a:ext>
             </a:extLst>
           </p:cNvPr>
@@ -7857,7 +7857,7 @@
           <p:cNvPr id="5" name="Textfeld 4">
             <a:extLst>
               <a:ext uri="{FF2B5EF4-FFF2-40B4-BE49-F238E27FC236}">
-                <a16:creationId xmlns:a16="http://schemas.microsoft.com/office/drawing/2014/main" id="{CFB4823B-9D5B-9007-FAAB-9C97055CA1E9}"/>
+                <a16:creationId xmlns:a16="http://schemas.microsoft.com/office/drawing/2014/main" id="{9BABCDC6-8E98-87AE-4FD1-AB0283BD5EF3}"/>
               </a:ext>
             </a:extLst>
           </p:cNvPr>
@@ -7998,7 +7998,7 @@
     </p:spTree>
     <p:extLst>
       <p:ext uri="{BB962C8B-B14F-4D97-AF65-F5344CB8AC3E}">
-        <p14:creationId xmlns:p14="http://schemas.microsoft.com/office/powerpoint/2010/main" val="52434955"/>
+        <p14:creationId xmlns:p14="http://schemas.microsoft.com/office/powerpoint/2010/main" val="4034877336"/>
       </p:ext>
     </p:extLst>
   </p:cSld>
@@ -8030,7 +8030,7 @@
           <p:cNvPr id="2" name="Textfeld 1">
             <a:extLst>
               <a:ext uri="{FF2B5EF4-FFF2-40B4-BE49-F238E27FC236}">
-                <a16:creationId xmlns:a16="http://schemas.microsoft.com/office/drawing/2014/main" id="{6ACCFE71-30F1-F875-C2CF-F3F6097C7663}"/>
+                <a16:creationId xmlns:a16="http://schemas.microsoft.com/office/drawing/2014/main" id="{8219E319-AF98-6E30-3E6B-3BA7AFCAECF7}"/>
               </a:ext>
             </a:extLst>
           </p:cNvPr>
@@ -8092,7 +8092,7 @@
           <p:cNvPr id="3" name="Textfeld 2">
             <a:extLst>
               <a:ext uri="{FF2B5EF4-FFF2-40B4-BE49-F238E27FC236}">
-                <a16:creationId xmlns:a16="http://schemas.microsoft.com/office/drawing/2014/main" id="{631E4978-94F2-FB34-6793-8D8D02209B8B}"/>
+                <a16:creationId xmlns:a16="http://schemas.microsoft.com/office/drawing/2014/main" id="{C573AB71-296A-10AD-04A6-6AF0C2B71034}"/>
               </a:ext>
             </a:extLst>
           </p:cNvPr>
@@ -8154,7 +8154,7 @@
           <p:cNvPr id="4" name="Textfeld 3">
             <a:extLst>
               <a:ext uri="{FF2B5EF4-FFF2-40B4-BE49-F238E27FC236}">
-                <a16:creationId xmlns:a16="http://schemas.microsoft.com/office/drawing/2014/main" id="{5C3758B9-7E72-DC90-2A74-BF21671F123A}"/>
+                <a16:creationId xmlns:a16="http://schemas.microsoft.com/office/drawing/2014/main" id="{C597B88D-5055-BCD5-50DE-DF7FF3A62075}"/>
               </a:ext>
             </a:extLst>
           </p:cNvPr>
@@ -8216,7 +8216,7 @@
           <p:cNvPr id="5" name="Textfeld 4">
             <a:extLst>
               <a:ext uri="{FF2B5EF4-FFF2-40B4-BE49-F238E27FC236}">
-                <a16:creationId xmlns:a16="http://schemas.microsoft.com/office/drawing/2014/main" id="{AD3B9CE8-CF23-6B41-234B-6B8451898A2D}"/>
+                <a16:creationId xmlns:a16="http://schemas.microsoft.com/office/drawing/2014/main" id="{F2FA68BA-467A-6BDA-8F83-D593CF5E0F85}"/>
               </a:ext>
             </a:extLst>
           </p:cNvPr>
@@ -8276,7 +8276,7 @@
     </p:spTree>
     <p:extLst>
       <p:ext uri="{BB962C8B-B14F-4D97-AF65-F5344CB8AC3E}">
-        <p14:creationId xmlns:p14="http://schemas.microsoft.com/office/powerpoint/2010/main" val="3811324642"/>
+        <p14:creationId xmlns:p14="http://schemas.microsoft.com/office/powerpoint/2010/main" val="2709842864"/>
       </p:ext>
     </p:extLst>
   </p:cSld>
@@ -8308,7 +8308,7 @@
           <p:cNvPr id="2" name="Textfeld 1">
             <a:extLst>
               <a:ext uri="{FF2B5EF4-FFF2-40B4-BE49-F238E27FC236}">
-                <a16:creationId xmlns:a16="http://schemas.microsoft.com/office/drawing/2014/main" id="{BD5B86C6-989A-D786-5D12-B41DBA61D7EC}"/>
+                <a16:creationId xmlns:a16="http://schemas.microsoft.com/office/drawing/2014/main" id="{6BD1730A-E545-AA64-409F-B7DBB2DFFB2E}"/>
               </a:ext>
             </a:extLst>
           </p:cNvPr>
@@ -8403,7 +8403,7 @@
           <p:cNvPr id="3" name="Textfeld 2">
             <a:extLst>
               <a:ext uri="{FF2B5EF4-FFF2-40B4-BE49-F238E27FC236}">
-                <a16:creationId xmlns:a16="http://schemas.microsoft.com/office/drawing/2014/main" id="{9B8860F1-4CBE-83BE-483E-5D2877A91CC2}"/>
+                <a16:creationId xmlns:a16="http://schemas.microsoft.com/office/drawing/2014/main" id="{51B6F9F9-77B9-7B93-3437-0940A4EA0B47}"/>
               </a:ext>
             </a:extLst>
           </p:cNvPr>
@@ -8498,7 +8498,7 @@
           <p:cNvPr id="4" name="Textfeld 3">
             <a:extLst>
               <a:ext uri="{FF2B5EF4-FFF2-40B4-BE49-F238E27FC236}">
-                <a16:creationId xmlns:a16="http://schemas.microsoft.com/office/drawing/2014/main" id="{A5F78763-17F4-0A8F-A7F4-B4A98FD16CBF}"/>
+                <a16:creationId xmlns:a16="http://schemas.microsoft.com/office/drawing/2014/main" id="{5C8A4AF7-7D3C-8693-561C-DBDCA911F12B}"/>
               </a:ext>
             </a:extLst>
           </p:cNvPr>
@@ -8571,7 +8571,7 @@
           <p:cNvPr id="5" name="Textfeld 4">
             <a:extLst>
               <a:ext uri="{FF2B5EF4-FFF2-40B4-BE49-F238E27FC236}">
-                <a16:creationId xmlns:a16="http://schemas.microsoft.com/office/drawing/2014/main" id="{D4878D7F-9BD6-B9F4-64AF-7E06026A7A0E}"/>
+                <a16:creationId xmlns:a16="http://schemas.microsoft.com/office/drawing/2014/main" id="{786E48D0-A647-6B16-09DA-C541ED16E8D4}"/>
               </a:ext>
             </a:extLst>
           </p:cNvPr>
@@ -8712,7 +8712,7 @@
     </p:spTree>
     <p:extLst>
       <p:ext uri="{BB962C8B-B14F-4D97-AF65-F5344CB8AC3E}">
-        <p14:creationId xmlns:p14="http://schemas.microsoft.com/office/powerpoint/2010/main" val="616596107"/>
+        <p14:creationId xmlns:p14="http://schemas.microsoft.com/office/powerpoint/2010/main" val="839002737"/>
       </p:ext>
     </p:extLst>
   </p:cSld>
@@ -8744,7 +8744,7 @@
           <p:cNvPr id="2" name="Textfeld 1">
             <a:extLst>
               <a:ext uri="{FF2B5EF4-FFF2-40B4-BE49-F238E27FC236}">
-                <a16:creationId xmlns:a16="http://schemas.microsoft.com/office/drawing/2014/main" id="{9DF9DE59-CFD3-B313-BFB0-93CC6E361910}"/>
+                <a16:creationId xmlns:a16="http://schemas.microsoft.com/office/drawing/2014/main" id="{DACA72F0-BFAC-7478-BC09-EBF972FDBE08}"/>
               </a:ext>
             </a:extLst>
           </p:cNvPr>
@@ -8815,7 +8815,7 @@
           <p:cNvPr id="3" name="Textfeld 2">
             <a:extLst>
               <a:ext uri="{FF2B5EF4-FFF2-40B4-BE49-F238E27FC236}">
-                <a16:creationId xmlns:a16="http://schemas.microsoft.com/office/drawing/2014/main" id="{4D300985-4633-CED8-62AB-C0961842D647}"/>
+                <a16:creationId xmlns:a16="http://schemas.microsoft.com/office/drawing/2014/main" id="{655F46A9-15B9-01EC-6B0E-9F9324113ACD}"/>
               </a:ext>
             </a:extLst>
           </p:cNvPr>
@@ -8904,7 +8904,7 @@
           <p:cNvPr id="4" name="Textfeld 3">
             <a:extLst>
               <a:ext uri="{FF2B5EF4-FFF2-40B4-BE49-F238E27FC236}">
-                <a16:creationId xmlns:a16="http://schemas.microsoft.com/office/drawing/2014/main" id="{92E885B4-E216-D7B0-0C34-F85D89F2468B}"/>
+                <a16:creationId xmlns:a16="http://schemas.microsoft.com/office/drawing/2014/main" id="{D71A6844-D5F5-6300-E2AD-F3825898D6FF}"/>
               </a:ext>
             </a:extLst>
           </p:cNvPr>
@@ -8997,7 +8997,7 @@
           <p:cNvPr id="5" name="Textfeld 4">
             <a:extLst>
               <a:ext uri="{FF2B5EF4-FFF2-40B4-BE49-F238E27FC236}">
-                <a16:creationId xmlns:a16="http://schemas.microsoft.com/office/drawing/2014/main" id="{82482F46-0612-9092-7AAE-176CF0103C3E}"/>
+                <a16:creationId xmlns:a16="http://schemas.microsoft.com/office/drawing/2014/main" id="{A50C9FC7-F3AE-8C91-3813-B1B1D0D76E5E}"/>
               </a:ext>
             </a:extLst>
           </p:cNvPr>
@@ -9068,7 +9068,7 @@
     </p:spTree>
     <p:extLst>
       <p:ext uri="{BB962C8B-B14F-4D97-AF65-F5344CB8AC3E}">
-        <p14:creationId xmlns:p14="http://schemas.microsoft.com/office/powerpoint/2010/main" val="1709036767"/>
+        <p14:creationId xmlns:p14="http://schemas.microsoft.com/office/powerpoint/2010/main" val="3189474235"/>
       </p:ext>
     </p:extLst>
   </p:cSld>
@@ -9100,7 +9100,7 @@
           <p:cNvPr id="2" name="Textfeld 1">
             <a:extLst>
               <a:ext uri="{FF2B5EF4-FFF2-40B4-BE49-F238E27FC236}">
-                <a16:creationId xmlns:a16="http://schemas.microsoft.com/office/drawing/2014/main" id="{E6EA8564-A304-BEB6-7273-0ED557C8D8E1}"/>
+                <a16:creationId xmlns:a16="http://schemas.microsoft.com/office/drawing/2014/main" id="{98E1B9A3-4E88-E04F-98AC-DB45335C01D6}"/>
               </a:ext>
             </a:extLst>
           </p:cNvPr>
@@ -9225,7 +9225,7 @@
           <p:cNvPr id="3" name="Textfeld 2">
             <a:extLst>
               <a:ext uri="{FF2B5EF4-FFF2-40B4-BE49-F238E27FC236}">
-                <a16:creationId xmlns:a16="http://schemas.microsoft.com/office/drawing/2014/main" id="{BF209957-D808-301B-E1AA-D0731C8A2613}"/>
+                <a16:creationId xmlns:a16="http://schemas.microsoft.com/office/drawing/2014/main" id="{75049490-EDE5-CBA7-3C6C-4F4FA56FFAD9}"/>
               </a:ext>
             </a:extLst>
           </p:cNvPr>
@@ -9350,7 +9350,7 @@
           <p:cNvPr id="4" name="Textfeld 3">
             <a:extLst>
               <a:ext uri="{FF2B5EF4-FFF2-40B4-BE49-F238E27FC236}">
-                <a16:creationId xmlns:a16="http://schemas.microsoft.com/office/drawing/2014/main" id="{2C112366-A91D-43F9-A18E-00873AC6C16E}"/>
+                <a16:creationId xmlns:a16="http://schemas.microsoft.com/office/drawing/2014/main" id="{6CC47E2D-342B-059B-347B-6FC7E9A73787}"/>
               </a:ext>
             </a:extLst>
           </p:cNvPr>
@@ -9475,7 +9475,7 @@
           <p:cNvPr id="5" name="Textfeld 4">
             <a:extLst>
               <a:ext uri="{FF2B5EF4-FFF2-40B4-BE49-F238E27FC236}">
-                <a16:creationId xmlns:a16="http://schemas.microsoft.com/office/drawing/2014/main" id="{730123DE-B9E2-5555-3384-4AEB20651A88}"/>
+                <a16:creationId xmlns:a16="http://schemas.microsoft.com/office/drawing/2014/main" id="{63FFC7A1-7375-EAE0-1FE1-FC0FEA952A6E}"/>
               </a:ext>
             </a:extLst>
           </p:cNvPr>
@@ -9598,7 +9598,7 @@
     </p:spTree>
     <p:extLst>
       <p:ext uri="{BB962C8B-B14F-4D97-AF65-F5344CB8AC3E}">
-        <p14:creationId xmlns:p14="http://schemas.microsoft.com/office/powerpoint/2010/main" val="4205571376"/>
+        <p14:creationId xmlns:p14="http://schemas.microsoft.com/office/powerpoint/2010/main" val="4156306403"/>
       </p:ext>
     </p:extLst>
   </p:cSld>
@@ -9630,7 +9630,7 @@
           <p:cNvPr id="2" name="Textfeld 1">
             <a:extLst>
               <a:ext uri="{FF2B5EF4-FFF2-40B4-BE49-F238E27FC236}">
-                <a16:creationId xmlns:a16="http://schemas.microsoft.com/office/drawing/2014/main" id="{CA714E72-916E-7D49-E1F8-D1F61DBDC06B}"/>
+                <a16:creationId xmlns:a16="http://schemas.microsoft.com/office/drawing/2014/main" id="{71BE154A-A690-B779-BFFC-BAA41B974C08}"/>
               </a:ext>
             </a:extLst>
           </p:cNvPr>
@@ -9755,7 +9755,7 @@
           <p:cNvPr id="3" name="Textfeld 2">
             <a:extLst>
               <a:ext uri="{FF2B5EF4-FFF2-40B4-BE49-F238E27FC236}">
-                <a16:creationId xmlns:a16="http://schemas.microsoft.com/office/drawing/2014/main" id="{AF7E52D6-A2C6-553D-C226-6E3608322045}"/>
+                <a16:creationId xmlns:a16="http://schemas.microsoft.com/office/drawing/2014/main" id="{E9142628-620C-9D50-923E-85F3E6A80203}"/>
               </a:ext>
             </a:extLst>
           </p:cNvPr>
@@ -9880,7 +9880,7 @@
           <p:cNvPr id="4" name="Textfeld 3">
             <a:extLst>
               <a:ext uri="{FF2B5EF4-FFF2-40B4-BE49-F238E27FC236}">
-                <a16:creationId xmlns:a16="http://schemas.microsoft.com/office/drawing/2014/main" id="{722E07E2-5861-A567-7D8D-6887FC48F6ED}"/>
+                <a16:creationId xmlns:a16="http://schemas.microsoft.com/office/drawing/2014/main" id="{CAD4D715-E469-9AA2-6566-8BE4B5BA5CE5}"/>
               </a:ext>
             </a:extLst>
           </p:cNvPr>
@@ -10005,7 +10005,7 @@
           <p:cNvPr id="5" name="Textfeld 4">
             <a:extLst>
               <a:ext uri="{FF2B5EF4-FFF2-40B4-BE49-F238E27FC236}">
-                <a16:creationId xmlns:a16="http://schemas.microsoft.com/office/drawing/2014/main" id="{C8336B99-95B6-B774-0BE1-5CA94D2D0317}"/>
+                <a16:creationId xmlns:a16="http://schemas.microsoft.com/office/drawing/2014/main" id="{94968CB6-5F94-FF6D-E312-297DBAAF4756}"/>
               </a:ext>
             </a:extLst>
           </p:cNvPr>
@@ -10128,7 +10128,7 @@
     </p:spTree>
     <p:extLst>
       <p:ext uri="{BB962C8B-B14F-4D97-AF65-F5344CB8AC3E}">
-        <p14:creationId xmlns:p14="http://schemas.microsoft.com/office/powerpoint/2010/main" val="4042998733"/>
+        <p14:creationId xmlns:p14="http://schemas.microsoft.com/office/powerpoint/2010/main" val="3843302394"/>
       </p:ext>
     </p:extLst>
   </p:cSld>
@@ -10160,7 +10160,7 @@
           <p:cNvPr id="2" name="Textfeld 1">
             <a:extLst>
               <a:ext uri="{FF2B5EF4-FFF2-40B4-BE49-F238E27FC236}">
-                <a16:creationId xmlns:a16="http://schemas.microsoft.com/office/drawing/2014/main" id="{950B6701-330D-B10F-4CB6-6894597B799B}"/>
+                <a16:creationId xmlns:a16="http://schemas.microsoft.com/office/drawing/2014/main" id="{FC7E4C20-79CC-5C24-E002-E03FDB2EA713}"/>
               </a:ext>
             </a:extLst>
           </p:cNvPr>
@@ -10285,7 +10285,7 @@
           <p:cNvPr id="3" name="Textfeld 2">
             <a:extLst>
               <a:ext uri="{FF2B5EF4-FFF2-40B4-BE49-F238E27FC236}">
-                <a16:creationId xmlns:a16="http://schemas.microsoft.com/office/drawing/2014/main" id="{E1107DBF-E5AB-79CB-0B2C-F8BD69100E81}"/>
+                <a16:creationId xmlns:a16="http://schemas.microsoft.com/office/drawing/2014/main" id="{63C4326C-8289-9A72-8E95-1A31CA2ED6C0}"/>
               </a:ext>
             </a:extLst>
           </p:cNvPr>
@@ -10410,7 +10410,7 @@
           <p:cNvPr id="4" name="Textfeld 3">
             <a:extLst>
               <a:ext uri="{FF2B5EF4-FFF2-40B4-BE49-F238E27FC236}">
-                <a16:creationId xmlns:a16="http://schemas.microsoft.com/office/drawing/2014/main" id="{C39DD349-EBFA-BE85-BB45-DC32A210C485}"/>
+                <a16:creationId xmlns:a16="http://schemas.microsoft.com/office/drawing/2014/main" id="{5BD2A6BD-A362-5E94-3208-1F696A43D97C}"/>
               </a:ext>
             </a:extLst>
           </p:cNvPr>
@@ -10535,7 +10535,7 @@
           <p:cNvPr id="5" name="Textfeld 4">
             <a:extLst>
               <a:ext uri="{FF2B5EF4-FFF2-40B4-BE49-F238E27FC236}">
-                <a16:creationId xmlns:a16="http://schemas.microsoft.com/office/drawing/2014/main" id="{005667DD-317D-9AE1-A19B-52302A04797C}"/>
+                <a16:creationId xmlns:a16="http://schemas.microsoft.com/office/drawing/2014/main" id="{82BCA07D-63E2-5392-3DA3-AF907B9E3F94}"/>
               </a:ext>
             </a:extLst>
           </p:cNvPr>
@@ -10658,7 +10658,7 @@
     </p:spTree>
     <p:extLst>
       <p:ext uri="{BB962C8B-B14F-4D97-AF65-F5344CB8AC3E}">
-        <p14:creationId xmlns:p14="http://schemas.microsoft.com/office/powerpoint/2010/main" val="1941526301"/>
+        <p14:creationId xmlns:p14="http://schemas.microsoft.com/office/powerpoint/2010/main" val="1424833803"/>
       </p:ext>
     </p:extLst>
   </p:cSld>
@@ -10690,7 +10690,7 @@
           <p:cNvPr id="2" name="Textfeld 1">
             <a:extLst>
               <a:ext uri="{FF2B5EF4-FFF2-40B4-BE49-F238E27FC236}">
-                <a16:creationId xmlns:a16="http://schemas.microsoft.com/office/drawing/2014/main" id="{EC98FF2D-212A-7B70-623B-C41A06195308}"/>
+                <a16:creationId xmlns:a16="http://schemas.microsoft.com/office/drawing/2014/main" id="{1E2913D7-C6AE-2DD2-4395-964FA1638952}"/>
               </a:ext>
             </a:extLst>
           </p:cNvPr>
@@ -10815,7 +10815,7 @@
           <p:cNvPr id="3" name="Textfeld 2">
             <a:extLst>
               <a:ext uri="{FF2B5EF4-FFF2-40B4-BE49-F238E27FC236}">
-                <a16:creationId xmlns:a16="http://schemas.microsoft.com/office/drawing/2014/main" id="{6DA6ED57-D2C9-1920-E21B-A2ED7BF563C6}"/>
+                <a16:creationId xmlns:a16="http://schemas.microsoft.com/office/drawing/2014/main" id="{0BD19633-52FD-F35D-3A8C-95B88E97244C}"/>
               </a:ext>
             </a:extLst>
           </p:cNvPr>
@@ -10940,7 +10940,7 @@
           <p:cNvPr id="4" name="Textfeld 3">
             <a:extLst>
               <a:ext uri="{FF2B5EF4-FFF2-40B4-BE49-F238E27FC236}">
-                <a16:creationId xmlns:a16="http://schemas.microsoft.com/office/drawing/2014/main" id="{7F4F3FA1-C20C-F9FB-6F34-4DBAF6C19E61}"/>
+                <a16:creationId xmlns:a16="http://schemas.microsoft.com/office/drawing/2014/main" id="{EC5C47C2-4B7F-9753-7A3A-6FCD1ADFF870}"/>
               </a:ext>
             </a:extLst>
           </p:cNvPr>
@@ -11065,7 +11065,7 @@
           <p:cNvPr id="5" name="Textfeld 4">
             <a:extLst>
               <a:ext uri="{FF2B5EF4-FFF2-40B4-BE49-F238E27FC236}">
-                <a16:creationId xmlns:a16="http://schemas.microsoft.com/office/drawing/2014/main" id="{3DE30615-887B-9E8C-8163-4BD6656296A5}"/>
+                <a16:creationId xmlns:a16="http://schemas.microsoft.com/office/drawing/2014/main" id="{CCD56016-BBFD-F5BF-A328-99B673BCFF91}"/>
               </a:ext>
             </a:extLst>
           </p:cNvPr>
@@ -11188,7 +11188,7 @@
     </p:spTree>
     <p:extLst>
       <p:ext uri="{BB962C8B-B14F-4D97-AF65-F5344CB8AC3E}">
-        <p14:creationId xmlns:p14="http://schemas.microsoft.com/office/powerpoint/2010/main" val="247981132"/>
+        <p14:creationId xmlns:p14="http://schemas.microsoft.com/office/powerpoint/2010/main" val="2629707241"/>
       </p:ext>
     </p:extLst>
   </p:cSld>
@@ -11220,7 +11220,7 @@
           <p:cNvPr id="2" name="Textfeld 1">
             <a:extLst>
               <a:ext uri="{FF2B5EF4-FFF2-40B4-BE49-F238E27FC236}">
-                <a16:creationId xmlns:a16="http://schemas.microsoft.com/office/drawing/2014/main" id="{CCFE21B9-543C-2809-D964-274D548FFC3E}"/>
+                <a16:creationId xmlns:a16="http://schemas.microsoft.com/office/drawing/2014/main" id="{9A12053E-7D08-1F97-9AE5-0FD80F798266}"/>
               </a:ext>
             </a:extLst>
           </p:cNvPr>
@@ -11345,7 +11345,7 @@
           <p:cNvPr id="3" name="Textfeld 2">
             <a:extLst>
               <a:ext uri="{FF2B5EF4-FFF2-40B4-BE49-F238E27FC236}">
-                <a16:creationId xmlns:a16="http://schemas.microsoft.com/office/drawing/2014/main" id="{0B58863F-FE83-C14B-C124-C059F5AFF2C1}"/>
+                <a16:creationId xmlns:a16="http://schemas.microsoft.com/office/drawing/2014/main" id="{98D9C9B6-9AE6-E4B7-A00A-0A11EBC4B58B}"/>
               </a:ext>
             </a:extLst>
           </p:cNvPr>
@@ -11470,7 +11470,7 @@
           <p:cNvPr id="4" name="Textfeld 3">
             <a:extLst>
               <a:ext uri="{FF2B5EF4-FFF2-40B4-BE49-F238E27FC236}">
-                <a16:creationId xmlns:a16="http://schemas.microsoft.com/office/drawing/2014/main" id="{76416CD3-9120-6D42-434B-FE8A9ABAC08F}"/>
+                <a16:creationId xmlns:a16="http://schemas.microsoft.com/office/drawing/2014/main" id="{9F4EC304-26FB-664B-17A4-F3C5507C8B03}"/>
               </a:ext>
             </a:extLst>
           </p:cNvPr>
@@ -11595,7 +11595,7 @@
           <p:cNvPr id="5" name="Textfeld 4">
             <a:extLst>
               <a:ext uri="{FF2B5EF4-FFF2-40B4-BE49-F238E27FC236}">
-                <a16:creationId xmlns:a16="http://schemas.microsoft.com/office/drawing/2014/main" id="{E7EA188D-C903-DFCF-7ECC-D709AC52FCD0}"/>
+                <a16:creationId xmlns:a16="http://schemas.microsoft.com/office/drawing/2014/main" id="{25E7A57A-EDFD-BB8B-37CA-EFB1E5EEAFFF}"/>
               </a:ext>
             </a:extLst>
           </p:cNvPr>
@@ -11718,7 +11718,7 @@
     </p:spTree>
     <p:extLst>
       <p:ext uri="{BB962C8B-B14F-4D97-AF65-F5344CB8AC3E}">
-        <p14:creationId xmlns:p14="http://schemas.microsoft.com/office/powerpoint/2010/main" val="301539724"/>
+        <p14:creationId xmlns:p14="http://schemas.microsoft.com/office/powerpoint/2010/main" val="555179589"/>
       </p:ext>
     </p:extLst>
   </p:cSld>
@@ -11750,7 +11750,7 @@
           <p:cNvPr id="2" name="Textfeld 1">
             <a:extLst>
               <a:ext uri="{FF2B5EF4-FFF2-40B4-BE49-F238E27FC236}">
-                <a16:creationId xmlns:a16="http://schemas.microsoft.com/office/drawing/2014/main" id="{A856F378-1852-43FF-BADA-5D8B02EC7CCA}"/>
+                <a16:creationId xmlns:a16="http://schemas.microsoft.com/office/drawing/2014/main" id="{3651B621-CE08-4B83-FD6A-DAE601B7CD7F}"/>
               </a:ext>
             </a:extLst>
           </p:cNvPr>
@@ -11845,7 +11845,7 @@
           <p:cNvPr id="3" name="Textfeld 2">
             <a:extLst>
               <a:ext uri="{FF2B5EF4-FFF2-40B4-BE49-F238E27FC236}">
-                <a16:creationId xmlns:a16="http://schemas.microsoft.com/office/drawing/2014/main" id="{320E18A8-B7C4-67EF-5635-BCC6739386E0}"/>
+                <a16:creationId xmlns:a16="http://schemas.microsoft.com/office/drawing/2014/main" id="{A2171893-4101-38DA-831F-BE43095F4944}"/>
               </a:ext>
             </a:extLst>
           </p:cNvPr>
@@ -11970,7 +11970,7 @@
           <p:cNvPr id="4" name="Textfeld 3">
             <a:extLst>
               <a:ext uri="{FF2B5EF4-FFF2-40B4-BE49-F238E27FC236}">
-                <a16:creationId xmlns:a16="http://schemas.microsoft.com/office/drawing/2014/main" id="{B7A525F4-B394-2CA1-28DC-D1CF8B7047B8}"/>
+                <a16:creationId xmlns:a16="http://schemas.microsoft.com/office/drawing/2014/main" id="{400EAD94-18F7-CBFE-E290-0F5DD517D2B3}"/>
               </a:ext>
             </a:extLst>
           </p:cNvPr>
@@ -12095,7 +12095,7 @@
           <p:cNvPr id="5" name="Textfeld 4">
             <a:extLst>
               <a:ext uri="{FF2B5EF4-FFF2-40B4-BE49-F238E27FC236}">
-                <a16:creationId xmlns:a16="http://schemas.microsoft.com/office/drawing/2014/main" id="{0AB8948F-19BF-E44B-BC36-5258A4E3ABF4}"/>
+                <a16:creationId xmlns:a16="http://schemas.microsoft.com/office/drawing/2014/main" id="{16D379FF-9E6D-9A78-B6AF-3C2B512707AC}"/>
               </a:ext>
             </a:extLst>
           </p:cNvPr>
@@ -12218,7 +12218,7 @@
     </p:spTree>
     <p:extLst>
       <p:ext uri="{BB962C8B-B14F-4D97-AF65-F5344CB8AC3E}">
-        <p14:creationId xmlns:p14="http://schemas.microsoft.com/office/powerpoint/2010/main" val="3576840938"/>
+        <p14:creationId xmlns:p14="http://schemas.microsoft.com/office/powerpoint/2010/main" val="1921747777"/>
       </p:ext>
     </p:extLst>
   </p:cSld>
@@ -12250,7 +12250,7 @@
           <p:cNvPr id="2" name="Textfeld 1">
             <a:extLst>
               <a:ext uri="{FF2B5EF4-FFF2-40B4-BE49-F238E27FC236}">
-                <a16:creationId xmlns:a16="http://schemas.microsoft.com/office/drawing/2014/main" id="{98648ABC-2A02-DCC2-4B23-86CC02A5610D}"/>
+                <a16:creationId xmlns:a16="http://schemas.microsoft.com/office/drawing/2014/main" id="{FE877DA2-CF4C-9568-C7B0-2FF60AC6BD7A}"/>
               </a:ext>
             </a:extLst>
           </p:cNvPr>
@@ -12345,7 +12345,7 @@
           <p:cNvPr id="3" name="Textfeld 2">
             <a:extLst>
               <a:ext uri="{FF2B5EF4-FFF2-40B4-BE49-F238E27FC236}">
-                <a16:creationId xmlns:a16="http://schemas.microsoft.com/office/drawing/2014/main" id="{39E2898B-DD51-1C66-79D3-EA31A073D301}"/>
+                <a16:creationId xmlns:a16="http://schemas.microsoft.com/office/drawing/2014/main" id="{41861C8D-BF76-4CAC-7015-2258A74EA077}"/>
               </a:ext>
             </a:extLst>
           </p:cNvPr>
@@ -12440,7 +12440,7 @@
           <p:cNvPr id="4" name="Textfeld 3">
             <a:extLst>
               <a:ext uri="{FF2B5EF4-FFF2-40B4-BE49-F238E27FC236}">
-                <a16:creationId xmlns:a16="http://schemas.microsoft.com/office/drawing/2014/main" id="{14172A6A-7C05-1DCA-ABB6-252ED9DEDDE5}"/>
+                <a16:creationId xmlns:a16="http://schemas.microsoft.com/office/drawing/2014/main" id="{84E46949-95BE-2951-EB36-13F9411AC235}"/>
               </a:ext>
             </a:extLst>
           </p:cNvPr>
@@ -12513,7 +12513,7 @@
           <p:cNvPr id="5" name="Textfeld 4">
             <a:extLst>
               <a:ext uri="{FF2B5EF4-FFF2-40B4-BE49-F238E27FC236}">
-                <a16:creationId xmlns:a16="http://schemas.microsoft.com/office/drawing/2014/main" id="{8D91E0E5-CC4D-64C7-B940-53DE26EF0E6B}"/>
+                <a16:creationId xmlns:a16="http://schemas.microsoft.com/office/drawing/2014/main" id="{D7E0D0F5-E534-8391-09CA-CF9A8BE96D4C}"/>
               </a:ext>
             </a:extLst>
           </p:cNvPr>
@@ -12654,7 +12654,7 @@
     </p:spTree>
     <p:extLst>
       <p:ext uri="{BB962C8B-B14F-4D97-AF65-F5344CB8AC3E}">
-        <p14:creationId xmlns:p14="http://schemas.microsoft.com/office/powerpoint/2010/main" val="2472195567"/>
+        <p14:creationId xmlns:p14="http://schemas.microsoft.com/office/powerpoint/2010/main" val="3263460419"/>
       </p:ext>
     </p:extLst>
   </p:cSld>
@@ -12686,7 +12686,7 @@
           <p:cNvPr id="2" name="Textfeld 1">
             <a:extLst>
               <a:ext uri="{FF2B5EF4-FFF2-40B4-BE49-F238E27FC236}">
-                <a16:creationId xmlns:a16="http://schemas.microsoft.com/office/drawing/2014/main" id="{029D7704-F7A8-A0DF-7234-74ED22C88BD1}"/>
+                <a16:creationId xmlns:a16="http://schemas.microsoft.com/office/drawing/2014/main" id="{2E2755E5-2F71-EE62-1D05-7B49721248F8}"/>
               </a:ext>
             </a:extLst>
           </p:cNvPr>
@@ -12781,7 +12781,7 @@
           <p:cNvPr id="3" name="Textfeld 2">
             <a:extLst>
               <a:ext uri="{FF2B5EF4-FFF2-40B4-BE49-F238E27FC236}">
-                <a16:creationId xmlns:a16="http://schemas.microsoft.com/office/drawing/2014/main" id="{BDB82B1A-8CB6-DB1F-81B0-5A61EF7392FE}"/>
+                <a16:creationId xmlns:a16="http://schemas.microsoft.com/office/drawing/2014/main" id="{9AF26CD9-9B23-CBB4-2C54-B7B95784CF73}"/>
               </a:ext>
             </a:extLst>
           </p:cNvPr>
@@ -12906,7 +12906,7 @@
           <p:cNvPr id="4" name="Textfeld 3">
             <a:extLst>
               <a:ext uri="{FF2B5EF4-FFF2-40B4-BE49-F238E27FC236}">
-                <a16:creationId xmlns:a16="http://schemas.microsoft.com/office/drawing/2014/main" id="{58C2B6B5-DC12-22B8-FC71-C96601553472}"/>
+                <a16:creationId xmlns:a16="http://schemas.microsoft.com/office/drawing/2014/main" id="{BF963A20-3EAB-6FC6-BBC5-0DD91F6726D6}"/>
               </a:ext>
             </a:extLst>
           </p:cNvPr>
@@ -13031,7 +13031,7 @@
           <p:cNvPr id="5" name="Textfeld 4">
             <a:extLst>
               <a:ext uri="{FF2B5EF4-FFF2-40B4-BE49-F238E27FC236}">
-                <a16:creationId xmlns:a16="http://schemas.microsoft.com/office/drawing/2014/main" id="{09E04FF3-0C36-E379-281B-1CBEAA62F41B}"/>
+                <a16:creationId xmlns:a16="http://schemas.microsoft.com/office/drawing/2014/main" id="{2B3169F2-F1FE-A087-5868-A0FF918F3C34}"/>
               </a:ext>
             </a:extLst>
           </p:cNvPr>
@@ -13154,7 +13154,7 @@
     </p:spTree>
     <p:extLst>
       <p:ext uri="{BB962C8B-B14F-4D97-AF65-F5344CB8AC3E}">
-        <p14:creationId xmlns:p14="http://schemas.microsoft.com/office/powerpoint/2010/main" val="2778254350"/>
+        <p14:creationId xmlns:p14="http://schemas.microsoft.com/office/powerpoint/2010/main" val="2373817873"/>
       </p:ext>
     </p:extLst>
   </p:cSld>
@@ -13186,7 +13186,7 @@
           <p:cNvPr id="2" name="Textfeld 1">
             <a:extLst>
               <a:ext uri="{FF2B5EF4-FFF2-40B4-BE49-F238E27FC236}">
-                <a16:creationId xmlns:a16="http://schemas.microsoft.com/office/drawing/2014/main" id="{2599078F-E04C-C4B7-FD81-5A88C39CD76F}"/>
+                <a16:creationId xmlns:a16="http://schemas.microsoft.com/office/drawing/2014/main" id="{D0BB5EC8-1729-A142-62AD-F5E029020F6D}"/>
               </a:ext>
             </a:extLst>
           </p:cNvPr>
@@ -13281,7 +13281,7 @@
           <p:cNvPr id="3" name="Textfeld 2">
             <a:extLst>
               <a:ext uri="{FF2B5EF4-FFF2-40B4-BE49-F238E27FC236}">
-                <a16:creationId xmlns:a16="http://schemas.microsoft.com/office/drawing/2014/main" id="{49A57DC8-D662-BE43-D38B-F87ED94929F8}"/>
+                <a16:creationId xmlns:a16="http://schemas.microsoft.com/office/drawing/2014/main" id="{A91E940C-2065-61A5-5948-7C12075065F6}"/>
               </a:ext>
             </a:extLst>
           </p:cNvPr>
@@ -13376,7 +13376,7 @@
           <p:cNvPr id="4" name="Textfeld 3">
             <a:extLst>
               <a:ext uri="{FF2B5EF4-FFF2-40B4-BE49-F238E27FC236}">
-                <a16:creationId xmlns:a16="http://schemas.microsoft.com/office/drawing/2014/main" id="{53319065-44A2-D55A-6308-431A0134D5F2}"/>
+                <a16:creationId xmlns:a16="http://schemas.microsoft.com/office/drawing/2014/main" id="{A8D5E177-9EC6-6CEC-AD22-470538088052}"/>
               </a:ext>
             </a:extLst>
           </p:cNvPr>
@@ -13449,7 +13449,7 @@
           <p:cNvPr id="5" name="Textfeld 4">
             <a:extLst>
               <a:ext uri="{FF2B5EF4-FFF2-40B4-BE49-F238E27FC236}">
-                <a16:creationId xmlns:a16="http://schemas.microsoft.com/office/drawing/2014/main" id="{8FC72E30-637A-87EB-F972-1D4B6D8AC2D6}"/>
+                <a16:creationId xmlns:a16="http://schemas.microsoft.com/office/drawing/2014/main" id="{29727557-7BCA-2A3C-CF86-2F62746F3428}"/>
               </a:ext>
             </a:extLst>
           </p:cNvPr>
@@ -13590,7 +13590,7 @@
     </p:spTree>
     <p:extLst>
       <p:ext uri="{BB962C8B-B14F-4D97-AF65-F5344CB8AC3E}">
-        <p14:creationId xmlns:p14="http://schemas.microsoft.com/office/powerpoint/2010/main" val="1109192203"/>
+        <p14:creationId xmlns:p14="http://schemas.microsoft.com/office/powerpoint/2010/main" val="3282876448"/>
       </p:ext>
     </p:extLst>
   </p:cSld>
@@ -13622,7 +13622,7 @@
           <p:cNvPr id="2" name="Textfeld 1">
             <a:extLst>
               <a:ext uri="{FF2B5EF4-FFF2-40B4-BE49-F238E27FC236}">
-                <a16:creationId xmlns:a16="http://schemas.microsoft.com/office/drawing/2014/main" id="{E5D270ED-56C5-6458-778E-1ABA559F9613}"/>
+                <a16:creationId xmlns:a16="http://schemas.microsoft.com/office/drawing/2014/main" id="{8113E330-C070-2E1C-CAB0-8A2651110029}"/>
               </a:ext>
             </a:extLst>
           </p:cNvPr>
@@ -13717,7 +13717,7 @@
           <p:cNvPr id="3" name="Textfeld 2">
             <a:extLst>
               <a:ext uri="{FF2B5EF4-FFF2-40B4-BE49-F238E27FC236}">
-                <a16:creationId xmlns:a16="http://schemas.microsoft.com/office/drawing/2014/main" id="{979935DA-D997-276C-D546-B0B4DB6A260B}"/>
+                <a16:creationId xmlns:a16="http://schemas.microsoft.com/office/drawing/2014/main" id="{42CEDE90-65FD-F81A-7744-9BDF4A878B90}"/>
               </a:ext>
             </a:extLst>
           </p:cNvPr>
@@ -13842,7 +13842,7 @@
           <p:cNvPr id="4" name="Textfeld 3">
             <a:extLst>
               <a:ext uri="{FF2B5EF4-FFF2-40B4-BE49-F238E27FC236}">
-                <a16:creationId xmlns:a16="http://schemas.microsoft.com/office/drawing/2014/main" id="{EE7C0D6D-08BA-35C3-833A-7B238474FC92}"/>
+                <a16:creationId xmlns:a16="http://schemas.microsoft.com/office/drawing/2014/main" id="{DD678486-79A5-2A4E-100A-ED40D052A0E0}"/>
               </a:ext>
             </a:extLst>
           </p:cNvPr>
@@ -13967,7 +13967,7 @@
           <p:cNvPr id="5" name="Textfeld 4">
             <a:extLst>
               <a:ext uri="{FF2B5EF4-FFF2-40B4-BE49-F238E27FC236}">
-                <a16:creationId xmlns:a16="http://schemas.microsoft.com/office/drawing/2014/main" id="{8B0AC1AD-FF88-20A6-3E0B-A48AD2EDB832}"/>
+                <a16:creationId xmlns:a16="http://schemas.microsoft.com/office/drawing/2014/main" id="{6F764148-8FE6-1A0F-CFED-B9F793DA24E3}"/>
               </a:ext>
             </a:extLst>
           </p:cNvPr>
@@ -14090,7 +14090,7 @@
     </p:spTree>
     <p:extLst>
       <p:ext uri="{BB962C8B-B14F-4D97-AF65-F5344CB8AC3E}">
-        <p14:creationId xmlns:p14="http://schemas.microsoft.com/office/powerpoint/2010/main" val="409220014"/>
+        <p14:creationId xmlns:p14="http://schemas.microsoft.com/office/powerpoint/2010/main" val="2998170313"/>
       </p:ext>
     </p:extLst>
   </p:cSld>
@@ -14122,7 +14122,7 @@
           <p:cNvPr id="2" name="Textfeld 1">
             <a:extLst>
               <a:ext uri="{FF2B5EF4-FFF2-40B4-BE49-F238E27FC236}">
-                <a16:creationId xmlns:a16="http://schemas.microsoft.com/office/drawing/2014/main" id="{EAF34DE6-FEE6-BDD0-ACA1-AE1A0E028037}"/>
+                <a16:creationId xmlns:a16="http://schemas.microsoft.com/office/drawing/2014/main" id="{7067ABEB-F3E0-FBB7-0EDF-31BBF371B3DF}"/>
               </a:ext>
             </a:extLst>
           </p:cNvPr>
@@ -14217,7 +14217,7 @@
           <p:cNvPr id="3" name="Textfeld 2">
             <a:extLst>
               <a:ext uri="{FF2B5EF4-FFF2-40B4-BE49-F238E27FC236}">
-                <a16:creationId xmlns:a16="http://schemas.microsoft.com/office/drawing/2014/main" id="{574FC4B8-DA95-FB32-13A0-001B11D3AA76}"/>
+                <a16:creationId xmlns:a16="http://schemas.microsoft.com/office/drawing/2014/main" id="{8C630DBF-C0A9-7399-9A03-EA3F32022BF6}"/>
               </a:ext>
             </a:extLst>
           </p:cNvPr>
@@ -14312,7 +14312,7 @@
           <p:cNvPr id="4" name="Textfeld 3">
             <a:extLst>
               <a:ext uri="{FF2B5EF4-FFF2-40B4-BE49-F238E27FC236}">
-                <a16:creationId xmlns:a16="http://schemas.microsoft.com/office/drawing/2014/main" id="{A099762E-DEA9-5B5B-7456-D2A2AD804C20}"/>
+                <a16:creationId xmlns:a16="http://schemas.microsoft.com/office/drawing/2014/main" id="{D6B04A0B-B3F9-EC7A-C7FA-F598BFE1F1F0}"/>
               </a:ext>
             </a:extLst>
           </p:cNvPr>
@@ -14385,7 +14385,7 @@
           <p:cNvPr id="5" name="Textfeld 4">
             <a:extLst>
               <a:ext uri="{FF2B5EF4-FFF2-40B4-BE49-F238E27FC236}">
-                <a16:creationId xmlns:a16="http://schemas.microsoft.com/office/drawing/2014/main" id="{B385471D-1B1B-236C-F93F-36C7D6E9E20E}"/>
+                <a16:creationId xmlns:a16="http://schemas.microsoft.com/office/drawing/2014/main" id="{49EB8DAE-84D4-B548-5AAC-BD62A66259CC}"/>
               </a:ext>
             </a:extLst>
           </p:cNvPr>
@@ -14526,7 +14526,7 @@
     </p:spTree>
     <p:extLst>
       <p:ext uri="{BB962C8B-B14F-4D97-AF65-F5344CB8AC3E}">
-        <p14:creationId xmlns:p14="http://schemas.microsoft.com/office/powerpoint/2010/main" val="917285726"/>
+        <p14:creationId xmlns:p14="http://schemas.microsoft.com/office/powerpoint/2010/main" val="3956556426"/>
       </p:ext>
     </p:extLst>
   </p:cSld>
@@ -14558,7 +14558,7 @@
           <p:cNvPr id="2" name="Textfeld 1">
             <a:extLst>
               <a:ext uri="{FF2B5EF4-FFF2-40B4-BE49-F238E27FC236}">
-                <a16:creationId xmlns:a16="http://schemas.microsoft.com/office/drawing/2014/main" id="{2E6D33A8-1EDD-3EC9-E20A-2B8EC38B4FEC}"/>
+                <a16:creationId xmlns:a16="http://schemas.microsoft.com/office/drawing/2014/main" id="{2CD21415-F54D-6571-6914-32F234E87027}"/>
               </a:ext>
             </a:extLst>
           </p:cNvPr>
@@ -14653,7 +14653,7 @@
           <p:cNvPr id="3" name="Textfeld 2">
             <a:extLst>
               <a:ext uri="{FF2B5EF4-FFF2-40B4-BE49-F238E27FC236}">
-                <a16:creationId xmlns:a16="http://schemas.microsoft.com/office/drawing/2014/main" id="{47334D6D-D176-6F2C-4446-26AE9E6CCB80}"/>
+                <a16:creationId xmlns:a16="http://schemas.microsoft.com/office/drawing/2014/main" id="{32008BDB-E645-665F-1AFD-01D19BE230B2}"/>
               </a:ext>
             </a:extLst>
           </p:cNvPr>
@@ -14778,7 +14778,7 @@
           <p:cNvPr id="4" name="Textfeld 3">
             <a:extLst>
               <a:ext uri="{FF2B5EF4-FFF2-40B4-BE49-F238E27FC236}">
-                <a16:creationId xmlns:a16="http://schemas.microsoft.com/office/drawing/2014/main" id="{397CDF2F-A1A2-9EAB-4614-F4E6193956FC}"/>
+                <a16:creationId xmlns:a16="http://schemas.microsoft.com/office/drawing/2014/main" id="{5E46D8BB-C26E-945F-D100-7AEEA6C4DA1F}"/>
               </a:ext>
             </a:extLst>
           </p:cNvPr>
@@ -14903,7 +14903,7 @@
           <p:cNvPr id="5" name="Textfeld 4">
             <a:extLst>
               <a:ext uri="{FF2B5EF4-FFF2-40B4-BE49-F238E27FC236}">
-                <a16:creationId xmlns:a16="http://schemas.microsoft.com/office/drawing/2014/main" id="{B39AD10E-DEAE-444C-D40B-9D86686B9583}"/>
+                <a16:creationId xmlns:a16="http://schemas.microsoft.com/office/drawing/2014/main" id="{1DEEFDD9-274E-C6F5-CE01-B2D34CAA964C}"/>
               </a:ext>
             </a:extLst>
           </p:cNvPr>
@@ -15026,7 +15026,7 @@
     </p:spTree>
     <p:extLst>
       <p:ext uri="{BB962C8B-B14F-4D97-AF65-F5344CB8AC3E}">
-        <p14:creationId xmlns:p14="http://schemas.microsoft.com/office/powerpoint/2010/main" val="1819225718"/>
+        <p14:creationId xmlns:p14="http://schemas.microsoft.com/office/powerpoint/2010/main" val="1479772699"/>
       </p:ext>
     </p:extLst>
   </p:cSld>

--- a/tests/corpus/pptx/generated/text-metrics.pptx
+++ b/tests/corpus/pptx/generated/text-metrics.pptx
@@ -153,7 +153,7 @@
           <p:cNvPr id="2" name="Titel 1">
             <a:extLst>
               <a:ext uri="{FF2B5EF4-FFF2-40B4-BE49-F238E27FC236}">
-                <a16:creationId xmlns:a16="http://schemas.microsoft.com/office/drawing/2014/main" id="{E067CB8B-F1A5-C48E-916B-4125B565E22F}"/>
+                <a16:creationId xmlns:a16="http://schemas.microsoft.com/office/drawing/2014/main" id="{4DE7A717-3D48-D828-37E5-19C6168F448F}"/>
               </a:ext>
             </a:extLst>
           </p:cNvPr>
@@ -190,7 +190,7 @@
           <p:cNvPr id="3" name="Untertitel 2">
             <a:extLst>
               <a:ext uri="{FF2B5EF4-FFF2-40B4-BE49-F238E27FC236}">
-                <a16:creationId xmlns:a16="http://schemas.microsoft.com/office/drawing/2014/main" id="{B5EAE6B0-EAC2-3F1F-8220-AD732B873C6B}"/>
+                <a16:creationId xmlns:a16="http://schemas.microsoft.com/office/drawing/2014/main" id="{F1CD4076-8648-6A1F-EF31-C05C8EBEF1AE}"/>
               </a:ext>
             </a:extLst>
           </p:cNvPr>
@@ -260,7 +260,7 @@
           <p:cNvPr id="4" name="Datumsplatzhalter 3">
             <a:extLst>
               <a:ext uri="{FF2B5EF4-FFF2-40B4-BE49-F238E27FC236}">
-                <a16:creationId xmlns:a16="http://schemas.microsoft.com/office/drawing/2014/main" id="{C7DA375C-E4D4-9D32-D7F8-8A00ADF3C534}"/>
+                <a16:creationId xmlns:a16="http://schemas.microsoft.com/office/drawing/2014/main" id="{A7CA6FD2-2FF3-0AE9-E37B-3117104E13F1}"/>
               </a:ext>
             </a:extLst>
           </p:cNvPr>
@@ -276,7 +276,7 @@
           <a:bodyPr/>
           <a:lstStyle/>
           <a:p>
-            <a:fld id="{D4E4E22E-3ABD-487B-A461-F35064D7E1CB}" type="datetimeFigureOut">
+            <a:fld id="{0982C7D4-AFF3-4799-A37B-64BC7CFCFD91}" type="datetimeFigureOut">
               <a:rPr lang="de-DE" smtClean="0"/>
               <a:t>08.10.2026</a:t>
             </a:fld>
@@ -289,7 +289,7 @@
           <p:cNvPr id="5" name="Fußzeilenplatzhalter 4">
             <a:extLst>
               <a:ext uri="{FF2B5EF4-FFF2-40B4-BE49-F238E27FC236}">
-                <a16:creationId xmlns:a16="http://schemas.microsoft.com/office/drawing/2014/main" id="{928C4502-9F4D-BF31-C561-88F8A35EA8AD}"/>
+                <a16:creationId xmlns:a16="http://schemas.microsoft.com/office/drawing/2014/main" id="{1A0A3CC3-47EF-0D5D-A3FD-58D2B2AE9327}"/>
               </a:ext>
             </a:extLst>
           </p:cNvPr>
@@ -314,7 +314,7 @@
           <p:cNvPr id="6" name="Foliennummernplatzhalter 5">
             <a:extLst>
               <a:ext uri="{FF2B5EF4-FFF2-40B4-BE49-F238E27FC236}">
-                <a16:creationId xmlns:a16="http://schemas.microsoft.com/office/drawing/2014/main" id="{CE2C9061-36C5-2F3C-9B4E-4DB56F36EAD4}"/>
+                <a16:creationId xmlns:a16="http://schemas.microsoft.com/office/drawing/2014/main" id="{DED2F0E5-93E5-4671-1AC7-5E78599CE085}"/>
               </a:ext>
             </a:extLst>
           </p:cNvPr>
@@ -330,7 +330,7 @@
           <a:bodyPr/>
           <a:lstStyle/>
           <a:p>
-            <a:fld id="{5D22E049-7081-4061-85D4-497D056D5297}" type="slidenum">
+            <a:fld id="{068D1EE3-12EE-475A-9834-64E2C8270542}" type="slidenum">
               <a:rPr lang="de-DE" smtClean="0"/>
               <a:t>‹Nr.›</a:t>
             </a:fld>
@@ -341,7 +341,7 @@
     </p:spTree>
     <p:extLst>
       <p:ext uri="{BB962C8B-B14F-4D97-AF65-F5344CB8AC3E}">
-        <p14:creationId xmlns:p14="http://schemas.microsoft.com/office/powerpoint/2010/main" val="1226326884"/>
+        <p14:creationId xmlns:p14="http://schemas.microsoft.com/office/powerpoint/2010/main" val="1225040020"/>
       </p:ext>
     </p:extLst>
   </p:cSld>
@@ -373,7 +373,7 @@
           <p:cNvPr id="2" name="Titel 1">
             <a:extLst>
               <a:ext uri="{FF2B5EF4-FFF2-40B4-BE49-F238E27FC236}">
-                <a16:creationId xmlns:a16="http://schemas.microsoft.com/office/drawing/2014/main" id="{29F2099F-0C36-7EC7-CB65-457FA6DE8A11}"/>
+                <a16:creationId xmlns:a16="http://schemas.microsoft.com/office/drawing/2014/main" id="{649221EE-68D2-683A-FA9B-BA9D8D64D971}"/>
               </a:ext>
             </a:extLst>
           </p:cNvPr>
@@ -401,7 +401,7 @@
           <p:cNvPr id="3" name="Vertikaler Textplatzhalter 2">
             <a:extLst>
               <a:ext uri="{FF2B5EF4-FFF2-40B4-BE49-F238E27FC236}">
-                <a16:creationId xmlns:a16="http://schemas.microsoft.com/office/drawing/2014/main" id="{59A6749A-EF8F-54BE-EC35-FB7DF7A00C85}"/>
+                <a16:creationId xmlns:a16="http://schemas.microsoft.com/office/drawing/2014/main" id="{86DA786E-6285-7956-BE4D-2D262F1DB0BE}"/>
               </a:ext>
             </a:extLst>
           </p:cNvPr>
@@ -458,7 +458,7 @@
           <p:cNvPr id="4" name="Datumsplatzhalter 3">
             <a:extLst>
               <a:ext uri="{FF2B5EF4-FFF2-40B4-BE49-F238E27FC236}">
-                <a16:creationId xmlns:a16="http://schemas.microsoft.com/office/drawing/2014/main" id="{177D9B3C-01F2-BBD2-EF30-BDFD5B3FC8BA}"/>
+                <a16:creationId xmlns:a16="http://schemas.microsoft.com/office/drawing/2014/main" id="{38207D8D-128C-B483-AFA5-E29C413ADCD8}"/>
               </a:ext>
             </a:extLst>
           </p:cNvPr>
@@ -474,7 +474,7 @@
           <a:bodyPr/>
           <a:lstStyle/>
           <a:p>
-            <a:fld id="{D4E4E22E-3ABD-487B-A461-F35064D7E1CB}" type="datetimeFigureOut">
+            <a:fld id="{0982C7D4-AFF3-4799-A37B-64BC7CFCFD91}" type="datetimeFigureOut">
               <a:rPr lang="de-DE" smtClean="0"/>
               <a:t>08.10.2026</a:t>
             </a:fld>
@@ -487,7 +487,7 @@
           <p:cNvPr id="5" name="Fußzeilenplatzhalter 4">
             <a:extLst>
               <a:ext uri="{FF2B5EF4-FFF2-40B4-BE49-F238E27FC236}">
-                <a16:creationId xmlns:a16="http://schemas.microsoft.com/office/drawing/2014/main" id="{D5F07461-5ED8-E6BA-F6C6-0AB616A8B6FF}"/>
+                <a16:creationId xmlns:a16="http://schemas.microsoft.com/office/drawing/2014/main" id="{CC283645-AAD0-96F4-2CDD-6907BB352D2F}"/>
               </a:ext>
             </a:extLst>
           </p:cNvPr>
@@ -512,7 +512,7 @@
           <p:cNvPr id="6" name="Foliennummernplatzhalter 5">
             <a:extLst>
               <a:ext uri="{FF2B5EF4-FFF2-40B4-BE49-F238E27FC236}">
-                <a16:creationId xmlns:a16="http://schemas.microsoft.com/office/drawing/2014/main" id="{F0557114-ECD7-268E-DD0B-2AB7C815968B}"/>
+                <a16:creationId xmlns:a16="http://schemas.microsoft.com/office/drawing/2014/main" id="{516F2771-F94E-821C-E00E-08AE04979E57}"/>
               </a:ext>
             </a:extLst>
           </p:cNvPr>
@@ -528,7 +528,7 @@
           <a:bodyPr/>
           <a:lstStyle/>
           <a:p>
-            <a:fld id="{5D22E049-7081-4061-85D4-497D056D5297}" type="slidenum">
+            <a:fld id="{068D1EE3-12EE-475A-9834-64E2C8270542}" type="slidenum">
               <a:rPr lang="de-DE" smtClean="0"/>
               <a:t>‹Nr.›</a:t>
             </a:fld>
@@ -539,7 +539,7 @@
     </p:spTree>
     <p:extLst>
       <p:ext uri="{BB962C8B-B14F-4D97-AF65-F5344CB8AC3E}">
-        <p14:creationId xmlns:p14="http://schemas.microsoft.com/office/powerpoint/2010/main" val="474190913"/>
+        <p14:creationId xmlns:p14="http://schemas.microsoft.com/office/powerpoint/2010/main" val="3908874429"/>
       </p:ext>
     </p:extLst>
   </p:cSld>
@@ -571,7 +571,7 @@
           <p:cNvPr id="2" name="Vertikaler Titel 1">
             <a:extLst>
               <a:ext uri="{FF2B5EF4-FFF2-40B4-BE49-F238E27FC236}">
-                <a16:creationId xmlns:a16="http://schemas.microsoft.com/office/drawing/2014/main" id="{E9BBA29B-2E78-355B-421C-D79A0365DAC7}"/>
+                <a16:creationId xmlns:a16="http://schemas.microsoft.com/office/drawing/2014/main" id="{39153B24-5327-51DC-5DCE-6A37F666CFF9}"/>
               </a:ext>
             </a:extLst>
           </p:cNvPr>
@@ -604,7 +604,7 @@
           <p:cNvPr id="3" name="Vertikaler Textplatzhalter 2">
             <a:extLst>
               <a:ext uri="{FF2B5EF4-FFF2-40B4-BE49-F238E27FC236}">
-                <a16:creationId xmlns:a16="http://schemas.microsoft.com/office/drawing/2014/main" id="{03299046-ED3F-9D3B-C502-C60EA84A393F}"/>
+                <a16:creationId xmlns:a16="http://schemas.microsoft.com/office/drawing/2014/main" id="{494080AF-987E-ADBE-5160-C3EA7AD9AB4B}"/>
               </a:ext>
             </a:extLst>
           </p:cNvPr>
@@ -666,7 +666,7 @@
           <p:cNvPr id="4" name="Datumsplatzhalter 3">
             <a:extLst>
               <a:ext uri="{FF2B5EF4-FFF2-40B4-BE49-F238E27FC236}">
-                <a16:creationId xmlns:a16="http://schemas.microsoft.com/office/drawing/2014/main" id="{EF4D55B0-2F2F-15D8-46EA-9AD31C4E053E}"/>
+                <a16:creationId xmlns:a16="http://schemas.microsoft.com/office/drawing/2014/main" id="{0DF9FBC4-07E0-1F92-BB9F-3309B1C9C88E}"/>
               </a:ext>
             </a:extLst>
           </p:cNvPr>
@@ -682,7 +682,7 @@
           <a:bodyPr/>
           <a:lstStyle/>
           <a:p>
-            <a:fld id="{D4E4E22E-3ABD-487B-A461-F35064D7E1CB}" type="datetimeFigureOut">
+            <a:fld id="{0982C7D4-AFF3-4799-A37B-64BC7CFCFD91}" type="datetimeFigureOut">
               <a:rPr lang="de-DE" smtClean="0"/>
               <a:t>08.10.2026</a:t>
             </a:fld>
@@ -695,7 +695,7 @@
           <p:cNvPr id="5" name="Fußzeilenplatzhalter 4">
             <a:extLst>
               <a:ext uri="{FF2B5EF4-FFF2-40B4-BE49-F238E27FC236}">
-                <a16:creationId xmlns:a16="http://schemas.microsoft.com/office/drawing/2014/main" id="{A186189B-204D-218A-7905-91AF840A4CF3}"/>
+                <a16:creationId xmlns:a16="http://schemas.microsoft.com/office/drawing/2014/main" id="{8D75D69E-359E-650E-74ED-6238A2FB3F1C}"/>
               </a:ext>
             </a:extLst>
           </p:cNvPr>
@@ -720,7 +720,7 @@
           <p:cNvPr id="6" name="Foliennummernplatzhalter 5">
             <a:extLst>
               <a:ext uri="{FF2B5EF4-FFF2-40B4-BE49-F238E27FC236}">
-                <a16:creationId xmlns:a16="http://schemas.microsoft.com/office/drawing/2014/main" id="{8E40098D-015D-F232-97CD-F6FC32A5D8FA}"/>
+                <a16:creationId xmlns:a16="http://schemas.microsoft.com/office/drawing/2014/main" id="{D1508C72-15F5-02DB-FE48-9C09A1CE2A1B}"/>
               </a:ext>
             </a:extLst>
           </p:cNvPr>
@@ -736,7 +736,7 @@
           <a:bodyPr/>
           <a:lstStyle/>
           <a:p>
-            <a:fld id="{5D22E049-7081-4061-85D4-497D056D5297}" type="slidenum">
+            <a:fld id="{068D1EE3-12EE-475A-9834-64E2C8270542}" type="slidenum">
               <a:rPr lang="de-DE" smtClean="0"/>
               <a:t>‹Nr.›</a:t>
             </a:fld>
@@ -747,7 +747,7 @@
     </p:spTree>
     <p:extLst>
       <p:ext uri="{BB962C8B-B14F-4D97-AF65-F5344CB8AC3E}">
-        <p14:creationId xmlns:p14="http://schemas.microsoft.com/office/powerpoint/2010/main" val="3361106856"/>
+        <p14:creationId xmlns:p14="http://schemas.microsoft.com/office/powerpoint/2010/main" val="40073981"/>
       </p:ext>
     </p:extLst>
   </p:cSld>
@@ -779,7 +779,7 @@
           <p:cNvPr id="2" name="Titel 1">
             <a:extLst>
               <a:ext uri="{FF2B5EF4-FFF2-40B4-BE49-F238E27FC236}">
-                <a16:creationId xmlns:a16="http://schemas.microsoft.com/office/drawing/2014/main" id="{371FCB8D-D9E3-8841-84CF-C8BE8D86BC5A}"/>
+                <a16:creationId xmlns:a16="http://schemas.microsoft.com/office/drawing/2014/main" id="{1E45B890-33D6-3735-EF57-596B34C1659A}"/>
               </a:ext>
             </a:extLst>
           </p:cNvPr>
@@ -807,7 +807,7 @@
           <p:cNvPr id="3" name="Inhaltsplatzhalter 2">
             <a:extLst>
               <a:ext uri="{FF2B5EF4-FFF2-40B4-BE49-F238E27FC236}">
-                <a16:creationId xmlns:a16="http://schemas.microsoft.com/office/drawing/2014/main" id="{ECC77E8D-3236-3B12-615C-85212CED1D8A}"/>
+                <a16:creationId xmlns:a16="http://schemas.microsoft.com/office/drawing/2014/main" id="{923E99BA-3004-B80E-5257-3750C304EC55}"/>
               </a:ext>
             </a:extLst>
           </p:cNvPr>
@@ -864,7 +864,7 @@
           <p:cNvPr id="4" name="Datumsplatzhalter 3">
             <a:extLst>
               <a:ext uri="{FF2B5EF4-FFF2-40B4-BE49-F238E27FC236}">
-                <a16:creationId xmlns:a16="http://schemas.microsoft.com/office/drawing/2014/main" id="{7DF20303-685F-70DA-F418-F8A7AD74C1CD}"/>
+                <a16:creationId xmlns:a16="http://schemas.microsoft.com/office/drawing/2014/main" id="{9C34D011-99DE-4053-9830-D98BCE33EBF4}"/>
               </a:ext>
             </a:extLst>
           </p:cNvPr>
@@ -880,7 +880,7 @@
           <a:bodyPr/>
           <a:lstStyle/>
           <a:p>
-            <a:fld id="{D4E4E22E-3ABD-487B-A461-F35064D7E1CB}" type="datetimeFigureOut">
+            <a:fld id="{0982C7D4-AFF3-4799-A37B-64BC7CFCFD91}" type="datetimeFigureOut">
               <a:rPr lang="de-DE" smtClean="0"/>
               <a:t>08.10.2026</a:t>
             </a:fld>
@@ -893,7 +893,7 @@
           <p:cNvPr id="5" name="Fußzeilenplatzhalter 4">
             <a:extLst>
               <a:ext uri="{FF2B5EF4-FFF2-40B4-BE49-F238E27FC236}">
-                <a16:creationId xmlns:a16="http://schemas.microsoft.com/office/drawing/2014/main" id="{00B5B9E8-2BBA-1AFA-C21F-2373451EEDC2}"/>
+                <a16:creationId xmlns:a16="http://schemas.microsoft.com/office/drawing/2014/main" id="{AF5E3380-563C-531B-EFFB-F350CE771CAE}"/>
               </a:ext>
             </a:extLst>
           </p:cNvPr>
@@ -918,7 +918,7 @@
           <p:cNvPr id="6" name="Foliennummernplatzhalter 5">
             <a:extLst>
               <a:ext uri="{FF2B5EF4-FFF2-40B4-BE49-F238E27FC236}">
-                <a16:creationId xmlns:a16="http://schemas.microsoft.com/office/drawing/2014/main" id="{F7DF5646-8B72-0FC9-2A86-65B4F524FB08}"/>
+                <a16:creationId xmlns:a16="http://schemas.microsoft.com/office/drawing/2014/main" id="{FB6208F7-579B-F4E0-77AD-8F9A7C327B75}"/>
               </a:ext>
             </a:extLst>
           </p:cNvPr>
@@ -934,7 +934,7 @@
           <a:bodyPr/>
           <a:lstStyle/>
           <a:p>
-            <a:fld id="{5D22E049-7081-4061-85D4-497D056D5297}" type="slidenum">
+            <a:fld id="{068D1EE3-12EE-475A-9834-64E2C8270542}" type="slidenum">
               <a:rPr lang="de-DE" smtClean="0"/>
               <a:t>‹Nr.›</a:t>
             </a:fld>
@@ -945,7 +945,7 @@
     </p:spTree>
     <p:extLst>
       <p:ext uri="{BB962C8B-B14F-4D97-AF65-F5344CB8AC3E}">
-        <p14:creationId xmlns:p14="http://schemas.microsoft.com/office/powerpoint/2010/main" val="1856438465"/>
+        <p14:creationId xmlns:p14="http://schemas.microsoft.com/office/powerpoint/2010/main" val="1397326271"/>
       </p:ext>
     </p:extLst>
   </p:cSld>
@@ -977,7 +977,7 @@
           <p:cNvPr id="2" name="Titel 1">
             <a:extLst>
               <a:ext uri="{FF2B5EF4-FFF2-40B4-BE49-F238E27FC236}">
-                <a16:creationId xmlns:a16="http://schemas.microsoft.com/office/drawing/2014/main" id="{7A1AC5D1-1B27-F382-6BEC-D348C62320B8}"/>
+                <a16:creationId xmlns:a16="http://schemas.microsoft.com/office/drawing/2014/main" id="{9372E2A0-A45D-28C7-EEEE-BAAD2BD43505}"/>
               </a:ext>
             </a:extLst>
           </p:cNvPr>
@@ -1014,7 +1014,7 @@
           <p:cNvPr id="3" name="Textplatzhalter 2">
             <a:extLst>
               <a:ext uri="{FF2B5EF4-FFF2-40B4-BE49-F238E27FC236}">
-                <a16:creationId xmlns:a16="http://schemas.microsoft.com/office/drawing/2014/main" id="{2D00D32A-181C-F945-262E-2062E70D1AEA}"/>
+                <a16:creationId xmlns:a16="http://schemas.microsoft.com/office/drawing/2014/main" id="{CF5AE71A-8E25-8083-D5FA-1793CC2B5F9C}"/>
               </a:ext>
             </a:extLst>
           </p:cNvPr>
@@ -1139,7 +1139,7 @@
           <p:cNvPr id="4" name="Datumsplatzhalter 3">
             <a:extLst>
               <a:ext uri="{FF2B5EF4-FFF2-40B4-BE49-F238E27FC236}">
-                <a16:creationId xmlns:a16="http://schemas.microsoft.com/office/drawing/2014/main" id="{9121DDEC-6B48-7F34-45FA-A441480348B0}"/>
+                <a16:creationId xmlns:a16="http://schemas.microsoft.com/office/drawing/2014/main" id="{80434B88-159A-06D9-4ED9-3BCEFF36B822}"/>
               </a:ext>
             </a:extLst>
           </p:cNvPr>
@@ -1155,7 +1155,7 @@
           <a:bodyPr/>
           <a:lstStyle/>
           <a:p>
-            <a:fld id="{D4E4E22E-3ABD-487B-A461-F35064D7E1CB}" type="datetimeFigureOut">
+            <a:fld id="{0982C7D4-AFF3-4799-A37B-64BC7CFCFD91}" type="datetimeFigureOut">
               <a:rPr lang="de-DE" smtClean="0"/>
               <a:t>08.10.2026</a:t>
             </a:fld>
@@ -1168,7 +1168,7 @@
           <p:cNvPr id="5" name="Fußzeilenplatzhalter 4">
             <a:extLst>
               <a:ext uri="{FF2B5EF4-FFF2-40B4-BE49-F238E27FC236}">
-                <a16:creationId xmlns:a16="http://schemas.microsoft.com/office/drawing/2014/main" id="{391EC7A3-6F43-5C79-126A-3DD9F319BE1C}"/>
+                <a16:creationId xmlns:a16="http://schemas.microsoft.com/office/drawing/2014/main" id="{1401F647-15BC-55C6-AA15-4CA5A0917406}"/>
               </a:ext>
             </a:extLst>
           </p:cNvPr>
@@ -1193,7 +1193,7 @@
           <p:cNvPr id="6" name="Foliennummernplatzhalter 5">
             <a:extLst>
               <a:ext uri="{FF2B5EF4-FFF2-40B4-BE49-F238E27FC236}">
-                <a16:creationId xmlns:a16="http://schemas.microsoft.com/office/drawing/2014/main" id="{9204D2D0-5C35-381E-16C5-8F8B9BCBEC71}"/>
+                <a16:creationId xmlns:a16="http://schemas.microsoft.com/office/drawing/2014/main" id="{65580579-612B-7F2F-F94E-286AFEB2B7AE}"/>
               </a:ext>
             </a:extLst>
           </p:cNvPr>
@@ -1209,7 +1209,7 @@
           <a:bodyPr/>
           <a:lstStyle/>
           <a:p>
-            <a:fld id="{5D22E049-7081-4061-85D4-497D056D5297}" type="slidenum">
+            <a:fld id="{068D1EE3-12EE-475A-9834-64E2C8270542}" type="slidenum">
               <a:rPr lang="de-DE" smtClean="0"/>
               <a:t>‹Nr.›</a:t>
             </a:fld>
@@ -1220,7 +1220,7 @@
     </p:spTree>
     <p:extLst>
       <p:ext uri="{BB962C8B-B14F-4D97-AF65-F5344CB8AC3E}">
-        <p14:creationId xmlns:p14="http://schemas.microsoft.com/office/powerpoint/2010/main" val="588955543"/>
+        <p14:creationId xmlns:p14="http://schemas.microsoft.com/office/powerpoint/2010/main" val="879357979"/>
       </p:ext>
     </p:extLst>
   </p:cSld>
@@ -1252,7 +1252,7 @@
           <p:cNvPr id="2" name="Titel 1">
             <a:extLst>
               <a:ext uri="{FF2B5EF4-FFF2-40B4-BE49-F238E27FC236}">
-                <a16:creationId xmlns:a16="http://schemas.microsoft.com/office/drawing/2014/main" id="{0189ABC3-CDB3-318C-BD76-E7936354B9CC}"/>
+                <a16:creationId xmlns:a16="http://schemas.microsoft.com/office/drawing/2014/main" id="{85303285-C796-ED77-7806-67B2D1C19CAB}"/>
               </a:ext>
             </a:extLst>
           </p:cNvPr>
@@ -1280,7 +1280,7 @@
           <p:cNvPr id="3" name="Inhaltsplatzhalter 2">
             <a:extLst>
               <a:ext uri="{FF2B5EF4-FFF2-40B4-BE49-F238E27FC236}">
-                <a16:creationId xmlns:a16="http://schemas.microsoft.com/office/drawing/2014/main" id="{16383155-9338-4E16-A99B-A3A33CEF8D23}"/>
+                <a16:creationId xmlns:a16="http://schemas.microsoft.com/office/drawing/2014/main" id="{99081015-A72E-F0FD-CBC7-E121316FE750}"/>
               </a:ext>
             </a:extLst>
           </p:cNvPr>
@@ -1342,7 +1342,7 @@
           <p:cNvPr id="4" name="Inhaltsplatzhalter 3">
             <a:extLst>
               <a:ext uri="{FF2B5EF4-FFF2-40B4-BE49-F238E27FC236}">
-                <a16:creationId xmlns:a16="http://schemas.microsoft.com/office/drawing/2014/main" id="{14CF9DC0-9C8B-2615-1079-93DBDB847A28}"/>
+                <a16:creationId xmlns:a16="http://schemas.microsoft.com/office/drawing/2014/main" id="{50323C8F-8EA7-E8A3-07F1-FB64C0DE9D0F}"/>
               </a:ext>
             </a:extLst>
           </p:cNvPr>
@@ -1404,7 +1404,7 @@
           <p:cNvPr id="5" name="Datumsplatzhalter 4">
             <a:extLst>
               <a:ext uri="{FF2B5EF4-FFF2-40B4-BE49-F238E27FC236}">
-                <a16:creationId xmlns:a16="http://schemas.microsoft.com/office/drawing/2014/main" id="{6377DD6A-4C1B-0A46-3571-BB4210EBDA6B}"/>
+                <a16:creationId xmlns:a16="http://schemas.microsoft.com/office/drawing/2014/main" id="{41FEF25C-7E0A-9C1B-491C-4DE8D04817B3}"/>
               </a:ext>
             </a:extLst>
           </p:cNvPr>
@@ -1420,7 +1420,7 @@
           <a:bodyPr/>
           <a:lstStyle/>
           <a:p>
-            <a:fld id="{D4E4E22E-3ABD-487B-A461-F35064D7E1CB}" type="datetimeFigureOut">
+            <a:fld id="{0982C7D4-AFF3-4799-A37B-64BC7CFCFD91}" type="datetimeFigureOut">
               <a:rPr lang="de-DE" smtClean="0"/>
               <a:t>08.10.2026</a:t>
             </a:fld>
@@ -1433,7 +1433,7 @@
           <p:cNvPr id="6" name="Fußzeilenplatzhalter 5">
             <a:extLst>
               <a:ext uri="{FF2B5EF4-FFF2-40B4-BE49-F238E27FC236}">
-                <a16:creationId xmlns:a16="http://schemas.microsoft.com/office/drawing/2014/main" id="{EDFBF85C-FC7F-4B92-7F05-F50E9F9A0F4E}"/>
+                <a16:creationId xmlns:a16="http://schemas.microsoft.com/office/drawing/2014/main" id="{E5BF6A86-B7B3-7A3A-235E-B1672B3084A4}"/>
               </a:ext>
             </a:extLst>
           </p:cNvPr>
@@ -1458,7 +1458,7 @@
           <p:cNvPr id="7" name="Foliennummernplatzhalter 6">
             <a:extLst>
               <a:ext uri="{FF2B5EF4-FFF2-40B4-BE49-F238E27FC236}">
-                <a16:creationId xmlns:a16="http://schemas.microsoft.com/office/drawing/2014/main" id="{A2187BEB-0ED1-F94E-1E27-DADCD094B6C2}"/>
+                <a16:creationId xmlns:a16="http://schemas.microsoft.com/office/drawing/2014/main" id="{C38C3078-3EA8-7957-FCDD-0CCF1EE0213C}"/>
               </a:ext>
             </a:extLst>
           </p:cNvPr>
@@ -1474,7 +1474,7 @@
           <a:bodyPr/>
           <a:lstStyle/>
           <a:p>
-            <a:fld id="{5D22E049-7081-4061-85D4-497D056D5297}" type="slidenum">
+            <a:fld id="{068D1EE3-12EE-475A-9834-64E2C8270542}" type="slidenum">
               <a:rPr lang="de-DE" smtClean="0"/>
               <a:t>‹Nr.›</a:t>
             </a:fld>
@@ -1485,7 +1485,7 @@
     </p:spTree>
     <p:extLst>
       <p:ext uri="{BB962C8B-B14F-4D97-AF65-F5344CB8AC3E}">
-        <p14:creationId xmlns:p14="http://schemas.microsoft.com/office/powerpoint/2010/main" val="440060950"/>
+        <p14:creationId xmlns:p14="http://schemas.microsoft.com/office/powerpoint/2010/main" val="3414437891"/>
       </p:ext>
     </p:extLst>
   </p:cSld>
@@ -1517,7 +1517,7 @@
           <p:cNvPr id="2" name="Titel 1">
             <a:extLst>
               <a:ext uri="{FF2B5EF4-FFF2-40B4-BE49-F238E27FC236}">
-                <a16:creationId xmlns:a16="http://schemas.microsoft.com/office/drawing/2014/main" id="{AB50B8F5-8BC9-5FC0-74B4-FBB75FAFDD94}"/>
+                <a16:creationId xmlns:a16="http://schemas.microsoft.com/office/drawing/2014/main" id="{C4C9E754-2BFF-4D36-65DB-14D2B422BEF0}"/>
               </a:ext>
             </a:extLst>
           </p:cNvPr>
@@ -1550,7 +1550,7 @@
           <p:cNvPr id="3" name="Textplatzhalter 2">
             <a:extLst>
               <a:ext uri="{FF2B5EF4-FFF2-40B4-BE49-F238E27FC236}">
-                <a16:creationId xmlns:a16="http://schemas.microsoft.com/office/drawing/2014/main" id="{FACDE2E7-B3E8-3638-BD64-4CB12C09A0FE}"/>
+                <a16:creationId xmlns:a16="http://schemas.microsoft.com/office/drawing/2014/main" id="{9A7DAF62-47BD-FFD5-2B96-61DA65F18640}"/>
               </a:ext>
             </a:extLst>
           </p:cNvPr>
@@ -1621,7 +1621,7 @@
           <p:cNvPr id="4" name="Inhaltsplatzhalter 3">
             <a:extLst>
               <a:ext uri="{FF2B5EF4-FFF2-40B4-BE49-F238E27FC236}">
-                <a16:creationId xmlns:a16="http://schemas.microsoft.com/office/drawing/2014/main" id="{24544D51-5EC5-D467-F932-884EF735540F}"/>
+                <a16:creationId xmlns:a16="http://schemas.microsoft.com/office/drawing/2014/main" id="{178651E6-661B-49E5-03A3-5A12F420C0DB}"/>
               </a:ext>
             </a:extLst>
           </p:cNvPr>
@@ -1683,7 +1683,7 @@
           <p:cNvPr id="5" name="Textplatzhalter 4">
             <a:extLst>
               <a:ext uri="{FF2B5EF4-FFF2-40B4-BE49-F238E27FC236}">
-                <a16:creationId xmlns:a16="http://schemas.microsoft.com/office/drawing/2014/main" id="{E3CA52E7-7274-E099-3949-4AA7ACC84CFB}"/>
+                <a16:creationId xmlns:a16="http://schemas.microsoft.com/office/drawing/2014/main" id="{2235F9C7-F21F-4D77-5084-90DAD31D5A23}"/>
               </a:ext>
             </a:extLst>
           </p:cNvPr>
@@ -1754,7 +1754,7 @@
           <p:cNvPr id="6" name="Inhaltsplatzhalter 5">
             <a:extLst>
               <a:ext uri="{FF2B5EF4-FFF2-40B4-BE49-F238E27FC236}">
-                <a16:creationId xmlns:a16="http://schemas.microsoft.com/office/drawing/2014/main" id="{A88F5EE6-17CB-4346-0C09-A0ECDBF36FB3}"/>
+                <a16:creationId xmlns:a16="http://schemas.microsoft.com/office/drawing/2014/main" id="{B126A39F-4DA4-28AE-B439-C6CFF93A54C2}"/>
               </a:ext>
             </a:extLst>
           </p:cNvPr>
@@ -1816,7 +1816,7 @@
           <p:cNvPr id="7" name="Datumsplatzhalter 6">
             <a:extLst>
               <a:ext uri="{FF2B5EF4-FFF2-40B4-BE49-F238E27FC236}">
-                <a16:creationId xmlns:a16="http://schemas.microsoft.com/office/drawing/2014/main" id="{2682588D-BAEB-4ABC-3393-7B45C00A99F0}"/>
+                <a16:creationId xmlns:a16="http://schemas.microsoft.com/office/drawing/2014/main" id="{C79AF2DA-11E3-69B3-9ACD-6F7C45A7AFD2}"/>
               </a:ext>
             </a:extLst>
           </p:cNvPr>
@@ -1832,7 +1832,7 @@
           <a:bodyPr/>
           <a:lstStyle/>
           <a:p>
-            <a:fld id="{D4E4E22E-3ABD-487B-A461-F35064D7E1CB}" type="datetimeFigureOut">
+            <a:fld id="{0982C7D4-AFF3-4799-A37B-64BC7CFCFD91}" type="datetimeFigureOut">
               <a:rPr lang="de-DE" smtClean="0"/>
               <a:t>08.10.2026</a:t>
             </a:fld>
@@ -1845,7 +1845,7 @@
           <p:cNvPr id="8" name="Fußzeilenplatzhalter 7">
             <a:extLst>
               <a:ext uri="{FF2B5EF4-FFF2-40B4-BE49-F238E27FC236}">
-                <a16:creationId xmlns:a16="http://schemas.microsoft.com/office/drawing/2014/main" id="{9A6F598A-1AFC-9509-82A0-A69B059D0A8C}"/>
+                <a16:creationId xmlns:a16="http://schemas.microsoft.com/office/drawing/2014/main" id="{4429F4B0-0BF4-C00A-8C53-F43B7652CE62}"/>
               </a:ext>
             </a:extLst>
           </p:cNvPr>
@@ -1870,7 +1870,7 @@
           <p:cNvPr id="9" name="Foliennummernplatzhalter 8">
             <a:extLst>
               <a:ext uri="{FF2B5EF4-FFF2-40B4-BE49-F238E27FC236}">
-                <a16:creationId xmlns:a16="http://schemas.microsoft.com/office/drawing/2014/main" id="{5FB40040-0D34-9EBE-18D7-F4DD463522EF}"/>
+                <a16:creationId xmlns:a16="http://schemas.microsoft.com/office/drawing/2014/main" id="{0ECBEB4C-E494-2CBF-CC94-A5617136EF95}"/>
               </a:ext>
             </a:extLst>
           </p:cNvPr>
@@ -1886,7 +1886,7 @@
           <a:bodyPr/>
           <a:lstStyle/>
           <a:p>
-            <a:fld id="{5D22E049-7081-4061-85D4-497D056D5297}" type="slidenum">
+            <a:fld id="{068D1EE3-12EE-475A-9834-64E2C8270542}" type="slidenum">
               <a:rPr lang="de-DE" smtClean="0"/>
               <a:t>‹Nr.›</a:t>
             </a:fld>
@@ -1897,7 +1897,7 @@
     </p:spTree>
     <p:extLst>
       <p:ext uri="{BB962C8B-B14F-4D97-AF65-F5344CB8AC3E}">
-        <p14:creationId xmlns:p14="http://schemas.microsoft.com/office/powerpoint/2010/main" val="1871541680"/>
+        <p14:creationId xmlns:p14="http://schemas.microsoft.com/office/powerpoint/2010/main" val="3460163575"/>
       </p:ext>
     </p:extLst>
   </p:cSld>
@@ -1929,7 +1929,7 @@
           <p:cNvPr id="2" name="Titel 1">
             <a:extLst>
               <a:ext uri="{FF2B5EF4-FFF2-40B4-BE49-F238E27FC236}">
-                <a16:creationId xmlns:a16="http://schemas.microsoft.com/office/drawing/2014/main" id="{2ED00AB8-6AE4-7AE4-7BBB-7AEA443C6830}"/>
+                <a16:creationId xmlns:a16="http://schemas.microsoft.com/office/drawing/2014/main" id="{C0D54707-83E7-9539-2FE1-5154903D016C}"/>
               </a:ext>
             </a:extLst>
           </p:cNvPr>
@@ -1957,7 +1957,7 @@
           <p:cNvPr id="3" name="Datumsplatzhalter 2">
             <a:extLst>
               <a:ext uri="{FF2B5EF4-FFF2-40B4-BE49-F238E27FC236}">
-                <a16:creationId xmlns:a16="http://schemas.microsoft.com/office/drawing/2014/main" id="{04160252-ECB7-5D36-BF88-0A87F5ED8ACC}"/>
+                <a16:creationId xmlns:a16="http://schemas.microsoft.com/office/drawing/2014/main" id="{6746784C-44E4-C874-66C3-FBC49F61C89D}"/>
               </a:ext>
             </a:extLst>
           </p:cNvPr>
@@ -1973,7 +1973,7 @@
           <a:bodyPr/>
           <a:lstStyle/>
           <a:p>
-            <a:fld id="{D4E4E22E-3ABD-487B-A461-F35064D7E1CB}" type="datetimeFigureOut">
+            <a:fld id="{0982C7D4-AFF3-4799-A37B-64BC7CFCFD91}" type="datetimeFigureOut">
               <a:rPr lang="de-DE" smtClean="0"/>
               <a:t>08.10.2026</a:t>
             </a:fld>
@@ -1986,7 +1986,7 @@
           <p:cNvPr id="4" name="Fußzeilenplatzhalter 3">
             <a:extLst>
               <a:ext uri="{FF2B5EF4-FFF2-40B4-BE49-F238E27FC236}">
-                <a16:creationId xmlns:a16="http://schemas.microsoft.com/office/drawing/2014/main" id="{DB1A3EA3-D6F5-2F90-B1B1-F6626D922B85}"/>
+                <a16:creationId xmlns:a16="http://schemas.microsoft.com/office/drawing/2014/main" id="{3072891E-9216-4BCC-0860-DE7D90B65280}"/>
               </a:ext>
             </a:extLst>
           </p:cNvPr>
@@ -2011,7 +2011,7 @@
           <p:cNvPr id="5" name="Foliennummernplatzhalter 4">
             <a:extLst>
               <a:ext uri="{FF2B5EF4-FFF2-40B4-BE49-F238E27FC236}">
-                <a16:creationId xmlns:a16="http://schemas.microsoft.com/office/drawing/2014/main" id="{A92518C7-A1CA-A851-C36A-3529003671F0}"/>
+                <a16:creationId xmlns:a16="http://schemas.microsoft.com/office/drawing/2014/main" id="{7401CCDC-FCFE-F3B6-D20D-88587FA2D2A4}"/>
               </a:ext>
             </a:extLst>
           </p:cNvPr>
@@ -2027,7 +2027,7 @@
           <a:bodyPr/>
           <a:lstStyle/>
           <a:p>
-            <a:fld id="{5D22E049-7081-4061-85D4-497D056D5297}" type="slidenum">
+            <a:fld id="{068D1EE3-12EE-475A-9834-64E2C8270542}" type="slidenum">
               <a:rPr lang="de-DE" smtClean="0"/>
               <a:t>‹Nr.›</a:t>
             </a:fld>
@@ -2038,7 +2038,7 @@
     </p:spTree>
     <p:extLst>
       <p:ext uri="{BB962C8B-B14F-4D97-AF65-F5344CB8AC3E}">
-        <p14:creationId xmlns:p14="http://schemas.microsoft.com/office/powerpoint/2010/main" val="482555732"/>
+        <p14:creationId xmlns:p14="http://schemas.microsoft.com/office/powerpoint/2010/main" val="1522836992"/>
       </p:ext>
     </p:extLst>
   </p:cSld>
@@ -2070,7 +2070,7 @@
           <p:cNvPr id="2" name="Datumsplatzhalter 1">
             <a:extLst>
               <a:ext uri="{FF2B5EF4-FFF2-40B4-BE49-F238E27FC236}">
-                <a16:creationId xmlns:a16="http://schemas.microsoft.com/office/drawing/2014/main" id="{6B2DFBC8-FE76-9F07-3F49-B3A3A33E1E9A}"/>
+                <a16:creationId xmlns:a16="http://schemas.microsoft.com/office/drawing/2014/main" id="{95AF4FA4-7F2F-59A4-9763-59B409E033E8}"/>
               </a:ext>
             </a:extLst>
           </p:cNvPr>
@@ -2086,7 +2086,7 @@
           <a:bodyPr/>
           <a:lstStyle/>
           <a:p>
-            <a:fld id="{D4E4E22E-3ABD-487B-A461-F35064D7E1CB}" type="datetimeFigureOut">
+            <a:fld id="{0982C7D4-AFF3-4799-A37B-64BC7CFCFD91}" type="datetimeFigureOut">
               <a:rPr lang="de-DE" smtClean="0"/>
               <a:t>08.10.2026</a:t>
             </a:fld>
@@ -2099,7 +2099,7 @@
           <p:cNvPr id="3" name="Fußzeilenplatzhalter 2">
             <a:extLst>
               <a:ext uri="{FF2B5EF4-FFF2-40B4-BE49-F238E27FC236}">
-                <a16:creationId xmlns:a16="http://schemas.microsoft.com/office/drawing/2014/main" id="{838FE773-F92F-0091-1526-539CD7701B1F}"/>
+                <a16:creationId xmlns:a16="http://schemas.microsoft.com/office/drawing/2014/main" id="{DF00EF30-9111-0C28-78A3-49F374EA537F}"/>
               </a:ext>
             </a:extLst>
           </p:cNvPr>
@@ -2124,7 +2124,7 @@
           <p:cNvPr id="4" name="Foliennummernplatzhalter 3">
             <a:extLst>
               <a:ext uri="{FF2B5EF4-FFF2-40B4-BE49-F238E27FC236}">
-                <a16:creationId xmlns:a16="http://schemas.microsoft.com/office/drawing/2014/main" id="{EBD1BEBC-D26D-26C2-D97F-A63C3E924E67}"/>
+                <a16:creationId xmlns:a16="http://schemas.microsoft.com/office/drawing/2014/main" id="{6FA5ACD1-0E21-4E6A-74D4-BD518085F805}"/>
               </a:ext>
             </a:extLst>
           </p:cNvPr>
@@ -2140,7 +2140,7 @@
           <a:bodyPr/>
           <a:lstStyle/>
           <a:p>
-            <a:fld id="{5D22E049-7081-4061-85D4-497D056D5297}" type="slidenum">
+            <a:fld id="{068D1EE3-12EE-475A-9834-64E2C8270542}" type="slidenum">
               <a:rPr lang="de-DE" smtClean="0"/>
               <a:t>‹Nr.›</a:t>
             </a:fld>
@@ -2151,7 +2151,7 @@
     </p:spTree>
     <p:extLst>
       <p:ext uri="{BB962C8B-B14F-4D97-AF65-F5344CB8AC3E}">
-        <p14:creationId xmlns:p14="http://schemas.microsoft.com/office/powerpoint/2010/main" val="1992211749"/>
+        <p14:creationId xmlns:p14="http://schemas.microsoft.com/office/powerpoint/2010/main" val="1100515952"/>
       </p:ext>
     </p:extLst>
   </p:cSld>
@@ -2183,7 +2183,7 @@
           <p:cNvPr id="2" name="Titel 1">
             <a:extLst>
               <a:ext uri="{FF2B5EF4-FFF2-40B4-BE49-F238E27FC236}">
-                <a16:creationId xmlns:a16="http://schemas.microsoft.com/office/drawing/2014/main" id="{E82FD68A-617F-3AF5-A13E-1EDD6D767E84}"/>
+                <a16:creationId xmlns:a16="http://schemas.microsoft.com/office/drawing/2014/main" id="{A17E1750-89C5-5490-B291-0F5C8F0A9DE8}"/>
               </a:ext>
             </a:extLst>
           </p:cNvPr>
@@ -2220,7 +2220,7 @@
           <p:cNvPr id="3" name="Inhaltsplatzhalter 2">
             <a:extLst>
               <a:ext uri="{FF2B5EF4-FFF2-40B4-BE49-F238E27FC236}">
-                <a16:creationId xmlns:a16="http://schemas.microsoft.com/office/drawing/2014/main" id="{648816C8-A137-09B3-AC2D-23A2CA9BD9CE}"/>
+                <a16:creationId xmlns:a16="http://schemas.microsoft.com/office/drawing/2014/main" id="{58250AFC-643A-C23A-1945-07CC39347D3F}"/>
               </a:ext>
             </a:extLst>
           </p:cNvPr>
@@ -2310,7 +2310,7 @@
           <p:cNvPr id="4" name="Textplatzhalter 3">
             <a:extLst>
               <a:ext uri="{FF2B5EF4-FFF2-40B4-BE49-F238E27FC236}">
-                <a16:creationId xmlns:a16="http://schemas.microsoft.com/office/drawing/2014/main" id="{45DAD893-6D4B-721A-5879-220C771E312B}"/>
+                <a16:creationId xmlns:a16="http://schemas.microsoft.com/office/drawing/2014/main" id="{994A241D-7D12-C552-7DD8-FEE4DDB3B3E5}"/>
               </a:ext>
             </a:extLst>
           </p:cNvPr>
@@ -2381,7 +2381,7 @@
           <p:cNvPr id="5" name="Datumsplatzhalter 4">
             <a:extLst>
               <a:ext uri="{FF2B5EF4-FFF2-40B4-BE49-F238E27FC236}">
-                <a16:creationId xmlns:a16="http://schemas.microsoft.com/office/drawing/2014/main" id="{3A8B6AB2-168A-B9E9-2898-CF30E9D93CB6}"/>
+                <a16:creationId xmlns:a16="http://schemas.microsoft.com/office/drawing/2014/main" id="{B7E34883-FEAA-2A5B-B2AC-E4625DD1458E}"/>
               </a:ext>
             </a:extLst>
           </p:cNvPr>
@@ -2397,7 +2397,7 @@
           <a:bodyPr/>
           <a:lstStyle/>
           <a:p>
-            <a:fld id="{D4E4E22E-3ABD-487B-A461-F35064D7E1CB}" type="datetimeFigureOut">
+            <a:fld id="{0982C7D4-AFF3-4799-A37B-64BC7CFCFD91}" type="datetimeFigureOut">
               <a:rPr lang="de-DE" smtClean="0"/>
               <a:t>08.10.2026</a:t>
             </a:fld>
@@ -2410,7 +2410,7 @@
           <p:cNvPr id="6" name="Fußzeilenplatzhalter 5">
             <a:extLst>
               <a:ext uri="{FF2B5EF4-FFF2-40B4-BE49-F238E27FC236}">
-                <a16:creationId xmlns:a16="http://schemas.microsoft.com/office/drawing/2014/main" id="{ABB63B66-B184-4ECA-BD1D-EAA25C3CDA6C}"/>
+                <a16:creationId xmlns:a16="http://schemas.microsoft.com/office/drawing/2014/main" id="{E779BE90-4CC3-6759-5ED8-1DC4807B9C27}"/>
               </a:ext>
             </a:extLst>
           </p:cNvPr>
@@ -2435,7 +2435,7 @@
           <p:cNvPr id="7" name="Foliennummernplatzhalter 6">
             <a:extLst>
               <a:ext uri="{FF2B5EF4-FFF2-40B4-BE49-F238E27FC236}">
-                <a16:creationId xmlns:a16="http://schemas.microsoft.com/office/drawing/2014/main" id="{E0C3AFDB-334A-9141-564D-836CC0326EA8}"/>
+                <a16:creationId xmlns:a16="http://schemas.microsoft.com/office/drawing/2014/main" id="{F8046D22-10FA-83EA-4E91-48F18C68B490}"/>
               </a:ext>
             </a:extLst>
           </p:cNvPr>
@@ -2451,7 +2451,7 @@
           <a:bodyPr/>
           <a:lstStyle/>
           <a:p>
-            <a:fld id="{5D22E049-7081-4061-85D4-497D056D5297}" type="slidenum">
+            <a:fld id="{068D1EE3-12EE-475A-9834-64E2C8270542}" type="slidenum">
               <a:rPr lang="de-DE" smtClean="0"/>
               <a:t>‹Nr.›</a:t>
             </a:fld>
@@ -2462,7 +2462,7 @@
     </p:spTree>
     <p:extLst>
       <p:ext uri="{BB962C8B-B14F-4D97-AF65-F5344CB8AC3E}">
-        <p14:creationId xmlns:p14="http://schemas.microsoft.com/office/powerpoint/2010/main" val="2199381159"/>
+        <p14:creationId xmlns:p14="http://schemas.microsoft.com/office/powerpoint/2010/main" val="2835718526"/>
       </p:ext>
     </p:extLst>
   </p:cSld>
@@ -2494,7 +2494,7 @@
           <p:cNvPr id="2" name="Titel 1">
             <a:extLst>
               <a:ext uri="{FF2B5EF4-FFF2-40B4-BE49-F238E27FC236}">
-                <a16:creationId xmlns:a16="http://schemas.microsoft.com/office/drawing/2014/main" id="{F83D0EDE-6647-DE2A-D9F5-7BF6B16FF929}"/>
+                <a16:creationId xmlns:a16="http://schemas.microsoft.com/office/drawing/2014/main" id="{7DBD0662-D277-8816-5E07-4BCB901F3B32}"/>
               </a:ext>
             </a:extLst>
           </p:cNvPr>
@@ -2531,7 +2531,7 @@
           <p:cNvPr id="3" name="Bildplatzhalter 2">
             <a:extLst>
               <a:ext uri="{FF2B5EF4-FFF2-40B4-BE49-F238E27FC236}">
-                <a16:creationId xmlns:a16="http://schemas.microsoft.com/office/drawing/2014/main" id="{7B20AD4D-5E1D-0C16-B3BA-D139D3EEE64B}"/>
+                <a16:creationId xmlns:a16="http://schemas.microsoft.com/office/drawing/2014/main" id="{A5A89C1D-06BB-571A-2741-30507EE0544A}"/>
               </a:ext>
             </a:extLst>
           </p:cNvPr>
@@ -2598,7 +2598,7 @@
           <p:cNvPr id="4" name="Textplatzhalter 3">
             <a:extLst>
               <a:ext uri="{FF2B5EF4-FFF2-40B4-BE49-F238E27FC236}">
-                <a16:creationId xmlns:a16="http://schemas.microsoft.com/office/drawing/2014/main" id="{B13A27BB-0E08-0413-AD54-0E19F2F78AAC}"/>
+                <a16:creationId xmlns:a16="http://schemas.microsoft.com/office/drawing/2014/main" id="{BF519ABC-6ECB-1A00-02AF-7254F285CC1A}"/>
               </a:ext>
             </a:extLst>
           </p:cNvPr>
@@ -2669,7 +2669,7 @@
           <p:cNvPr id="5" name="Datumsplatzhalter 4">
             <a:extLst>
               <a:ext uri="{FF2B5EF4-FFF2-40B4-BE49-F238E27FC236}">
-                <a16:creationId xmlns:a16="http://schemas.microsoft.com/office/drawing/2014/main" id="{D9CED36F-3B20-5332-B9C2-3CD192C51917}"/>
+                <a16:creationId xmlns:a16="http://schemas.microsoft.com/office/drawing/2014/main" id="{CBE909FC-9045-10A4-3F50-8E7D71B22DA7}"/>
               </a:ext>
             </a:extLst>
           </p:cNvPr>
@@ -2685,7 +2685,7 @@
           <a:bodyPr/>
           <a:lstStyle/>
           <a:p>
-            <a:fld id="{D4E4E22E-3ABD-487B-A461-F35064D7E1CB}" type="datetimeFigureOut">
+            <a:fld id="{0982C7D4-AFF3-4799-A37B-64BC7CFCFD91}" type="datetimeFigureOut">
               <a:rPr lang="de-DE" smtClean="0"/>
               <a:t>08.10.2026</a:t>
             </a:fld>
@@ -2698,7 +2698,7 @@
           <p:cNvPr id="6" name="Fußzeilenplatzhalter 5">
             <a:extLst>
               <a:ext uri="{FF2B5EF4-FFF2-40B4-BE49-F238E27FC236}">
-                <a16:creationId xmlns:a16="http://schemas.microsoft.com/office/drawing/2014/main" id="{744F75EF-6EC5-579C-CC82-0879868401ED}"/>
+                <a16:creationId xmlns:a16="http://schemas.microsoft.com/office/drawing/2014/main" id="{D2CCCB48-E4E0-7B50-1C48-A19F1374C214}"/>
               </a:ext>
             </a:extLst>
           </p:cNvPr>
@@ -2723,7 +2723,7 @@
           <p:cNvPr id="7" name="Foliennummernplatzhalter 6">
             <a:extLst>
               <a:ext uri="{FF2B5EF4-FFF2-40B4-BE49-F238E27FC236}">
-                <a16:creationId xmlns:a16="http://schemas.microsoft.com/office/drawing/2014/main" id="{27423568-FB20-C682-A8D5-9F62E6EDD5B9}"/>
+                <a16:creationId xmlns:a16="http://schemas.microsoft.com/office/drawing/2014/main" id="{D9B1CFC4-3C30-6F48-F4BD-90BC8E6D8E12}"/>
               </a:ext>
             </a:extLst>
           </p:cNvPr>
@@ -2739,7 +2739,7 @@
           <a:bodyPr/>
           <a:lstStyle/>
           <a:p>
-            <a:fld id="{5D22E049-7081-4061-85D4-497D056D5297}" type="slidenum">
+            <a:fld id="{068D1EE3-12EE-475A-9834-64E2C8270542}" type="slidenum">
               <a:rPr lang="de-DE" smtClean="0"/>
               <a:t>‹Nr.›</a:t>
             </a:fld>
@@ -2750,7 +2750,7 @@
     </p:spTree>
     <p:extLst>
       <p:ext uri="{BB962C8B-B14F-4D97-AF65-F5344CB8AC3E}">
-        <p14:creationId xmlns:p14="http://schemas.microsoft.com/office/powerpoint/2010/main" val="3521078006"/>
+        <p14:creationId xmlns:p14="http://schemas.microsoft.com/office/powerpoint/2010/main" val="4215786749"/>
       </p:ext>
     </p:extLst>
   </p:cSld>
@@ -2787,7 +2787,7 @@
           <p:cNvPr id="2" name="Titelplatzhalter 1">
             <a:extLst>
               <a:ext uri="{FF2B5EF4-FFF2-40B4-BE49-F238E27FC236}">
-                <a16:creationId xmlns:a16="http://schemas.microsoft.com/office/drawing/2014/main" id="{A0943286-451E-576D-CD0F-00BD38C48576}"/>
+                <a16:creationId xmlns:a16="http://schemas.microsoft.com/office/drawing/2014/main" id="{F307C39C-D918-A1E1-C478-A325B77B9823}"/>
               </a:ext>
             </a:extLst>
           </p:cNvPr>
@@ -2825,7 +2825,7 @@
           <p:cNvPr id="3" name="Textplatzhalter 2">
             <a:extLst>
               <a:ext uri="{FF2B5EF4-FFF2-40B4-BE49-F238E27FC236}">
-                <a16:creationId xmlns:a16="http://schemas.microsoft.com/office/drawing/2014/main" id="{F3A2D561-3C23-2E69-1811-D9A3EF2B22AF}"/>
+                <a16:creationId xmlns:a16="http://schemas.microsoft.com/office/drawing/2014/main" id="{D6DA4B70-01D0-4ED9-9836-763DDE967CA4}"/>
               </a:ext>
             </a:extLst>
           </p:cNvPr>
@@ -2892,7 +2892,7 @@
           <p:cNvPr id="4" name="Datumsplatzhalter 3">
             <a:extLst>
               <a:ext uri="{FF2B5EF4-FFF2-40B4-BE49-F238E27FC236}">
-                <a16:creationId xmlns:a16="http://schemas.microsoft.com/office/drawing/2014/main" id="{5353DA6C-18BE-B037-F7C3-2A6AA4F741DE}"/>
+                <a16:creationId xmlns:a16="http://schemas.microsoft.com/office/drawing/2014/main" id="{A3D75AE0-016E-6285-CE59-D8D763216719}"/>
               </a:ext>
             </a:extLst>
           </p:cNvPr>
@@ -2926,7 +2926,7 @@
             </a:lvl1pPr>
           </a:lstStyle>
           <a:p>
-            <a:fld id="{D4E4E22E-3ABD-487B-A461-F35064D7E1CB}" type="datetimeFigureOut">
+            <a:fld id="{0982C7D4-AFF3-4799-A37B-64BC7CFCFD91}" type="datetimeFigureOut">
               <a:rPr lang="de-DE" smtClean="0"/>
               <a:t>08.10.2026</a:t>
             </a:fld>
@@ -2939,7 +2939,7 @@
           <p:cNvPr id="5" name="Fußzeilenplatzhalter 4">
             <a:extLst>
               <a:ext uri="{FF2B5EF4-FFF2-40B4-BE49-F238E27FC236}">
-                <a16:creationId xmlns:a16="http://schemas.microsoft.com/office/drawing/2014/main" id="{6E0216EA-4125-7CE0-AD9A-CA1FD12BFB28}"/>
+                <a16:creationId xmlns:a16="http://schemas.microsoft.com/office/drawing/2014/main" id="{9514744B-CB75-D1A3-5681-844F2E9E51A9}"/>
               </a:ext>
             </a:extLst>
           </p:cNvPr>
@@ -2982,7 +2982,7 @@
           <p:cNvPr id="6" name="Foliennummernplatzhalter 5">
             <a:extLst>
               <a:ext uri="{FF2B5EF4-FFF2-40B4-BE49-F238E27FC236}">
-                <a16:creationId xmlns:a16="http://schemas.microsoft.com/office/drawing/2014/main" id="{7092EF72-389F-EA0E-DB41-7CAE9CE8EEC8}"/>
+                <a16:creationId xmlns:a16="http://schemas.microsoft.com/office/drawing/2014/main" id="{F23D80E5-B766-5745-BAAC-8CD06B103CBB}"/>
               </a:ext>
             </a:extLst>
           </p:cNvPr>
@@ -3016,7 +3016,7 @@
             </a:lvl1pPr>
           </a:lstStyle>
           <a:p>
-            <a:fld id="{5D22E049-7081-4061-85D4-497D056D5297}" type="slidenum">
+            <a:fld id="{068D1EE3-12EE-475A-9834-64E2C8270542}" type="slidenum">
               <a:rPr lang="de-DE" smtClean="0"/>
               <a:t>‹Nr.›</a:t>
             </a:fld>
@@ -3027,7 +3027,7 @@
     </p:spTree>
     <p:extLst>
       <p:ext uri="{BB962C8B-B14F-4D97-AF65-F5344CB8AC3E}">
-        <p14:creationId xmlns:p14="http://schemas.microsoft.com/office/powerpoint/2010/main" val="772228875"/>
+        <p14:creationId xmlns:p14="http://schemas.microsoft.com/office/powerpoint/2010/main" val="4227663255"/>
       </p:ext>
     </p:extLst>
   </p:cSld>
@@ -3350,7 +3350,7 @@
           <p:cNvPr id="2" name="Textfeld 1">
             <a:extLst>
               <a:ext uri="{FF2B5EF4-FFF2-40B4-BE49-F238E27FC236}">
-                <a16:creationId xmlns:a16="http://schemas.microsoft.com/office/drawing/2014/main" id="{46E60F3F-591A-F9A5-2FA2-59866D2FC9F4}"/>
+                <a16:creationId xmlns:a16="http://schemas.microsoft.com/office/drawing/2014/main" id="{B6DA9413-E3D7-8DDC-303D-3CFB6A7070B6}"/>
               </a:ext>
             </a:extLst>
           </p:cNvPr>
@@ -3445,7 +3445,7 @@
           <p:cNvPr id="3" name="Textfeld 2">
             <a:extLst>
               <a:ext uri="{FF2B5EF4-FFF2-40B4-BE49-F238E27FC236}">
-                <a16:creationId xmlns:a16="http://schemas.microsoft.com/office/drawing/2014/main" id="{57B7EDEB-6FF1-803C-06BC-3788F1D832C9}"/>
+                <a16:creationId xmlns:a16="http://schemas.microsoft.com/office/drawing/2014/main" id="{043A1202-A482-214A-5F6D-027D88606602}"/>
               </a:ext>
             </a:extLst>
           </p:cNvPr>
@@ -3570,7 +3570,7 @@
           <p:cNvPr id="4" name="Textfeld 3">
             <a:extLst>
               <a:ext uri="{FF2B5EF4-FFF2-40B4-BE49-F238E27FC236}">
-                <a16:creationId xmlns:a16="http://schemas.microsoft.com/office/drawing/2014/main" id="{5C893C3D-9DB3-8B8E-3024-6161A5492A4E}"/>
+                <a16:creationId xmlns:a16="http://schemas.microsoft.com/office/drawing/2014/main" id="{E87C9A5B-8100-65EB-205B-45F00E3E1941}"/>
               </a:ext>
             </a:extLst>
           </p:cNvPr>
@@ -3695,7 +3695,7 @@
           <p:cNvPr id="5" name="Textfeld 4">
             <a:extLst>
               <a:ext uri="{FF2B5EF4-FFF2-40B4-BE49-F238E27FC236}">
-                <a16:creationId xmlns:a16="http://schemas.microsoft.com/office/drawing/2014/main" id="{ECA8CCB2-F84B-4766-55EA-7734986707BF}"/>
+                <a16:creationId xmlns:a16="http://schemas.microsoft.com/office/drawing/2014/main" id="{0D9E66E8-8ABC-2CF8-4EAC-2916AC36D98B}"/>
               </a:ext>
             </a:extLst>
           </p:cNvPr>
@@ -3818,7 +3818,7 @@
     </p:spTree>
     <p:extLst>
       <p:ext uri="{BB962C8B-B14F-4D97-AF65-F5344CB8AC3E}">
-        <p14:creationId xmlns:p14="http://schemas.microsoft.com/office/powerpoint/2010/main" val="1133529096"/>
+        <p14:creationId xmlns:p14="http://schemas.microsoft.com/office/powerpoint/2010/main" val="3018144050"/>
       </p:ext>
     </p:extLst>
   </p:cSld>
@@ -3850,7 +3850,7 @@
           <p:cNvPr id="2" name="Textfeld 1">
             <a:extLst>
               <a:ext uri="{FF2B5EF4-FFF2-40B4-BE49-F238E27FC236}">
-                <a16:creationId xmlns:a16="http://schemas.microsoft.com/office/drawing/2014/main" id="{D21566AA-FA79-BC95-B290-0EC7C68394E7}"/>
+                <a16:creationId xmlns:a16="http://schemas.microsoft.com/office/drawing/2014/main" id="{17FFAD51-D733-0E22-6334-6B8DFA5AEC61}"/>
               </a:ext>
             </a:extLst>
           </p:cNvPr>
@@ -3945,7 +3945,7 @@
           <p:cNvPr id="3" name="Textfeld 2">
             <a:extLst>
               <a:ext uri="{FF2B5EF4-FFF2-40B4-BE49-F238E27FC236}">
-                <a16:creationId xmlns:a16="http://schemas.microsoft.com/office/drawing/2014/main" id="{78F6D312-4BE7-A4DB-B101-693C526EDA89}"/>
+                <a16:creationId xmlns:a16="http://schemas.microsoft.com/office/drawing/2014/main" id="{E57F97DA-18ED-EC9E-848D-04C606963C87}"/>
               </a:ext>
             </a:extLst>
           </p:cNvPr>
@@ -4040,7 +4040,7 @@
           <p:cNvPr id="4" name="Textfeld 3">
             <a:extLst>
               <a:ext uri="{FF2B5EF4-FFF2-40B4-BE49-F238E27FC236}">
-                <a16:creationId xmlns:a16="http://schemas.microsoft.com/office/drawing/2014/main" id="{B36AEE38-615F-D5D9-377A-D5F95459EE19}"/>
+                <a16:creationId xmlns:a16="http://schemas.microsoft.com/office/drawing/2014/main" id="{3CB003CE-38A0-1293-AB2F-B78562F3A3AE}"/>
               </a:ext>
             </a:extLst>
           </p:cNvPr>
@@ -4113,7 +4113,7 @@
           <p:cNvPr id="5" name="Textfeld 4">
             <a:extLst>
               <a:ext uri="{FF2B5EF4-FFF2-40B4-BE49-F238E27FC236}">
-                <a16:creationId xmlns:a16="http://schemas.microsoft.com/office/drawing/2014/main" id="{2420963D-D81F-5ED8-FD75-A70CC45B5B90}"/>
+                <a16:creationId xmlns:a16="http://schemas.microsoft.com/office/drawing/2014/main" id="{6A729F3A-DFE8-4CE0-6161-0F0CDF187C7F}"/>
               </a:ext>
             </a:extLst>
           </p:cNvPr>
@@ -4254,7 +4254,7 @@
     </p:spTree>
     <p:extLst>
       <p:ext uri="{BB962C8B-B14F-4D97-AF65-F5344CB8AC3E}">
-        <p14:creationId xmlns:p14="http://schemas.microsoft.com/office/powerpoint/2010/main" val="3483859429"/>
+        <p14:creationId xmlns:p14="http://schemas.microsoft.com/office/powerpoint/2010/main" val="182335915"/>
       </p:ext>
     </p:extLst>
   </p:cSld>
@@ -4286,7 +4286,7 @@
           <p:cNvPr id="2" name="Textfeld 1">
             <a:extLst>
               <a:ext uri="{FF2B5EF4-FFF2-40B4-BE49-F238E27FC236}">
-                <a16:creationId xmlns:a16="http://schemas.microsoft.com/office/drawing/2014/main" id="{D32FC381-274B-FE1B-A97D-298E6E56E649}"/>
+                <a16:creationId xmlns:a16="http://schemas.microsoft.com/office/drawing/2014/main" id="{C52CCDEE-5BD8-A9D6-E31F-827BDA5B838B}"/>
               </a:ext>
             </a:extLst>
           </p:cNvPr>
@@ -4381,7 +4381,7 @@
           <p:cNvPr id="3" name="Textfeld 2">
             <a:extLst>
               <a:ext uri="{FF2B5EF4-FFF2-40B4-BE49-F238E27FC236}">
-                <a16:creationId xmlns:a16="http://schemas.microsoft.com/office/drawing/2014/main" id="{AF7D474B-A488-F34C-F1EC-FE10F138D69C}"/>
+                <a16:creationId xmlns:a16="http://schemas.microsoft.com/office/drawing/2014/main" id="{092634EF-2C6B-9B5B-89F7-F3B38972C490}"/>
               </a:ext>
             </a:extLst>
           </p:cNvPr>
@@ -4506,7 +4506,7 @@
           <p:cNvPr id="4" name="Textfeld 3">
             <a:extLst>
               <a:ext uri="{FF2B5EF4-FFF2-40B4-BE49-F238E27FC236}">
-                <a16:creationId xmlns:a16="http://schemas.microsoft.com/office/drawing/2014/main" id="{76FCACB2-3BA3-EDFB-5318-85BDFC845399}"/>
+                <a16:creationId xmlns:a16="http://schemas.microsoft.com/office/drawing/2014/main" id="{6C6E5CE3-87A6-6427-1672-778EA6DDD02C}"/>
               </a:ext>
             </a:extLst>
           </p:cNvPr>
@@ -4631,7 +4631,7 @@
           <p:cNvPr id="5" name="Textfeld 4">
             <a:extLst>
               <a:ext uri="{FF2B5EF4-FFF2-40B4-BE49-F238E27FC236}">
-                <a16:creationId xmlns:a16="http://schemas.microsoft.com/office/drawing/2014/main" id="{7C213876-13B5-1847-1383-AE34B7A4770B}"/>
+                <a16:creationId xmlns:a16="http://schemas.microsoft.com/office/drawing/2014/main" id="{2B972544-1EB5-7A85-6034-1EEA5933D553}"/>
               </a:ext>
             </a:extLst>
           </p:cNvPr>
@@ -4754,7 +4754,7 @@
     </p:spTree>
     <p:extLst>
       <p:ext uri="{BB962C8B-B14F-4D97-AF65-F5344CB8AC3E}">
-        <p14:creationId xmlns:p14="http://schemas.microsoft.com/office/powerpoint/2010/main" val="1811999085"/>
+        <p14:creationId xmlns:p14="http://schemas.microsoft.com/office/powerpoint/2010/main" val="1060256991"/>
       </p:ext>
     </p:extLst>
   </p:cSld>
@@ -4786,7 +4786,7 @@
           <p:cNvPr id="2" name="Textfeld 1">
             <a:extLst>
               <a:ext uri="{FF2B5EF4-FFF2-40B4-BE49-F238E27FC236}">
-                <a16:creationId xmlns:a16="http://schemas.microsoft.com/office/drawing/2014/main" id="{E441BC0D-665F-D2F1-14F8-BD17419DBAD4}"/>
+                <a16:creationId xmlns:a16="http://schemas.microsoft.com/office/drawing/2014/main" id="{52E87ACA-063A-B5A3-4A16-48BAF333EF3A}"/>
               </a:ext>
             </a:extLst>
           </p:cNvPr>
@@ -4881,7 +4881,7 @@
           <p:cNvPr id="3" name="Textfeld 2">
             <a:extLst>
               <a:ext uri="{FF2B5EF4-FFF2-40B4-BE49-F238E27FC236}">
-                <a16:creationId xmlns:a16="http://schemas.microsoft.com/office/drawing/2014/main" id="{19C3B6EF-309A-1EE8-17A8-841BF96B6757}"/>
+                <a16:creationId xmlns:a16="http://schemas.microsoft.com/office/drawing/2014/main" id="{2BCED9C1-1FB1-BCCE-04D1-441086D477F5}"/>
               </a:ext>
             </a:extLst>
           </p:cNvPr>
@@ -4976,7 +4976,7 @@
           <p:cNvPr id="4" name="Textfeld 3">
             <a:extLst>
               <a:ext uri="{FF2B5EF4-FFF2-40B4-BE49-F238E27FC236}">
-                <a16:creationId xmlns:a16="http://schemas.microsoft.com/office/drawing/2014/main" id="{1FABB29E-CC2D-9337-A698-AA47A750A444}"/>
+                <a16:creationId xmlns:a16="http://schemas.microsoft.com/office/drawing/2014/main" id="{D7636EE7-3FC3-CE86-41AB-7F60489C11C5}"/>
               </a:ext>
             </a:extLst>
           </p:cNvPr>
@@ -5049,7 +5049,7 @@
           <p:cNvPr id="5" name="Textfeld 4">
             <a:extLst>
               <a:ext uri="{FF2B5EF4-FFF2-40B4-BE49-F238E27FC236}">
-                <a16:creationId xmlns:a16="http://schemas.microsoft.com/office/drawing/2014/main" id="{255290E2-03BE-762A-36FC-4C38D299DA7A}"/>
+                <a16:creationId xmlns:a16="http://schemas.microsoft.com/office/drawing/2014/main" id="{6A110E24-624A-EEED-A69D-165EC24236F8}"/>
               </a:ext>
             </a:extLst>
           </p:cNvPr>
@@ -5190,7 +5190,7 @@
     </p:spTree>
     <p:extLst>
       <p:ext uri="{BB962C8B-B14F-4D97-AF65-F5344CB8AC3E}">
-        <p14:creationId xmlns:p14="http://schemas.microsoft.com/office/powerpoint/2010/main" val="1791334961"/>
+        <p14:creationId xmlns:p14="http://schemas.microsoft.com/office/powerpoint/2010/main" val="3255333268"/>
       </p:ext>
     </p:extLst>
   </p:cSld>
@@ -5222,7 +5222,7 @@
           <p:cNvPr id="2" name="Textfeld 1">
             <a:extLst>
               <a:ext uri="{FF2B5EF4-FFF2-40B4-BE49-F238E27FC236}">
-                <a16:creationId xmlns:a16="http://schemas.microsoft.com/office/drawing/2014/main" id="{3DC57872-54AB-D7BC-4BA8-4B98849F09EF}"/>
+                <a16:creationId xmlns:a16="http://schemas.microsoft.com/office/drawing/2014/main" id="{376C940D-6321-ABE5-FF2D-C1F17D0454CE}"/>
               </a:ext>
             </a:extLst>
           </p:cNvPr>
@@ -5317,7 +5317,7 @@
           <p:cNvPr id="3" name="Textfeld 2">
             <a:extLst>
               <a:ext uri="{FF2B5EF4-FFF2-40B4-BE49-F238E27FC236}">
-                <a16:creationId xmlns:a16="http://schemas.microsoft.com/office/drawing/2014/main" id="{2A7B803D-01FD-C743-B991-EEFC5DA8D061}"/>
+                <a16:creationId xmlns:a16="http://schemas.microsoft.com/office/drawing/2014/main" id="{275C8A4A-235B-A9DD-1179-3812F867CDE0}"/>
               </a:ext>
             </a:extLst>
           </p:cNvPr>
@@ -5442,7 +5442,7 @@
           <p:cNvPr id="4" name="Textfeld 3">
             <a:extLst>
               <a:ext uri="{FF2B5EF4-FFF2-40B4-BE49-F238E27FC236}">
-                <a16:creationId xmlns:a16="http://schemas.microsoft.com/office/drawing/2014/main" id="{3E0D1A9A-A79F-B2D9-8ECC-CD21209B9F51}"/>
+                <a16:creationId xmlns:a16="http://schemas.microsoft.com/office/drawing/2014/main" id="{399D0C2B-E58B-7FB3-7724-3A586BF8448B}"/>
               </a:ext>
             </a:extLst>
           </p:cNvPr>
@@ -5567,7 +5567,7 @@
           <p:cNvPr id="5" name="Textfeld 4">
             <a:extLst>
               <a:ext uri="{FF2B5EF4-FFF2-40B4-BE49-F238E27FC236}">
-                <a16:creationId xmlns:a16="http://schemas.microsoft.com/office/drawing/2014/main" id="{9E1AE3BA-9D20-5B34-6E15-B3FD5186E6E6}"/>
+                <a16:creationId xmlns:a16="http://schemas.microsoft.com/office/drawing/2014/main" id="{6D8BAEA4-C32F-EC25-131D-8C30D7FD84CF}"/>
               </a:ext>
             </a:extLst>
           </p:cNvPr>
@@ -5690,7 +5690,7 @@
     </p:spTree>
     <p:extLst>
       <p:ext uri="{BB962C8B-B14F-4D97-AF65-F5344CB8AC3E}">
-        <p14:creationId xmlns:p14="http://schemas.microsoft.com/office/powerpoint/2010/main" val="1826823448"/>
+        <p14:creationId xmlns:p14="http://schemas.microsoft.com/office/powerpoint/2010/main" val="1481376275"/>
       </p:ext>
     </p:extLst>
   </p:cSld>
@@ -5722,7 +5722,7 @@
           <p:cNvPr id="2" name="Textfeld 1">
             <a:extLst>
               <a:ext uri="{FF2B5EF4-FFF2-40B4-BE49-F238E27FC236}">
-                <a16:creationId xmlns:a16="http://schemas.microsoft.com/office/drawing/2014/main" id="{D407D251-3FD1-581A-AE75-12E9828BDFF5}"/>
+                <a16:creationId xmlns:a16="http://schemas.microsoft.com/office/drawing/2014/main" id="{021001C6-0DAE-4744-CAD1-DD7ADCF27CAD}"/>
               </a:ext>
             </a:extLst>
           </p:cNvPr>
@@ -5817,7 +5817,7 @@
           <p:cNvPr id="3" name="Textfeld 2">
             <a:extLst>
               <a:ext uri="{FF2B5EF4-FFF2-40B4-BE49-F238E27FC236}">
-                <a16:creationId xmlns:a16="http://schemas.microsoft.com/office/drawing/2014/main" id="{A015BBFE-CC96-6E88-A134-25085D08F991}"/>
+                <a16:creationId xmlns:a16="http://schemas.microsoft.com/office/drawing/2014/main" id="{B017765F-BA9B-6DD4-0376-662DD3CECDCA}"/>
               </a:ext>
             </a:extLst>
           </p:cNvPr>
@@ -5912,7 +5912,7 @@
           <p:cNvPr id="4" name="Textfeld 3">
             <a:extLst>
               <a:ext uri="{FF2B5EF4-FFF2-40B4-BE49-F238E27FC236}">
-                <a16:creationId xmlns:a16="http://schemas.microsoft.com/office/drawing/2014/main" id="{0C9968E2-DF59-9DF2-DCA8-0D11ED31529C}"/>
+                <a16:creationId xmlns:a16="http://schemas.microsoft.com/office/drawing/2014/main" id="{397426D6-3207-2C13-3A60-119AA5B8DC47}"/>
               </a:ext>
             </a:extLst>
           </p:cNvPr>
@@ -5985,7 +5985,7 @@
           <p:cNvPr id="5" name="Textfeld 4">
             <a:extLst>
               <a:ext uri="{FF2B5EF4-FFF2-40B4-BE49-F238E27FC236}">
-                <a16:creationId xmlns:a16="http://schemas.microsoft.com/office/drawing/2014/main" id="{99BDA47E-D619-DDBB-F34B-9B72DD64C1A3}"/>
+                <a16:creationId xmlns:a16="http://schemas.microsoft.com/office/drawing/2014/main" id="{4C35300D-B35D-F46C-9834-934E9ED58D2D}"/>
               </a:ext>
             </a:extLst>
           </p:cNvPr>
@@ -6126,7 +6126,7 @@
     </p:spTree>
     <p:extLst>
       <p:ext uri="{BB962C8B-B14F-4D97-AF65-F5344CB8AC3E}">
-        <p14:creationId xmlns:p14="http://schemas.microsoft.com/office/powerpoint/2010/main" val="848604748"/>
+        <p14:creationId xmlns:p14="http://schemas.microsoft.com/office/powerpoint/2010/main" val="3798779883"/>
       </p:ext>
     </p:extLst>
   </p:cSld>
@@ -6158,7 +6158,7 @@
           <p:cNvPr id="2" name="Textfeld 1">
             <a:extLst>
               <a:ext uri="{FF2B5EF4-FFF2-40B4-BE49-F238E27FC236}">
-                <a16:creationId xmlns:a16="http://schemas.microsoft.com/office/drawing/2014/main" id="{1C08DB99-F125-0349-4A15-B2F1265E95C8}"/>
+                <a16:creationId xmlns:a16="http://schemas.microsoft.com/office/drawing/2014/main" id="{885B727E-930D-C4D6-E5A5-E291F11410D8}"/>
               </a:ext>
             </a:extLst>
           </p:cNvPr>
@@ -6253,7 +6253,7 @@
           <p:cNvPr id="3" name="Textfeld 2">
             <a:extLst>
               <a:ext uri="{FF2B5EF4-FFF2-40B4-BE49-F238E27FC236}">
-                <a16:creationId xmlns:a16="http://schemas.microsoft.com/office/drawing/2014/main" id="{BF0C2388-625B-FA19-217A-7C2D78DCA516}"/>
+                <a16:creationId xmlns:a16="http://schemas.microsoft.com/office/drawing/2014/main" id="{A0597D8F-BE38-7C62-CADD-AC26009D872C}"/>
               </a:ext>
             </a:extLst>
           </p:cNvPr>
@@ -6378,7 +6378,7 @@
           <p:cNvPr id="4" name="Textfeld 3">
             <a:extLst>
               <a:ext uri="{FF2B5EF4-FFF2-40B4-BE49-F238E27FC236}">
-                <a16:creationId xmlns:a16="http://schemas.microsoft.com/office/drawing/2014/main" id="{63198D7F-E219-7E46-178B-AD9328A0919F}"/>
+                <a16:creationId xmlns:a16="http://schemas.microsoft.com/office/drawing/2014/main" id="{09601E0E-FB72-6044-3897-115D1D4F8437}"/>
               </a:ext>
             </a:extLst>
           </p:cNvPr>
@@ -6503,7 +6503,7 @@
           <p:cNvPr id="5" name="Textfeld 4">
             <a:extLst>
               <a:ext uri="{FF2B5EF4-FFF2-40B4-BE49-F238E27FC236}">
-                <a16:creationId xmlns:a16="http://schemas.microsoft.com/office/drawing/2014/main" id="{28921D59-167F-B617-F99C-58AEAE74CCDD}"/>
+                <a16:creationId xmlns:a16="http://schemas.microsoft.com/office/drawing/2014/main" id="{F1035ABF-7171-CD0F-C611-E81E6ADAB11B}"/>
               </a:ext>
             </a:extLst>
           </p:cNvPr>
@@ -6626,7 +6626,7 @@
     </p:spTree>
     <p:extLst>
       <p:ext uri="{BB962C8B-B14F-4D97-AF65-F5344CB8AC3E}">
-        <p14:creationId xmlns:p14="http://schemas.microsoft.com/office/powerpoint/2010/main" val="384796320"/>
+        <p14:creationId xmlns:p14="http://schemas.microsoft.com/office/powerpoint/2010/main" val="3897647039"/>
       </p:ext>
     </p:extLst>
   </p:cSld>
@@ -6658,7 +6658,7 @@
           <p:cNvPr id="2" name="Textfeld 1">
             <a:extLst>
               <a:ext uri="{FF2B5EF4-FFF2-40B4-BE49-F238E27FC236}">
-                <a16:creationId xmlns:a16="http://schemas.microsoft.com/office/drawing/2014/main" id="{5009A7B5-9D48-AC8E-2850-E56B2019CC75}"/>
+                <a16:creationId xmlns:a16="http://schemas.microsoft.com/office/drawing/2014/main" id="{A335E710-549B-B67F-60FE-71BDCE25C9ED}"/>
               </a:ext>
             </a:extLst>
           </p:cNvPr>
@@ -6753,7 +6753,7 @@
           <p:cNvPr id="3" name="Textfeld 2">
             <a:extLst>
               <a:ext uri="{FF2B5EF4-FFF2-40B4-BE49-F238E27FC236}">
-                <a16:creationId xmlns:a16="http://schemas.microsoft.com/office/drawing/2014/main" id="{C6EA5AF9-E277-7C03-F71E-744B5A9053D8}"/>
+                <a16:creationId xmlns:a16="http://schemas.microsoft.com/office/drawing/2014/main" id="{D267A8A5-4CC6-0CAA-A760-0FB8164BFC96}"/>
               </a:ext>
             </a:extLst>
           </p:cNvPr>
@@ -6848,7 +6848,7 @@
           <p:cNvPr id="4" name="Textfeld 3">
             <a:extLst>
               <a:ext uri="{FF2B5EF4-FFF2-40B4-BE49-F238E27FC236}">
-                <a16:creationId xmlns:a16="http://schemas.microsoft.com/office/drawing/2014/main" id="{69512771-6F92-640A-D00F-2D2F7B12CF4C}"/>
+                <a16:creationId xmlns:a16="http://schemas.microsoft.com/office/drawing/2014/main" id="{A63460A7-CEEC-B6FA-BCD6-08269F8623A5}"/>
               </a:ext>
             </a:extLst>
           </p:cNvPr>
@@ -6921,7 +6921,7 @@
           <p:cNvPr id="5" name="Textfeld 4">
             <a:extLst>
               <a:ext uri="{FF2B5EF4-FFF2-40B4-BE49-F238E27FC236}">
-                <a16:creationId xmlns:a16="http://schemas.microsoft.com/office/drawing/2014/main" id="{68A52BBF-E861-7CE9-8A7D-E6247B665C5F}"/>
+                <a16:creationId xmlns:a16="http://schemas.microsoft.com/office/drawing/2014/main" id="{1D22E80B-F63D-D0EE-E6CE-6973D8E7216D}"/>
               </a:ext>
             </a:extLst>
           </p:cNvPr>
@@ -7062,7 +7062,7 @@
     </p:spTree>
     <p:extLst>
       <p:ext uri="{BB962C8B-B14F-4D97-AF65-F5344CB8AC3E}">
-        <p14:creationId xmlns:p14="http://schemas.microsoft.com/office/powerpoint/2010/main" val="3677246109"/>
+        <p14:creationId xmlns:p14="http://schemas.microsoft.com/office/powerpoint/2010/main" val="3621201201"/>
       </p:ext>
     </p:extLst>
   </p:cSld>
@@ -7094,7 +7094,7 @@
           <p:cNvPr id="2" name="Textfeld 1">
             <a:extLst>
               <a:ext uri="{FF2B5EF4-FFF2-40B4-BE49-F238E27FC236}">
-                <a16:creationId xmlns:a16="http://schemas.microsoft.com/office/drawing/2014/main" id="{91A5753B-62EB-9696-63AA-511AEA83CBAB}"/>
+                <a16:creationId xmlns:a16="http://schemas.microsoft.com/office/drawing/2014/main" id="{9AEF10E3-3C11-A02B-8EA8-48385B08650D}"/>
               </a:ext>
             </a:extLst>
           </p:cNvPr>
@@ -7189,7 +7189,7 @@
           <p:cNvPr id="3" name="Textfeld 2">
             <a:extLst>
               <a:ext uri="{FF2B5EF4-FFF2-40B4-BE49-F238E27FC236}">
-                <a16:creationId xmlns:a16="http://schemas.microsoft.com/office/drawing/2014/main" id="{BB4396D3-E1A2-ADA0-0E07-C9954CA1185B}"/>
+                <a16:creationId xmlns:a16="http://schemas.microsoft.com/office/drawing/2014/main" id="{6FB9988E-8546-4A87-0613-D64CA79E0FBE}"/>
               </a:ext>
             </a:extLst>
           </p:cNvPr>
@@ -7314,7 +7314,7 @@
           <p:cNvPr id="4" name="Textfeld 3">
             <a:extLst>
               <a:ext uri="{FF2B5EF4-FFF2-40B4-BE49-F238E27FC236}">
-                <a16:creationId xmlns:a16="http://schemas.microsoft.com/office/drawing/2014/main" id="{8BA54C70-BC06-6820-5A15-776D9D066B4F}"/>
+                <a16:creationId xmlns:a16="http://schemas.microsoft.com/office/drawing/2014/main" id="{5BC81E1A-E57E-CC37-A621-E73497525777}"/>
               </a:ext>
             </a:extLst>
           </p:cNvPr>
@@ -7439,7 +7439,7 @@
           <p:cNvPr id="5" name="Textfeld 4">
             <a:extLst>
               <a:ext uri="{FF2B5EF4-FFF2-40B4-BE49-F238E27FC236}">
-                <a16:creationId xmlns:a16="http://schemas.microsoft.com/office/drawing/2014/main" id="{53785C10-C7B7-A88E-A343-E518B6F3DBE7}"/>
+                <a16:creationId xmlns:a16="http://schemas.microsoft.com/office/drawing/2014/main" id="{89A80349-8FE3-15EF-9DCD-717955C10130}"/>
               </a:ext>
             </a:extLst>
           </p:cNvPr>
@@ -7562,7 +7562,7 @@
     </p:spTree>
     <p:extLst>
       <p:ext uri="{BB962C8B-B14F-4D97-AF65-F5344CB8AC3E}">
-        <p14:creationId xmlns:p14="http://schemas.microsoft.com/office/powerpoint/2010/main" val="149023393"/>
+        <p14:creationId xmlns:p14="http://schemas.microsoft.com/office/powerpoint/2010/main" val="3636886432"/>
       </p:ext>
     </p:extLst>
   </p:cSld>
@@ -7594,7 +7594,7 @@
           <p:cNvPr id="2" name="Textfeld 1">
             <a:extLst>
               <a:ext uri="{FF2B5EF4-FFF2-40B4-BE49-F238E27FC236}">
-                <a16:creationId xmlns:a16="http://schemas.microsoft.com/office/drawing/2014/main" id="{71A3DF6E-5AF8-B8C7-410E-84BE6A69401C}"/>
+                <a16:creationId xmlns:a16="http://schemas.microsoft.com/office/drawing/2014/main" id="{CB273C6B-4B3B-CFC3-92D7-BC2B655174A4}"/>
               </a:ext>
             </a:extLst>
           </p:cNvPr>
@@ -7689,7 +7689,7 @@
           <p:cNvPr id="3" name="Textfeld 2">
             <a:extLst>
               <a:ext uri="{FF2B5EF4-FFF2-40B4-BE49-F238E27FC236}">
-                <a16:creationId xmlns:a16="http://schemas.microsoft.com/office/drawing/2014/main" id="{2B69BC17-BAE1-B088-7354-F380648DA314}"/>
+                <a16:creationId xmlns:a16="http://schemas.microsoft.com/office/drawing/2014/main" id="{8A5BBC63-E2A0-8029-5C6F-0DF701B1E849}"/>
               </a:ext>
             </a:extLst>
           </p:cNvPr>
@@ -7784,7 +7784,7 @@
           <p:cNvPr id="4" name="Textfeld 3">
             <a:extLst>
               <a:ext uri="{FF2B5EF4-FFF2-40B4-BE49-F238E27FC236}">
-                <a16:creationId xmlns:a16="http://schemas.microsoft.com/office/drawing/2014/main" id="{F4E57585-373E-5770-A3A9-79A0DE990677}"/>
+                <a16:creationId xmlns:a16="http://schemas.microsoft.com/office/drawing/2014/main" id="{1DD299A0-FED1-D066-E02F-42D8A3384B67}"/>
               </a:ext>
             </a:extLst>
           </p:cNvPr>
@@ -7857,7 +7857,7 @@
           <p:cNvPr id="5" name="Textfeld 4">
             <a:extLst>
               <a:ext uri="{FF2B5EF4-FFF2-40B4-BE49-F238E27FC236}">
-                <a16:creationId xmlns:a16="http://schemas.microsoft.com/office/drawing/2014/main" id="{9BABCDC6-8E98-87AE-4FD1-AB0283BD5EF3}"/>
+                <a16:creationId xmlns:a16="http://schemas.microsoft.com/office/drawing/2014/main" id="{5969A8F8-20A1-2D1E-5B93-94FF53A3E3A2}"/>
               </a:ext>
             </a:extLst>
           </p:cNvPr>
@@ -7998,7 +7998,7 @@
     </p:spTree>
     <p:extLst>
       <p:ext uri="{BB962C8B-B14F-4D97-AF65-F5344CB8AC3E}">
-        <p14:creationId xmlns:p14="http://schemas.microsoft.com/office/powerpoint/2010/main" val="4034877336"/>
+        <p14:creationId xmlns:p14="http://schemas.microsoft.com/office/powerpoint/2010/main" val="796795995"/>
       </p:ext>
     </p:extLst>
   </p:cSld>
@@ -8030,7 +8030,7 @@
           <p:cNvPr id="2" name="Textfeld 1">
             <a:extLst>
               <a:ext uri="{FF2B5EF4-FFF2-40B4-BE49-F238E27FC236}">
-                <a16:creationId xmlns:a16="http://schemas.microsoft.com/office/drawing/2014/main" id="{8219E319-AF98-6E30-3E6B-3BA7AFCAECF7}"/>
+                <a16:creationId xmlns:a16="http://schemas.microsoft.com/office/drawing/2014/main" id="{23D3C341-E905-EE75-E903-05A3FC32D5F0}"/>
               </a:ext>
             </a:extLst>
           </p:cNvPr>
@@ -8092,7 +8092,7 @@
           <p:cNvPr id="3" name="Textfeld 2">
             <a:extLst>
               <a:ext uri="{FF2B5EF4-FFF2-40B4-BE49-F238E27FC236}">
-                <a16:creationId xmlns:a16="http://schemas.microsoft.com/office/drawing/2014/main" id="{C573AB71-296A-10AD-04A6-6AF0C2B71034}"/>
+                <a16:creationId xmlns:a16="http://schemas.microsoft.com/office/drawing/2014/main" id="{E2DC4E12-91FB-60BD-F064-4F51D6696BF8}"/>
               </a:ext>
             </a:extLst>
           </p:cNvPr>
@@ -8154,7 +8154,7 @@
           <p:cNvPr id="4" name="Textfeld 3">
             <a:extLst>
               <a:ext uri="{FF2B5EF4-FFF2-40B4-BE49-F238E27FC236}">
-                <a16:creationId xmlns:a16="http://schemas.microsoft.com/office/drawing/2014/main" id="{C597B88D-5055-BCD5-50DE-DF7FF3A62075}"/>
+                <a16:creationId xmlns:a16="http://schemas.microsoft.com/office/drawing/2014/main" id="{423C83DF-AC14-1906-B39F-6CBAA1637D12}"/>
               </a:ext>
             </a:extLst>
           </p:cNvPr>
@@ -8216,7 +8216,7 @@
           <p:cNvPr id="5" name="Textfeld 4">
             <a:extLst>
               <a:ext uri="{FF2B5EF4-FFF2-40B4-BE49-F238E27FC236}">
-                <a16:creationId xmlns:a16="http://schemas.microsoft.com/office/drawing/2014/main" id="{F2FA68BA-467A-6BDA-8F83-D593CF5E0F85}"/>
+                <a16:creationId xmlns:a16="http://schemas.microsoft.com/office/drawing/2014/main" id="{65F94F04-9CAC-0B5B-16F4-0C0288497DDE}"/>
               </a:ext>
             </a:extLst>
           </p:cNvPr>
@@ -8276,7 +8276,7 @@
     </p:spTree>
     <p:extLst>
       <p:ext uri="{BB962C8B-B14F-4D97-AF65-F5344CB8AC3E}">
-        <p14:creationId xmlns:p14="http://schemas.microsoft.com/office/powerpoint/2010/main" val="2709842864"/>
+        <p14:creationId xmlns:p14="http://schemas.microsoft.com/office/powerpoint/2010/main" val="1678470321"/>
       </p:ext>
     </p:extLst>
   </p:cSld>
@@ -8308,7 +8308,7 @@
           <p:cNvPr id="2" name="Textfeld 1">
             <a:extLst>
               <a:ext uri="{FF2B5EF4-FFF2-40B4-BE49-F238E27FC236}">
-                <a16:creationId xmlns:a16="http://schemas.microsoft.com/office/drawing/2014/main" id="{6BD1730A-E545-AA64-409F-B7DBB2DFFB2E}"/>
+                <a16:creationId xmlns:a16="http://schemas.microsoft.com/office/drawing/2014/main" id="{3C3BE7EA-76BA-9DE2-A9C9-0E31C6E5A3BC}"/>
               </a:ext>
             </a:extLst>
           </p:cNvPr>
@@ -8403,7 +8403,7 @@
           <p:cNvPr id="3" name="Textfeld 2">
             <a:extLst>
               <a:ext uri="{FF2B5EF4-FFF2-40B4-BE49-F238E27FC236}">
-                <a16:creationId xmlns:a16="http://schemas.microsoft.com/office/drawing/2014/main" id="{51B6F9F9-77B9-7B93-3437-0940A4EA0B47}"/>
+                <a16:creationId xmlns:a16="http://schemas.microsoft.com/office/drawing/2014/main" id="{23C7C805-486A-14A6-7EE1-3E2BE1912F9C}"/>
               </a:ext>
             </a:extLst>
           </p:cNvPr>
@@ -8498,7 +8498,7 @@
           <p:cNvPr id="4" name="Textfeld 3">
             <a:extLst>
               <a:ext uri="{FF2B5EF4-FFF2-40B4-BE49-F238E27FC236}">
-                <a16:creationId xmlns:a16="http://schemas.microsoft.com/office/drawing/2014/main" id="{5C8A4AF7-7D3C-8693-561C-DBDCA911F12B}"/>
+                <a16:creationId xmlns:a16="http://schemas.microsoft.com/office/drawing/2014/main" id="{2FEE7AE6-5EC8-CC49-818C-933312D89B8C}"/>
               </a:ext>
             </a:extLst>
           </p:cNvPr>
@@ -8571,7 +8571,7 @@
           <p:cNvPr id="5" name="Textfeld 4">
             <a:extLst>
               <a:ext uri="{FF2B5EF4-FFF2-40B4-BE49-F238E27FC236}">
-                <a16:creationId xmlns:a16="http://schemas.microsoft.com/office/drawing/2014/main" id="{786E48D0-A647-6B16-09DA-C541ED16E8D4}"/>
+                <a16:creationId xmlns:a16="http://schemas.microsoft.com/office/drawing/2014/main" id="{5F867191-E11B-EE0D-37EB-6ABA10161A60}"/>
               </a:ext>
             </a:extLst>
           </p:cNvPr>
@@ -8712,7 +8712,7 @@
     </p:spTree>
     <p:extLst>
       <p:ext uri="{BB962C8B-B14F-4D97-AF65-F5344CB8AC3E}">
-        <p14:creationId xmlns:p14="http://schemas.microsoft.com/office/powerpoint/2010/main" val="839002737"/>
+        <p14:creationId xmlns:p14="http://schemas.microsoft.com/office/powerpoint/2010/main" val="1671097135"/>
       </p:ext>
     </p:extLst>
   </p:cSld>
@@ -8744,7 +8744,7 @@
           <p:cNvPr id="2" name="Textfeld 1">
             <a:extLst>
               <a:ext uri="{FF2B5EF4-FFF2-40B4-BE49-F238E27FC236}">
-                <a16:creationId xmlns:a16="http://schemas.microsoft.com/office/drawing/2014/main" id="{DACA72F0-BFAC-7478-BC09-EBF972FDBE08}"/>
+                <a16:creationId xmlns:a16="http://schemas.microsoft.com/office/drawing/2014/main" id="{8C4E4000-1034-13EB-689B-4EFA1BF64921}"/>
               </a:ext>
             </a:extLst>
           </p:cNvPr>
@@ -8815,7 +8815,7 @@
           <p:cNvPr id="3" name="Textfeld 2">
             <a:extLst>
               <a:ext uri="{FF2B5EF4-FFF2-40B4-BE49-F238E27FC236}">
-                <a16:creationId xmlns:a16="http://schemas.microsoft.com/office/drawing/2014/main" id="{655F46A9-15B9-01EC-6B0E-9F9324113ACD}"/>
+                <a16:creationId xmlns:a16="http://schemas.microsoft.com/office/drawing/2014/main" id="{85A7DD96-6106-6291-6CC4-810EC8816CAE}"/>
               </a:ext>
             </a:extLst>
           </p:cNvPr>
@@ -8904,7 +8904,7 @@
           <p:cNvPr id="4" name="Textfeld 3">
             <a:extLst>
               <a:ext uri="{FF2B5EF4-FFF2-40B4-BE49-F238E27FC236}">
-                <a16:creationId xmlns:a16="http://schemas.microsoft.com/office/drawing/2014/main" id="{D71A6844-D5F5-6300-E2AD-F3825898D6FF}"/>
+                <a16:creationId xmlns:a16="http://schemas.microsoft.com/office/drawing/2014/main" id="{42BB51ED-3106-CAA3-0C54-BD932DB4F00E}"/>
               </a:ext>
             </a:extLst>
           </p:cNvPr>
@@ -8997,7 +8997,7 @@
           <p:cNvPr id="5" name="Textfeld 4">
             <a:extLst>
               <a:ext uri="{FF2B5EF4-FFF2-40B4-BE49-F238E27FC236}">
-                <a16:creationId xmlns:a16="http://schemas.microsoft.com/office/drawing/2014/main" id="{A50C9FC7-F3AE-8C91-3813-B1B1D0D76E5E}"/>
+                <a16:creationId xmlns:a16="http://schemas.microsoft.com/office/drawing/2014/main" id="{202FF442-86CC-F2AB-A67A-98649C3C0095}"/>
               </a:ext>
             </a:extLst>
           </p:cNvPr>
@@ -9068,7 +9068,7 @@
     </p:spTree>
     <p:extLst>
       <p:ext uri="{BB962C8B-B14F-4D97-AF65-F5344CB8AC3E}">
-        <p14:creationId xmlns:p14="http://schemas.microsoft.com/office/powerpoint/2010/main" val="3189474235"/>
+        <p14:creationId xmlns:p14="http://schemas.microsoft.com/office/powerpoint/2010/main" val="2227297579"/>
       </p:ext>
     </p:extLst>
   </p:cSld>
@@ -9100,7 +9100,7 @@
           <p:cNvPr id="2" name="Textfeld 1">
             <a:extLst>
               <a:ext uri="{FF2B5EF4-FFF2-40B4-BE49-F238E27FC236}">
-                <a16:creationId xmlns:a16="http://schemas.microsoft.com/office/drawing/2014/main" id="{98E1B9A3-4E88-E04F-98AC-DB45335C01D6}"/>
+                <a16:creationId xmlns:a16="http://schemas.microsoft.com/office/drawing/2014/main" id="{E8689ADB-D23E-DDA5-33EE-E469F409C354}"/>
               </a:ext>
             </a:extLst>
           </p:cNvPr>
@@ -9225,7 +9225,7 @@
           <p:cNvPr id="3" name="Textfeld 2">
             <a:extLst>
               <a:ext uri="{FF2B5EF4-FFF2-40B4-BE49-F238E27FC236}">
-                <a16:creationId xmlns:a16="http://schemas.microsoft.com/office/drawing/2014/main" id="{75049490-EDE5-CBA7-3C6C-4F4FA56FFAD9}"/>
+                <a16:creationId xmlns:a16="http://schemas.microsoft.com/office/drawing/2014/main" id="{5F8AA86F-BF34-9EFA-66A6-C1A86B805BC1}"/>
               </a:ext>
             </a:extLst>
           </p:cNvPr>
@@ -9350,7 +9350,7 @@
           <p:cNvPr id="4" name="Textfeld 3">
             <a:extLst>
               <a:ext uri="{FF2B5EF4-FFF2-40B4-BE49-F238E27FC236}">
-                <a16:creationId xmlns:a16="http://schemas.microsoft.com/office/drawing/2014/main" id="{6CC47E2D-342B-059B-347B-6FC7E9A73787}"/>
+                <a16:creationId xmlns:a16="http://schemas.microsoft.com/office/drawing/2014/main" id="{51D0BB9E-1D26-C47C-B133-A931FE316B87}"/>
               </a:ext>
             </a:extLst>
           </p:cNvPr>
@@ -9475,7 +9475,7 @@
           <p:cNvPr id="5" name="Textfeld 4">
             <a:extLst>
               <a:ext uri="{FF2B5EF4-FFF2-40B4-BE49-F238E27FC236}">
-                <a16:creationId xmlns:a16="http://schemas.microsoft.com/office/drawing/2014/main" id="{63FFC7A1-7375-EAE0-1FE1-FC0FEA952A6E}"/>
+                <a16:creationId xmlns:a16="http://schemas.microsoft.com/office/drawing/2014/main" id="{5E407C54-9F18-F36E-32DC-92E6D33B306A}"/>
               </a:ext>
             </a:extLst>
           </p:cNvPr>
@@ -9598,7 +9598,7 @@
     </p:spTree>
     <p:extLst>
       <p:ext uri="{BB962C8B-B14F-4D97-AF65-F5344CB8AC3E}">
-        <p14:creationId xmlns:p14="http://schemas.microsoft.com/office/powerpoint/2010/main" val="4156306403"/>
+        <p14:creationId xmlns:p14="http://schemas.microsoft.com/office/powerpoint/2010/main" val="1673776937"/>
       </p:ext>
     </p:extLst>
   </p:cSld>
@@ -9630,7 +9630,7 @@
           <p:cNvPr id="2" name="Textfeld 1">
             <a:extLst>
               <a:ext uri="{FF2B5EF4-FFF2-40B4-BE49-F238E27FC236}">
-                <a16:creationId xmlns:a16="http://schemas.microsoft.com/office/drawing/2014/main" id="{71BE154A-A690-B779-BFFC-BAA41B974C08}"/>
+                <a16:creationId xmlns:a16="http://schemas.microsoft.com/office/drawing/2014/main" id="{65B1454D-D1C5-7F73-BA6E-B3C1198A1952}"/>
               </a:ext>
             </a:extLst>
           </p:cNvPr>
@@ -9755,7 +9755,7 @@
           <p:cNvPr id="3" name="Textfeld 2">
             <a:extLst>
               <a:ext uri="{FF2B5EF4-FFF2-40B4-BE49-F238E27FC236}">
-                <a16:creationId xmlns:a16="http://schemas.microsoft.com/office/drawing/2014/main" id="{E9142628-620C-9D50-923E-85F3E6A80203}"/>
+                <a16:creationId xmlns:a16="http://schemas.microsoft.com/office/drawing/2014/main" id="{058AA22F-97C1-B190-12F5-6BBB79D4E4BB}"/>
               </a:ext>
             </a:extLst>
           </p:cNvPr>
@@ -9880,7 +9880,7 @@
           <p:cNvPr id="4" name="Textfeld 3">
             <a:extLst>
               <a:ext uri="{FF2B5EF4-FFF2-40B4-BE49-F238E27FC236}">
-                <a16:creationId xmlns:a16="http://schemas.microsoft.com/office/drawing/2014/main" id="{CAD4D715-E469-9AA2-6566-8BE4B5BA5CE5}"/>
+                <a16:creationId xmlns:a16="http://schemas.microsoft.com/office/drawing/2014/main" id="{23A8955D-B0CA-449F-029F-E68D5AB17C76}"/>
               </a:ext>
             </a:extLst>
           </p:cNvPr>
@@ -10005,7 +10005,7 @@
           <p:cNvPr id="5" name="Textfeld 4">
             <a:extLst>
               <a:ext uri="{FF2B5EF4-FFF2-40B4-BE49-F238E27FC236}">
-                <a16:creationId xmlns:a16="http://schemas.microsoft.com/office/drawing/2014/main" id="{94968CB6-5F94-FF6D-E312-297DBAAF4756}"/>
+                <a16:creationId xmlns:a16="http://schemas.microsoft.com/office/drawing/2014/main" id="{D0847B5E-8999-E690-5DBB-EBDF64CADAA3}"/>
               </a:ext>
             </a:extLst>
           </p:cNvPr>
@@ -10128,7 +10128,7 @@
     </p:spTree>
     <p:extLst>
       <p:ext uri="{BB962C8B-B14F-4D97-AF65-F5344CB8AC3E}">
-        <p14:creationId xmlns:p14="http://schemas.microsoft.com/office/powerpoint/2010/main" val="3843302394"/>
+        <p14:creationId xmlns:p14="http://schemas.microsoft.com/office/powerpoint/2010/main" val="59103932"/>
       </p:ext>
     </p:extLst>
   </p:cSld>
@@ -10160,7 +10160,7 @@
           <p:cNvPr id="2" name="Textfeld 1">
             <a:extLst>
               <a:ext uri="{FF2B5EF4-FFF2-40B4-BE49-F238E27FC236}">
-                <a16:creationId xmlns:a16="http://schemas.microsoft.com/office/drawing/2014/main" id="{FC7E4C20-79CC-5C24-E002-E03FDB2EA713}"/>
+                <a16:creationId xmlns:a16="http://schemas.microsoft.com/office/drawing/2014/main" id="{D43E22B2-42B8-BAA9-FB7B-41B2CA78E2B0}"/>
               </a:ext>
             </a:extLst>
           </p:cNvPr>
@@ -10285,7 +10285,7 @@
           <p:cNvPr id="3" name="Textfeld 2">
             <a:extLst>
               <a:ext uri="{FF2B5EF4-FFF2-40B4-BE49-F238E27FC236}">
-                <a16:creationId xmlns:a16="http://schemas.microsoft.com/office/drawing/2014/main" id="{63C4326C-8289-9A72-8E95-1A31CA2ED6C0}"/>
+                <a16:creationId xmlns:a16="http://schemas.microsoft.com/office/drawing/2014/main" id="{32A75BF0-A905-E0E9-29EF-5C1407474B34}"/>
               </a:ext>
             </a:extLst>
           </p:cNvPr>
@@ -10410,7 +10410,7 @@
           <p:cNvPr id="4" name="Textfeld 3">
             <a:extLst>
               <a:ext uri="{FF2B5EF4-FFF2-40B4-BE49-F238E27FC236}">
-                <a16:creationId xmlns:a16="http://schemas.microsoft.com/office/drawing/2014/main" id="{5BD2A6BD-A362-5E94-3208-1F696A43D97C}"/>
+                <a16:creationId xmlns:a16="http://schemas.microsoft.com/office/drawing/2014/main" id="{0B011715-72EF-BEF0-ED74-E8B36F17D271}"/>
               </a:ext>
             </a:extLst>
           </p:cNvPr>
@@ -10535,7 +10535,7 @@
           <p:cNvPr id="5" name="Textfeld 4">
             <a:extLst>
               <a:ext uri="{FF2B5EF4-FFF2-40B4-BE49-F238E27FC236}">
-                <a16:creationId xmlns:a16="http://schemas.microsoft.com/office/drawing/2014/main" id="{82BCA07D-63E2-5392-3DA3-AF907B9E3F94}"/>
+                <a16:creationId xmlns:a16="http://schemas.microsoft.com/office/drawing/2014/main" id="{E60BBBDB-104F-A5D8-E14F-9166402B7DD0}"/>
               </a:ext>
             </a:extLst>
           </p:cNvPr>
@@ -10658,7 +10658,7 @@
     </p:spTree>
     <p:extLst>
       <p:ext uri="{BB962C8B-B14F-4D97-AF65-F5344CB8AC3E}">
-        <p14:creationId xmlns:p14="http://schemas.microsoft.com/office/powerpoint/2010/main" val="1424833803"/>
+        <p14:creationId xmlns:p14="http://schemas.microsoft.com/office/powerpoint/2010/main" val="3819084475"/>
       </p:ext>
     </p:extLst>
   </p:cSld>
@@ -10690,7 +10690,7 @@
           <p:cNvPr id="2" name="Textfeld 1">
             <a:extLst>
               <a:ext uri="{FF2B5EF4-FFF2-40B4-BE49-F238E27FC236}">
-                <a16:creationId xmlns:a16="http://schemas.microsoft.com/office/drawing/2014/main" id="{1E2913D7-C6AE-2DD2-4395-964FA1638952}"/>
+                <a16:creationId xmlns:a16="http://schemas.microsoft.com/office/drawing/2014/main" id="{52874EAF-6A27-7AB1-9DD9-56FFC8B5A2BE}"/>
               </a:ext>
             </a:extLst>
           </p:cNvPr>
@@ -10815,7 +10815,7 @@
           <p:cNvPr id="3" name="Textfeld 2">
             <a:extLst>
               <a:ext uri="{FF2B5EF4-FFF2-40B4-BE49-F238E27FC236}">
-                <a16:creationId xmlns:a16="http://schemas.microsoft.com/office/drawing/2014/main" id="{0BD19633-52FD-F35D-3A8C-95B88E97244C}"/>
+                <a16:creationId xmlns:a16="http://schemas.microsoft.com/office/drawing/2014/main" id="{B16E94DB-3736-629E-AE60-F34500B3EFE6}"/>
               </a:ext>
             </a:extLst>
           </p:cNvPr>
@@ -10940,7 +10940,7 @@
           <p:cNvPr id="4" name="Textfeld 3">
             <a:extLst>
               <a:ext uri="{FF2B5EF4-FFF2-40B4-BE49-F238E27FC236}">
-                <a16:creationId xmlns:a16="http://schemas.microsoft.com/office/drawing/2014/main" id="{EC5C47C2-4B7F-9753-7A3A-6FCD1ADFF870}"/>
+                <a16:creationId xmlns:a16="http://schemas.microsoft.com/office/drawing/2014/main" id="{B713CA7A-ECD7-7CF3-BB00-BFD1BCDB44CD}"/>
               </a:ext>
             </a:extLst>
           </p:cNvPr>
@@ -11065,7 +11065,7 @@
           <p:cNvPr id="5" name="Textfeld 4">
             <a:extLst>
               <a:ext uri="{FF2B5EF4-FFF2-40B4-BE49-F238E27FC236}">
-                <a16:creationId xmlns:a16="http://schemas.microsoft.com/office/drawing/2014/main" id="{CCD56016-BBFD-F5BF-A328-99B673BCFF91}"/>
+                <a16:creationId xmlns:a16="http://schemas.microsoft.com/office/drawing/2014/main" id="{37D1E4E4-8081-A244-38FA-F85247795975}"/>
               </a:ext>
             </a:extLst>
           </p:cNvPr>
@@ -11188,7 +11188,7 @@
     </p:spTree>
     <p:extLst>
       <p:ext uri="{BB962C8B-B14F-4D97-AF65-F5344CB8AC3E}">
-        <p14:creationId xmlns:p14="http://schemas.microsoft.com/office/powerpoint/2010/main" val="2629707241"/>
+        <p14:creationId xmlns:p14="http://schemas.microsoft.com/office/powerpoint/2010/main" val="2181974871"/>
       </p:ext>
     </p:extLst>
   </p:cSld>
@@ -11220,7 +11220,7 @@
           <p:cNvPr id="2" name="Textfeld 1">
             <a:extLst>
               <a:ext uri="{FF2B5EF4-FFF2-40B4-BE49-F238E27FC236}">
-                <a16:creationId xmlns:a16="http://schemas.microsoft.com/office/drawing/2014/main" id="{9A12053E-7D08-1F97-9AE5-0FD80F798266}"/>
+                <a16:creationId xmlns:a16="http://schemas.microsoft.com/office/drawing/2014/main" id="{ED4B3252-E8FA-52B1-E0AD-0F5C80022AA4}"/>
               </a:ext>
             </a:extLst>
           </p:cNvPr>
@@ -11345,7 +11345,7 @@
           <p:cNvPr id="3" name="Textfeld 2">
             <a:extLst>
               <a:ext uri="{FF2B5EF4-FFF2-40B4-BE49-F238E27FC236}">
-                <a16:creationId xmlns:a16="http://schemas.microsoft.com/office/drawing/2014/main" id="{98D9C9B6-9AE6-E4B7-A00A-0A11EBC4B58B}"/>
+                <a16:creationId xmlns:a16="http://schemas.microsoft.com/office/drawing/2014/main" id="{FAA0C09E-5CF4-6544-1ED5-62D673F942AC}"/>
               </a:ext>
             </a:extLst>
           </p:cNvPr>
@@ -11470,7 +11470,7 @@
           <p:cNvPr id="4" name="Textfeld 3">
             <a:extLst>
               <a:ext uri="{FF2B5EF4-FFF2-40B4-BE49-F238E27FC236}">
-                <a16:creationId xmlns:a16="http://schemas.microsoft.com/office/drawing/2014/main" id="{9F4EC304-26FB-664B-17A4-F3C5507C8B03}"/>
+                <a16:creationId xmlns:a16="http://schemas.microsoft.com/office/drawing/2014/main" id="{C991B4CB-E83F-BA74-BE76-AB2E4E2133E6}"/>
               </a:ext>
             </a:extLst>
           </p:cNvPr>
@@ -11595,7 +11595,7 @@
           <p:cNvPr id="5" name="Textfeld 4">
             <a:extLst>
               <a:ext uri="{FF2B5EF4-FFF2-40B4-BE49-F238E27FC236}">
-                <a16:creationId xmlns:a16="http://schemas.microsoft.com/office/drawing/2014/main" id="{25E7A57A-EDFD-BB8B-37CA-EFB1E5EEAFFF}"/>
+                <a16:creationId xmlns:a16="http://schemas.microsoft.com/office/drawing/2014/main" id="{AFDBC5CA-50EF-A412-42A9-1511C032BC19}"/>
               </a:ext>
             </a:extLst>
           </p:cNvPr>
@@ -11718,7 +11718,7 @@
     </p:spTree>
     <p:extLst>
       <p:ext uri="{BB962C8B-B14F-4D97-AF65-F5344CB8AC3E}">
-        <p14:creationId xmlns:p14="http://schemas.microsoft.com/office/powerpoint/2010/main" val="555179589"/>
+        <p14:creationId xmlns:p14="http://schemas.microsoft.com/office/powerpoint/2010/main" val="2183936792"/>
       </p:ext>
     </p:extLst>
   </p:cSld>
@@ -11750,7 +11750,7 @@
           <p:cNvPr id="2" name="Textfeld 1">
             <a:extLst>
               <a:ext uri="{FF2B5EF4-FFF2-40B4-BE49-F238E27FC236}">
-                <a16:creationId xmlns:a16="http://schemas.microsoft.com/office/drawing/2014/main" id="{3651B621-CE08-4B83-FD6A-DAE601B7CD7F}"/>
+                <a16:creationId xmlns:a16="http://schemas.microsoft.com/office/drawing/2014/main" id="{F685B47A-DFCD-E642-1114-AC99A6FC8656}"/>
               </a:ext>
             </a:extLst>
           </p:cNvPr>
@@ -11845,7 +11845,7 @@
           <p:cNvPr id="3" name="Textfeld 2">
             <a:extLst>
               <a:ext uri="{FF2B5EF4-FFF2-40B4-BE49-F238E27FC236}">
-                <a16:creationId xmlns:a16="http://schemas.microsoft.com/office/drawing/2014/main" id="{A2171893-4101-38DA-831F-BE43095F4944}"/>
+                <a16:creationId xmlns:a16="http://schemas.microsoft.com/office/drawing/2014/main" id="{A0C6BCC1-0AA3-A2CC-60CA-B2E31EA37B05}"/>
               </a:ext>
             </a:extLst>
           </p:cNvPr>
@@ -11970,7 +11970,7 @@
           <p:cNvPr id="4" name="Textfeld 3">
             <a:extLst>
               <a:ext uri="{FF2B5EF4-FFF2-40B4-BE49-F238E27FC236}">
-                <a16:creationId xmlns:a16="http://schemas.microsoft.com/office/drawing/2014/main" id="{400EAD94-18F7-CBFE-E290-0F5DD517D2B3}"/>
+                <a16:creationId xmlns:a16="http://schemas.microsoft.com/office/drawing/2014/main" id="{675ACB6E-6C30-6DB7-6B6B-DC8938C050FC}"/>
               </a:ext>
             </a:extLst>
           </p:cNvPr>
@@ -12095,7 +12095,7 @@
           <p:cNvPr id="5" name="Textfeld 4">
             <a:extLst>
               <a:ext uri="{FF2B5EF4-FFF2-40B4-BE49-F238E27FC236}">
-                <a16:creationId xmlns:a16="http://schemas.microsoft.com/office/drawing/2014/main" id="{16D379FF-9E6D-9A78-B6AF-3C2B512707AC}"/>
+                <a16:creationId xmlns:a16="http://schemas.microsoft.com/office/drawing/2014/main" id="{CC61EC9A-42D9-82A0-7355-644EE4D1B474}"/>
               </a:ext>
             </a:extLst>
           </p:cNvPr>
@@ -12218,7 +12218,7 @@
     </p:spTree>
     <p:extLst>
       <p:ext uri="{BB962C8B-B14F-4D97-AF65-F5344CB8AC3E}">
-        <p14:creationId xmlns:p14="http://schemas.microsoft.com/office/powerpoint/2010/main" val="1921747777"/>
+        <p14:creationId xmlns:p14="http://schemas.microsoft.com/office/powerpoint/2010/main" val="3439489004"/>
       </p:ext>
     </p:extLst>
   </p:cSld>
@@ -12250,7 +12250,7 @@
           <p:cNvPr id="2" name="Textfeld 1">
             <a:extLst>
               <a:ext uri="{FF2B5EF4-FFF2-40B4-BE49-F238E27FC236}">
-                <a16:creationId xmlns:a16="http://schemas.microsoft.com/office/drawing/2014/main" id="{FE877DA2-CF4C-9568-C7B0-2FF60AC6BD7A}"/>
+                <a16:creationId xmlns:a16="http://schemas.microsoft.com/office/drawing/2014/main" id="{F1D36BB8-0CBD-04B5-882E-87BD69BFA5DC}"/>
               </a:ext>
             </a:extLst>
           </p:cNvPr>
@@ -12345,7 +12345,7 @@
           <p:cNvPr id="3" name="Textfeld 2">
             <a:extLst>
               <a:ext uri="{FF2B5EF4-FFF2-40B4-BE49-F238E27FC236}">
-                <a16:creationId xmlns:a16="http://schemas.microsoft.com/office/drawing/2014/main" id="{41861C8D-BF76-4CAC-7015-2258A74EA077}"/>
+                <a16:creationId xmlns:a16="http://schemas.microsoft.com/office/drawing/2014/main" id="{3F8CF549-2829-8D66-690A-93AFC4F046CC}"/>
               </a:ext>
             </a:extLst>
           </p:cNvPr>
@@ -12440,7 +12440,7 @@
           <p:cNvPr id="4" name="Textfeld 3">
             <a:extLst>
               <a:ext uri="{FF2B5EF4-FFF2-40B4-BE49-F238E27FC236}">
-                <a16:creationId xmlns:a16="http://schemas.microsoft.com/office/drawing/2014/main" id="{84E46949-95BE-2951-EB36-13F9411AC235}"/>
+                <a16:creationId xmlns:a16="http://schemas.microsoft.com/office/drawing/2014/main" id="{B5BD886B-4FF1-31BE-8C88-0B76F4CCD383}"/>
               </a:ext>
             </a:extLst>
           </p:cNvPr>
@@ -12513,7 +12513,7 @@
           <p:cNvPr id="5" name="Textfeld 4">
             <a:extLst>
               <a:ext uri="{FF2B5EF4-FFF2-40B4-BE49-F238E27FC236}">
-                <a16:creationId xmlns:a16="http://schemas.microsoft.com/office/drawing/2014/main" id="{D7E0D0F5-E534-8391-09CA-CF9A8BE96D4C}"/>
+                <a16:creationId xmlns:a16="http://schemas.microsoft.com/office/drawing/2014/main" id="{4DB130EC-5F2F-E2EC-47BB-6630DC81F6A9}"/>
               </a:ext>
             </a:extLst>
           </p:cNvPr>
@@ -12654,7 +12654,7 @@
     </p:spTree>
     <p:extLst>
       <p:ext uri="{BB962C8B-B14F-4D97-AF65-F5344CB8AC3E}">
-        <p14:creationId xmlns:p14="http://schemas.microsoft.com/office/powerpoint/2010/main" val="3263460419"/>
+        <p14:creationId xmlns:p14="http://schemas.microsoft.com/office/powerpoint/2010/main" val="2753718755"/>
       </p:ext>
     </p:extLst>
   </p:cSld>
@@ -12686,7 +12686,7 @@
           <p:cNvPr id="2" name="Textfeld 1">
             <a:extLst>
               <a:ext uri="{FF2B5EF4-FFF2-40B4-BE49-F238E27FC236}">
-                <a16:creationId xmlns:a16="http://schemas.microsoft.com/office/drawing/2014/main" id="{2E2755E5-2F71-EE62-1D05-7B49721248F8}"/>
+                <a16:creationId xmlns:a16="http://schemas.microsoft.com/office/drawing/2014/main" id="{59E70937-D4A0-31DC-1FCB-3C959FC948A0}"/>
               </a:ext>
             </a:extLst>
           </p:cNvPr>
@@ -12781,7 +12781,7 @@
           <p:cNvPr id="3" name="Textfeld 2">
             <a:extLst>
               <a:ext uri="{FF2B5EF4-FFF2-40B4-BE49-F238E27FC236}">
-                <a16:creationId xmlns:a16="http://schemas.microsoft.com/office/drawing/2014/main" id="{9AF26CD9-9B23-CBB4-2C54-B7B95784CF73}"/>
+                <a16:creationId xmlns:a16="http://schemas.microsoft.com/office/drawing/2014/main" id="{DD64AA1E-AE8D-FB52-B7D8-8B6F7C965BB2}"/>
               </a:ext>
             </a:extLst>
           </p:cNvPr>
@@ -12906,7 +12906,7 @@
           <p:cNvPr id="4" name="Textfeld 3">
             <a:extLst>
               <a:ext uri="{FF2B5EF4-FFF2-40B4-BE49-F238E27FC236}">
-                <a16:creationId xmlns:a16="http://schemas.microsoft.com/office/drawing/2014/main" id="{BF963A20-3EAB-6FC6-BBC5-0DD91F6726D6}"/>
+                <a16:creationId xmlns:a16="http://schemas.microsoft.com/office/drawing/2014/main" id="{B7FF8122-8DB2-8A84-0C1B-A3A1AFFF319E}"/>
               </a:ext>
             </a:extLst>
           </p:cNvPr>
@@ -13031,7 +13031,7 @@
           <p:cNvPr id="5" name="Textfeld 4">
             <a:extLst>
               <a:ext uri="{FF2B5EF4-FFF2-40B4-BE49-F238E27FC236}">
-                <a16:creationId xmlns:a16="http://schemas.microsoft.com/office/drawing/2014/main" id="{2B3169F2-F1FE-A087-5868-A0FF918F3C34}"/>
+                <a16:creationId xmlns:a16="http://schemas.microsoft.com/office/drawing/2014/main" id="{8807E26C-6814-6959-F211-805B660FE6B1}"/>
               </a:ext>
             </a:extLst>
           </p:cNvPr>
@@ -13154,7 +13154,7 @@
     </p:spTree>
     <p:extLst>
       <p:ext uri="{BB962C8B-B14F-4D97-AF65-F5344CB8AC3E}">
-        <p14:creationId xmlns:p14="http://schemas.microsoft.com/office/powerpoint/2010/main" val="2373817873"/>
+        <p14:creationId xmlns:p14="http://schemas.microsoft.com/office/powerpoint/2010/main" val="1553427009"/>
       </p:ext>
     </p:extLst>
   </p:cSld>
@@ -13186,7 +13186,7 @@
           <p:cNvPr id="2" name="Textfeld 1">
             <a:extLst>
               <a:ext uri="{FF2B5EF4-FFF2-40B4-BE49-F238E27FC236}">
-                <a16:creationId xmlns:a16="http://schemas.microsoft.com/office/drawing/2014/main" id="{D0BB5EC8-1729-A142-62AD-F5E029020F6D}"/>
+                <a16:creationId xmlns:a16="http://schemas.microsoft.com/office/drawing/2014/main" id="{15332FE8-84A4-1D21-6536-61670E5BDF33}"/>
               </a:ext>
             </a:extLst>
           </p:cNvPr>
@@ -13281,7 +13281,7 @@
           <p:cNvPr id="3" name="Textfeld 2">
             <a:extLst>
               <a:ext uri="{FF2B5EF4-FFF2-40B4-BE49-F238E27FC236}">
-                <a16:creationId xmlns:a16="http://schemas.microsoft.com/office/drawing/2014/main" id="{A91E940C-2065-61A5-5948-7C12075065F6}"/>
+                <a16:creationId xmlns:a16="http://schemas.microsoft.com/office/drawing/2014/main" id="{EE0AF433-D2C0-DE1C-3D68-FED9AF3259DB}"/>
               </a:ext>
             </a:extLst>
           </p:cNvPr>
@@ -13376,7 +13376,7 @@
           <p:cNvPr id="4" name="Textfeld 3">
             <a:extLst>
               <a:ext uri="{FF2B5EF4-FFF2-40B4-BE49-F238E27FC236}">
-                <a16:creationId xmlns:a16="http://schemas.microsoft.com/office/drawing/2014/main" id="{A8D5E177-9EC6-6CEC-AD22-470538088052}"/>
+                <a16:creationId xmlns:a16="http://schemas.microsoft.com/office/drawing/2014/main" id="{24CCC4F2-B7D5-46A0-5A60-8195F71710EB}"/>
               </a:ext>
             </a:extLst>
           </p:cNvPr>
@@ -13449,7 +13449,7 @@
           <p:cNvPr id="5" name="Textfeld 4">
             <a:extLst>
               <a:ext uri="{FF2B5EF4-FFF2-40B4-BE49-F238E27FC236}">
-                <a16:creationId xmlns:a16="http://schemas.microsoft.com/office/drawing/2014/main" id="{29727557-7BCA-2A3C-CF86-2F62746F3428}"/>
+                <a16:creationId xmlns:a16="http://schemas.microsoft.com/office/drawing/2014/main" id="{3C194B85-BA9E-D371-C5DB-7D749D51C74B}"/>
               </a:ext>
             </a:extLst>
           </p:cNvPr>
@@ -13590,7 +13590,7 @@
     </p:spTree>
     <p:extLst>
       <p:ext uri="{BB962C8B-B14F-4D97-AF65-F5344CB8AC3E}">
-        <p14:creationId xmlns:p14="http://schemas.microsoft.com/office/powerpoint/2010/main" val="3282876448"/>
+        <p14:creationId xmlns:p14="http://schemas.microsoft.com/office/powerpoint/2010/main" val="998525559"/>
       </p:ext>
     </p:extLst>
   </p:cSld>
@@ -13622,7 +13622,7 @@
           <p:cNvPr id="2" name="Textfeld 1">
             <a:extLst>
               <a:ext uri="{FF2B5EF4-FFF2-40B4-BE49-F238E27FC236}">
-                <a16:creationId xmlns:a16="http://schemas.microsoft.com/office/drawing/2014/main" id="{8113E330-C070-2E1C-CAB0-8A2651110029}"/>
+                <a16:creationId xmlns:a16="http://schemas.microsoft.com/office/drawing/2014/main" id="{A87561AD-C871-2BE3-E54F-CA6B66E76554}"/>
               </a:ext>
             </a:extLst>
           </p:cNvPr>
@@ -13717,7 +13717,7 @@
           <p:cNvPr id="3" name="Textfeld 2">
             <a:extLst>
               <a:ext uri="{FF2B5EF4-FFF2-40B4-BE49-F238E27FC236}">
-                <a16:creationId xmlns:a16="http://schemas.microsoft.com/office/drawing/2014/main" id="{42CEDE90-65FD-F81A-7744-9BDF4A878B90}"/>
+                <a16:creationId xmlns:a16="http://schemas.microsoft.com/office/drawing/2014/main" id="{5199C93E-5C5F-81BF-AE30-C85BC0DB6031}"/>
               </a:ext>
             </a:extLst>
           </p:cNvPr>
@@ -13842,7 +13842,7 @@
           <p:cNvPr id="4" name="Textfeld 3">
             <a:extLst>
               <a:ext uri="{FF2B5EF4-FFF2-40B4-BE49-F238E27FC236}">
-                <a16:creationId xmlns:a16="http://schemas.microsoft.com/office/drawing/2014/main" id="{DD678486-79A5-2A4E-100A-ED40D052A0E0}"/>
+                <a16:creationId xmlns:a16="http://schemas.microsoft.com/office/drawing/2014/main" id="{A287AA4D-3DBE-D7AE-EF19-55B38BE683AE}"/>
               </a:ext>
             </a:extLst>
           </p:cNvPr>
@@ -13967,7 +13967,7 @@
           <p:cNvPr id="5" name="Textfeld 4">
             <a:extLst>
               <a:ext uri="{FF2B5EF4-FFF2-40B4-BE49-F238E27FC236}">
-                <a16:creationId xmlns:a16="http://schemas.microsoft.com/office/drawing/2014/main" id="{6F764148-8FE6-1A0F-CFED-B9F793DA24E3}"/>
+                <a16:creationId xmlns:a16="http://schemas.microsoft.com/office/drawing/2014/main" id="{842D3054-CF14-C994-BBBE-63421854AB18}"/>
               </a:ext>
             </a:extLst>
           </p:cNvPr>
@@ -14090,7 +14090,7 @@
     </p:spTree>
     <p:extLst>
       <p:ext uri="{BB962C8B-B14F-4D97-AF65-F5344CB8AC3E}">
-        <p14:creationId xmlns:p14="http://schemas.microsoft.com/office/powerpoint/2010/main" val="2998170313"/>
+        <p14:creationId xmlns:p14="http://schemas.microsoft.com/office/powerpoint/2010/main" val="2205481446"/>
       </p:ext>
     </p:extLst>
   </p:cSld>
@@ -14122,7 +14122,7 @@
           <p:cNvPr id="2" name="Textfeld 1">
             <a:extLst>
               <a:ext uri="{FF2B5EF4-FFF2-40B4-BE49-F238E27FC236}">
-                <a16:creationId xmlns:a16="http://schemas.microsoft.com/office/drawing/2014/main" id="{7067ABEB-F3E0-FBB7-0EDF-31BBF371B3DF}"/>
+                <a16:creationId xmlns:a16="http://schemas.microsoft.com/office/drawing/2014/main" id="{DA1912C6-8001-47BB-C762-36DA4B9C93CB}"/>
               </a:ext>
             </a:extLst>
           </p:cNvPr>
@@ -14217,7 +14217,7 @@
           <p:cNvPr id="3" name="Textfeld 2">
             <a:extLst>
               <a:ext uri="{FF2B5EF4-FFF2-40B4-BE49-F238E27FC236}">
-                <a16:creationId xmlns:a16="http://schemas.microsoft.com/office/drawing/2014/main" id="{8C630DBF-C0A9-7399-9A03-EA3F32022BF6}"/>
+                <a16:creationId xmlns:a16="http://schemas.microsoft.com/office/drawing/2014/main" id="{1A4139DC-D473-8D7A-6F69-47A7449DC9B2}"/>
               </a:ext>
             </a:extLst>
           </p:cNvPr>
@@ -14312,7 +14312,7 @@
           <p:cNvPr id="4" name="Textfeld 3">
             <a:extLst>
               <a:ext uri="{FF2B5EF4-FFF2-40B4-BE49-F238E27FC236}">
-                <a16:creationId xmlns:a16="http://schemas.microsoft.com/office/drawing/2014/main" id="{D6B04A0B-B3F9-EC7A-C7FA-F598BFE1F1F0}"/>
+                <a16:creationId xmlns:a16="http://schemas.microsoft.com/office/drawing/2014/main" id="{972D0EAA-AB62-08D7-B112-EE9113269F73}"/>
               </a:ext>
             </a:extLst>
           </p:cNvPr>
@@ -14385,7 +14385,7 @@
           <p:cNvPr id="5" name="Textfeld 4">
             <a:extLst>
               <a:ext uri="{FF2B5EF4-FFF2-40B4-BE49-F238E27FC236}">
-                <a16:creationId xmlns:a16="http://schemas.microsoft.com/office/drawing/2014/main" id="{49EB8DAE-84D4-B548-5AAC-BD62A66259CC}"/>
+                <a16:creationId xmlns:a16="http://schemas.microsoft.com/office/drawing/2014/main" id="{C25D2F34-6B7A-E037-3038-576D1B19BBD2}"/>
               </a:ext>
             </a:extLst>
           </p:cNvPr>
@@ -14526,7 +14526,7 @@
     </p:spTree>
     <p:extLst>
       <p:ext uri="{BB962C8B-B14F-4D97-AF65-F5344CB8AC3E}">
-        <p14:creationId xmlns:p14="http://schemas.microsoft.com/office/powerpoint/2010/main" val="3956556426"/>
+        <p14:creationId xmlns:p14="http://schemas.microsoft.com/office/powerpoint/2010/main" val="3984626906"/>
       </p:ext>
     </p:extLst>
   </p:cSld>
@@ -14558,7 +14558,7 @@
           <p:cNvPr id="2" name="Textfeld 1">
             <a:extLst>
               <a:ext uri="{FF2B5EF4-FFF2-40B4-BE49-F238E27FC236}">
-                <a16:creationId xmlns:a16="http://schemas.microsoft.com/office/drawing/2014/main" id="{2CD21415-F54D-6571-6914-32F234E87027}"/>
+                <a16:creationId xmlns:a16="http://schemas.microsoft.com/office/drawing/2014/main" id="{53377EC1-ADF6-7EE5-B9AC-ABF1F855E5D1}"/>
               </a:ext>
             </a:extLst>
           </p:cNvPr>
@@ -14653,7 +14653,7 @@
           <p:cNvPr id="3" name="Textfeld 2">
             <a:extLst>
               <a:ext uri="{FF2B5EF4-FFF2-40B4-BE49-F238E27FC236}">
-                <a16:creationId xmlns:a16="http://schemas.microsoft.com/office/drawing/2014/main" id="{32008BDB-E645-665F-1AFD-01D19BE230B2}"/>
+                <a16:creationId xmlns:a16="http://schemas.microsoft.com/office/drawing/2014/main" id="{FEA05D25-1335-8525-6C90-1826F93ABF56}"/>
               </a:ext>
             </a:extLst>
           </p:cNvPr>
@@ -14778,7 +14778,7 @@
           <p:cNvPr id="4" name="Textfeld 3">
             <a:extLst>
               <a:ext uri="{FF2B5EF4-FFF2-40B4-BE49-F238E27FC236}">
-                <a16:creationId xmlns:a16="http://schemas.microsoft.com/office/drawing/2014/main" id="{5E46D8BB-C26E-945F-D100-7AEEA6C4DA1F}"/>
+                <a16:creationId xmlns:a16="http://schemas.microsoft.com/office/drawing/2014/main" id="{3E0764CD-1D78-FD68-02C9-E72788FF3847}"/>
               </a:ext>
             </a:extLst>
           </p:cNvPr>
@@ -14903,7 +14903,7 @@
           <p:cNvPr id="5" name="Textfeld 4">
             <a:extLst>
               <a:ext uri="{FF2B5EF4-FFF2-40B4-BE49-F238E27FC236}">
-                <a16:creationId xmlns:a16="http://schemas.microsoft.com/office/drawing/2014/main" id="{1DEEFDD9-274E-C6F5-CE01-B2D34CAA964C}"/>
+                <a16:creationId xmlns:a16="http://schemas.microsoft.com/office/drawing/2014/main" id="{EAEC135E-E145-480D-EA43-034DEB42DCF2}"/>
               </a:ext>
             </a:extLst>
           </p:cNvPr>
@@ -15026,7 +15026,7 @@
     </p:spTree>
     <p:extLst>
       <p:ext uri="{BB962C8B-B14F-4D97-AF65-F5344CB8AC3E}">
-        <p14:creationId xmlns:p14="http://schemas.microsoft.com/office/powerpoint/2010/main" val="1479772699"/>
+        <p14:creationId xmlns:p14="http://schemas.microsoft.com/office/powerpoint/2010/main" val="2202816170"/>
       </p:ext>
     </p:extLst>
   </p:cSld>
